--- a/lecons/F3/09_FORM4_LESSON06_Revolution_of_the_Earth.pptx
+++ b/lecons/F3/09_FORM4_LESSON06_Revolution_of_the_Earth.pptx
@@ -51,9 +51,15 @@
     <p:sldId id="299" r:id="rId45"/>
     <p:sldId id="300" r:id="rId46"/>
     <p:sldId id="301" r:id="rId47"/>
+    <p:sldId id="302" r:id="rId48"/>
+    <p:sldId id="303" r:id="rId49"/>
+    <p:sldId id="304" r:id="rId50"/>
+    <p:sldId id="305" r:id="rId51"/>
+    <p:sldId id="306" r:id="rId52"/>
+    <p:sldId id="307" r:id="rId53"/>
   </p:sldIdLst>
   <p:notesMasterIdLst>
-    <p:notesMasterId r:id="rId48"/>
+    <p:notesMasterId r:id="rId54"/>
   </p:notesMasterIdLst>
   <p:sldSz cx="12192000" cy="6858000"/>
   <p:notesSz cx="6858000" cy="12192000"/>
@@ -635,7 +641,7 @@
           <a:p>
             <a:r>
               <a:rPr lang="en-US" dirty="0"/>
-              <a:t>Listen carefully to this situation from real life. In September, it is the rainy season in Garoua and the Benue is full. In December and January, the dry Harmattan season comes. Salamatou wonders what causes this change every year. Think about it, because I am going to ask you some questions.</a:t>
+              <a:t>Listen carefully to this situation from real life. In September, it is the rainy season in Garoua and the Benue is full. In December and January, the dry Harmattan season comes. Salamatou asks: "What makes the seasons change in the same way every year?" Think about it, because I am going to ask you some questions.</a:t>
             </a:r>
             <a:endParaRPr lang="en-US" dirty="0"/>
           </a:p>
@@ -811,7 +817,7 @@
           <a:p>
             <a:r>
               <a:rPr lang="en-US" dirty="0"/>
-              <a:t>Good. Salamatou does not know why the seasons change.</a:t>
+              <a:t>Good. Salamatou does not know what causes the change of seasons every year.</a:t>
             </a:r>
             <a:endParaRPr lang="en-US" dirty="0"/>
           </a:p>
@@ -1867,7 +1873,7 @@
           <a:p>
             <a:r>
               <a:rPr lang="en-US" dirty="0"/>
-              <a:t>Here is the question for Activity 2: Where is the Sun overhead on 21 June? And on 22 December? Take one minute to think and write your answer in your rough notebook.</a:t>
+              <a:t>Here is the question for Activity 2: Where is the Sun overhead on 21 June? Take one minute to think and write your answer in your rough notebook.</a:t>
             </a:r>
             <a:endParaRPr lang="en-US" dirty="0"/>
           </a:p>
@@ -1955,7 +1961,7 @@
           <a:p>
             <a:r>
               <a:rPr lang="en-US" dirty="0"/>
-              <a:t>Let us check the answer together. 21 June: Tropic of Cancer. 22 December: Tropic of Capricorn.</a:t>
+              <a:t>Let us check the answer together. At the Tropic of Cancer.</a:t>
             </a:r>
             <a:endParaRPr lang="en-US" dirty="0"/>
           </a:p>
@@ -2043,7 +2049,7 @@
           <a:p>
             <a:r>
               <a:rPr lang="en-US" dirty="0"/>
-              <a:t>Activity 3. Look carefully at this picture: a farmer plants seeds when the rains begin. Observe every detail before I ask the question.</a:t>
+              <a:t>Here is the next question: Where is it overhead on 22 December? Take one minute to think and write your answer in your rough notebook.</a:t>
             </a:r>
             <a:endParaRPr lang="en-US" dirty="0"/>
           </a:p>
@@ -2131,7 +2137,7 @@
           <a:p>
             <a:r>
               <a:rPr lang="en-US" dirty="0"/>
-              <a:t>Here is the question for Activity 3: In June, the Sun is overhead north of the Equator. What season does Garoua have? Take one minute to think and write your answer in your rough notebook.</a:t>
+              <a:t>Let us check the answer together. At the Tropic of Capricorn.</a:t>
             </a:r>
             <a:endParaRPr lang="en-US" dirty="0"/>
           </a:p>
@@ -2219,7 +2225,7 @@
           <a:p>
             <a:r>
               <a:rPr lang="en-US" dirty="0"/>
-              <a:t>Let us check the answer together. The rainy season.</a:t>
+              <a:t>Activity 3. Look carefully at this picture: a farmer plants seeds when the rains begin. Observe every detail before I ask the question.</a:t>
             </a:r>
             <a:endParaRPr lang="en-US" dirty="0"/>
           </a:p>
@@ -2307,7 +2313,7 @@
           <a:p>
             <a:r>
               <a:rPr lang="en-US" dirty="0"/>
-              <a:t>Now we are going to copy the board summary. Write the title and the headings neatly in your notebooks. I will give you enough time for each slide, so do not rush.</a:t>
+              <a:t>Here is the question for Activity 3: In June, the Sun is overhead north of the Equator. Which season does Garoua have? Take one minute to think and write your answer in your rough notebook.</a:t>
             </a:r>
             <a:endParaRPr lang="en-US" dirty="0"/>
           </a:p>
@@ -2395,7 +2401,7 @@
           <a:p>
             <a:r>
               <a:rPr lang="en-US" dirty="0"/>
-              <a:t>Let us copy Meaning of Revolution. The revolution of the Earth is explained as follows. On this slide we have Revolution and Orbit. Write each point on a new line, with the key term first, and explain it in your own words when we revise.</a:t>
+              <a:t>Let us check the answer together. The rainy season.</a:t>
             </a:r>
             <a:endParaRPr lang="en-US" dirty="0"/>
           </a:p>
@@ -2571,7 +2577,7 @@
           <a:p>
             <a:r>
               <a:rPr lang="en-US" dirty="0"/>
-              <a:t>Let us copy Equinoxes and Solstices. The overhead Sun moves as follows during the year. On this slide we have Equinoxes and June solstice. Write each point on a new line, with the key term first, and explain it in your own words when we revise. When you finish, we go to the next slide.</a:t>
+              <a:t>Now we are going to copy the board summary. Write the title and the headings neatly in your notebooks. I will give you enough time for each slide, so do not rush.</a:t>
             </a:r>
             <a:endParaRPr lang="en-US" dirty="0"/>
           </a:p>
@@ -2659,7 +2665,7 @@
           <a:p>
             <a:r>
               <a:rPr lang="en-US" dirty="0"/>
-              <a:t>We continue with Equinoxes and Solstices. On this slide we have December solstice. Write each point on a new line, with the key term first, and explain it in your own words when we revise.</a:t>
+              <a:t>Let us copy the definitions. The key terms of this lesson are defined as follows. On this slide we have Revolution and Orbit. Write each point on a new line, with the key term first, and explain it in your own words when we revise. When you finish, we go to the next slide.</a:t>
             </a:r>
             <a:endParaRPr lang="en-US" dirty="0"/>
           </a:p>
@@ -2747,7 +2753,7 @@
           <a:p>
             <a:r>
               <a:rPr lang="en-US" dirty="0"/>
-              <a:t>Now draw this illustration in your notebook: the overhead Sun during the year. Give it a title and label it clearly.</a:t>
+              <a:t>We continue with the definitions. On this slide we have Equinox, Solstice and Leap year. Write each point on a new line, with the key term first, and explain it in your own words when we revise.</a:t>
             </a:r>
             <a:endParaRPr lang="en-US" dirty="0"/>
           </a:p>
@@ -2835,7 +2841,7 @@
           <a:p>
             <a:r>
               <a:rPr lang="en-US" dirty="0"/>
-              <a:t>Let us copy Effects of Revolution. The revolution of the Earth has the following effects. On this slide we have Seasons and Length of day. Write each point on a new line, with the key term first, and explain it in your own words when we revise. When you finish, we go to the next slide.</a:t>
+              <a:t>Let us copy Meaning and Illustration of Revolution. The revolution of the Earth is described as follows. Copy the point on Duration on the left, then draw the diagram on the right: the Earth on its orbit. Give it a title and label it clearly.</a:t>
             </a:r>
             <a:endParaRPr lang="en-US" dirty="0"/>
           </a:p>
@@ -2923,7 +2929,7 @@
           <a:p>
             <a:r>
               <a:rPr lang="en-US" dirty="0"/>
-              <a:t>We continue with Effects of Revolution. On this slide we have The year and leap year. Write each point on a new line, with the key term first, and explain it in your own words when we revise.</a:t>
+              <a:t>We continue with Meaning and Illustration of Revolution. On this slide we have Tilted axis. Write each point on a new line, with the key term first, and explain it in your own words when we revise.</a:t>
             </a:r>
             <a:endParaRPr lang="en-US" dirty="0"/>
           </a:p>
@@ -3011,7 +3017,7 @@
           <a:p>
             <a:r>
               <a:rPr lang="en-US" dirty="0"/>
-              <a:t>Now let us check what you have understood. Question 1: How long does one revolution take? Answer in your exercise book.</a:t>
+              <a:t>Copy the point on March equinox (21 March) on the left, then draw the diagram on the right: the overhead Sun during the year. Give it a title and label it clearly.</a:t>
             </a:r>
             <a:endParaRPr lang="en-US" dirty="0"/>
           </a:p>
@@ -3099,7 +3105,7 @@
           <a:p>
             <a:r>
               <a:rPr lang="en-US" dirty="0"/>
-              <a:t>The expected answer is: 365¼ days. If you got it right, well done.</a:t>
+              <a:t>We continue with Meaning and Illustration of Revolution. On this slide we have June solstice (21 June), September equinox (23 September) and December solstice (22 December). Write each point on a new line, with the key term first, and explain it in your own words when we revise.</a:t>
             </a:r>
             <a:endParaRPr lang="en-US" dirty="0"/>
           </a:p>
@@ -3187,7 +3193,7 @@
           <a:p>
             <a:r>
               <a:rPr lang="en-US" dirty="0"/>
-              <a:t>Now let us check what you have understood. Question 2: Where is the Sun overhead on 21 March? Answer in your exercise book.</a:t>
+              <a:t>Let us copy Effects of Revolution. The revolution of the Earth has the following effects. Copy the point on Seasons on the left, then draw the diagram on the right: planting at the start of the rains. Give it a title and label it clearly.</a:t>
             </a:r>
             <a:endParaRPr lang="en-US" dirty="0"/>
           </a:p>
@@ -3275,7 +3281,7 @@
           <a:p>
             <a:r>
               <a:rPr lang="en-US" dirty="0"/>
-              <a:t>The expected answer is: at the Equator. If you got it right, well done.</a:t>
+              <a:t>We continue with Effects of Revolution. On this slide we have Varying length of day and night and Midnight Sun and polar night. Write each point on a new line, with the key term first, and explain it in your own words when we revise. When you finish, we go to the next slide.</a:t>
             </a:r>
             <a:endParaRPr lang="en-US" dirty="0"/>
           </a:p>
@@ -3363,7 +3369,7 @@
           <a:p>
             <a:r>
               <a:rPr lang="en-US" dirty="0"/>
-              <a:t>For those who need more practice, fill in the blanks in your exercise book. The answers are: number 1, revolution; number 2, Cancer; number 3, leap.</a:t>
+              <a:t>We continue with Effects of Revolution. On this slide we have The year and leap year. Write each point on a new line, with the key term first, and explain it in your own words when we revise.</a:t>
             </a:r>
             <a:endParaRPr lang="en-US" dirty="0"/>
           </a:p>
@@ -3539,7 +3545,7 @@
           <a:p>
             <a:r>
               <a:rPr lang="en-US" dirty="0"/>
-              <a:t>For your homework: Cut an orange, an onion or an egg in half. Draw what you see inside and name its layers. We shall correct it at the beginning of our next lesson.</a:t>
+              <a:t>Copy the point on Different heating of the Earth on the left, then draw the diagram on the right: the Sun's rays and latitude. Give it a title and label it clearly.</a:t>
             </a:r>
             <a:endParaRPr lang="en-US" dirty="0"/>
           </a:p>
@@ -3627,7 +3633,7 @@
           <a:p>
             <a:r>
               <a:rPr lang="en-US" dirty="0"/>
-              <a:t>Our next lesson will be on Lesson 7: The Internal Structure of the Earth. Thank you for your attention, and see you next time.</a:t>
+              <a:t>Now let us check what you have understood. Question 1: How long does one revolution take? Answer in your exercise book.</a:t>
             </a:r>
             <a:endParaRPr lang="en-US" dirty="0"/>
           </a:p>
@@ -3715,7 +3721,7 @@
           <a:p>
             <a:r>
               <a:rPr lang="en-US" dirty="0"/>
-              <a:t>Let us play the bilingual game. I say a word in English, and you give me the French word. Then we do the reverse.</a:t>
+              <a:t>The expected answer is: 365¼ days. If you got it right, well done.</a:t>
             </a:r>
             <a:endParaRPr lang="en-US" dirty="0"/>
           </a:p>
@@ -3803,7 +3809,7 @@
           <a:p>
             <a:r>
               <a:rPr lang="en-US" dirty="0"/>
-              <a:t>I record this information in the official logbook of the class after the lesson.</a:t>
+              <a:t>Now let us check what you have understood. Question 2: Where is the Sun overhead on 21 March? Answer in your exercise book.</a:t>
             </a:r>
             <a:endParaRPr lang="en-US" dirty="0"/>
           </a:p>
@@ -3891,7 +3897,7 @@
           <a:p>
             <a:r>
               <a:rPr lang="en-US" dirty="0"/>
-              <a:t>I complete the second page of the logbook: the matter taught, the evaluation, the homework and the attendance.</a:t>
+              <a:t>The expected answer is: at the Equator. If you got it right, well done.</a:t>
             </a:r>
             <a:endParaRPr lang="en-US" dirty="0"/>
           </a:p>
@@ -3979,7 +3985,7 @@
           <a:p>
             <a:r>
               <a:rPr lang="en-US" dirty="0"/>
-              <a:t>This slide is for me, the teacher: it gives the timing of the lesson and what to do if the projector is not available.</a:t>
+              <a:t>For those who need more practice, fill in the blanks in your exercise book. The answers are: number 1, revolution; number 2, Cancer; number 3, leap.</a:t>
             </a:r>
             <a:endParaRPr lang="en-US" dirty="0"/>
           </a:p>
@@ -4067,7 +4073,7 @@
           <a:p>
             <a:r>
               <a:rPr lang="en-US" dirty="0"/>
-              <a:t>These are the references and picture credits used to prepare this lesson.</a:t>
+              <a:t>For your homework: Cut an orange, an onion or an egg in half. Draw what you see inside and name its layers. We shall correct it at the beginning of our next lesson.</a:t>
             </a:r>
             <a:endParaRPr lang="en-US" dirty="0"/>
           </a:p>
@@ -4091,6 +4097,270 @@
             <a:fld id="{F7021451-1387-4CA6-816F-3879F97B5CBC}" type="slidenum">
               <a:rPr lang="en-US"/>
               <a:t>46</a:t>
+            </a:fld>
+            <a:endParaRPr lang="en-US"/>
+          </a:p>
+        </p:txBody>
+      </p:sp>
+    </p:spTree>
+    <p:extLst>
+      <p:ext uri="{BB962C8B-B14F-4D97-AF65-F5344CB8AC3E}">
+        <p14:creationId xmlns:p14="http://schemas.microsoft.com/office/powerpoint/2010/main" val="1024086991"/>
+      </p:ext>
+    </p:extLst>
+  </p:cSld>
+  <p:clrMapOvr>
+    <a:masterClrMapping/>
+  </p:clrMapOvr>
+</p:notes>
+</file>
+
+<file path=ppt/notesSlides/notesSlide47.xml><?xml version="1.0" encoding="utf-8"?>
+<p:notes xmlns:a="http://schemas.openxmlformats.org/drawingml/2006/main" xmlns:r="http://schemas.openxmlformats.org/officeDocument/2006/relationships" xmlns:p="http://schemas.openxmlformats.org/presentationml/2006/main">
+  <p:cSld>
+    <p:spTree>
+      <p:nvGrpSpPr>
+        <p:cNvPr id="1" name=""/>
+        <p:cNvGrpSpPr/>
+        <p:nvPr/>
+      </p:nvGrpSpPr>
+      <p:grpSpPr>
+        <a:xfrm>
+          <a:off x="0" y="0"/>
+          <a:ext cx="0" cy="0"/>
+          <a:chOff x="0" y="0"/>
+          <a:chExt cx="0" cy="0"/>
+        </a:xfrm>
+      </p:grpSpPr>
+      <p:sp>
+        <p:nvSpPr>
+          <p:cNvPr id="2" name="Slide Image Placeholder 1"/>
+          <p:cNvSpPr>
+            <a:spLocks noGrp="1" noRot="1" noChangeAspect="1"/>
+          </p:cNvSpPr>
+          <p:nvPr>
+            <p:ph type="sldImg"/>
+          </p:nvPr>
+        </p:nvSpPr>
+        <p:spPr/>
+      </p:sp>
+      <p:sp>
+        <p:nvSpPr>
+          <p:cNvPr id="3" name="Notes Placeholder 2"/>
+          <p:cNvSpPr>
+            <a:spLocks noGrp="1"/>
+          </p:cNvSpPr>
+          <p:nvPr>
+            <p:ph type="body" idx="1"/>
+          </p:nvPr>
+        </p:nvSpPr>
+        <p:spPr/>
+        <p:txBody>
+          <a:bodyPr/>
+          <a:lstStyle/>
+          <a:p>
+            <a:r>
+              <a:rPr lang="en-US" dirty="0"/>
+              <a:t>Our next lesson will be on Lesson 7: The Internal Structure of the Earth. Thank you for your attention, and see you next time.</a:t>
+            </a:r>
+            <a:endParaRPr lang="en-US" dirty="0"/>
+          </a:p>
+        </p:txBody>
+      </p:sp>
+      <p:sp>
+        <p:nvSpPr>
+          <p:cNvPr id="4" name="Slide Number Placeholder 3"/>
+          <p:cNvSpPr>
+            <a:spLocks noGrp="1"/>
+          </p:cNvSpPr>
+          <p:nvPr>
+            <p:ph type="sldNum" sz="quarter" idx="10"/>
+          </p:nvPr>
+        </p:nvSpPr>
+        <p:spPr/>
+        <p:txBody>
+          <a:bodyPr/>
+          <a:lstStyle/>
+          <a:p>
+            <a:fld id="{F7021451-1387-4CA6-816F-3879F97B5CBC}" type="slidenum">
+              <a:rPr lang="en-US"/>
+              <a:t>47</a:t>
+            </a:fld>
+            <a:endParaRPr lang="en-US"/>
+          </a:p>
+        </p:txBody>
+      </p:sp>
+    </p:spTree>
+    <p:extLst>
+      <p:ext uri="{BB962C8B-B14F-4D97-AF65-F5344CB8AC3E}">
+        <p14:creationId xmlns:p14="http://schemas.microsoft.com/office/powerpoint/2010/main" val="1024086991"/>
+      </p:ext>
+    </p:extLst>
+  </p:cSld>
+  <p:clrMapOvr>
+    <a:masterClrMapping/>
+  </p:clrMapOvr>
+</p:notes>
+</file>
+
+<file path=ppt/notesSlides/notesSlide48.xml><?xml version="1.0" encoding="utf-8"?>
+<p:notes xmlns:a="http://schemas.openxmlformats.org/drawingml/2006/main" xmlns:r="http://schemas.openxmlformats.org/officeDocument/2006/relationships" xmlns:p="http://schemas.openxmlformats.org/presentationml/2006/main">
+  <p:cSld>
+    <p:spTree>
+      <p:nvGrpSpPr>
+        <p:cNvPr id="1" name=""/>
+        <p:cNvGrpSpPr/>
+        <p:nvPr/>
+      </p:nvGrpSpPr>
+      <p:grpSpPr>
+        <a:xfrm>
+          <a:off x="0" y="0"/>
+          <a:ext cx="0" cy="0"/>
+          <a:chOff x="0" y="0"/>
+          <a:chExt cx="0" cy="0"/>
+        </a:xfrm>
+      </p:grpSpPr>
+      <p:sp>
+        <p:nvSpPr>
+          <p:cNvPr id="2" name="Slide Image Placeholder 1"/>
+          <p:cNvSpPr>
+            <a:spLocks noGrp="1" noRot="1" noChangeAspect="1"/>
+          </p:cNvSpPr>
+          <p:nvPr>
+            <p:ph type="sldImg"/>
+          </p:nvPr>
+        </p:nvSpPr>
+        <p:spPr/>
+      </p:sp>
+      <p:sp>
+        <p:nvSpPr>
+          <p:cNvPr id="3" name="Notes Placeholder 2"/>
+          <p:cNvSpPr>
+            <a:spLocks noGrp="1"/>
+          </p:cNvSpPr>
+          <p:nvPr>
+            <p:ph type="body" idx="1"/>
+          </p:nvPr>
+        </p:nvSpPr>
+        <p:spPr/>
+        <p:txBody>
+          <a:bodyPr/>
+          <a:lstStyle/>
+          <a:p>
+            <a:r>
+              <a:rPr lang="en-US" dirty="0"/>
+              <a:t>Let us play the bilingual game. I say a word in English, and you give me the French word. Then we do the reverse.</a:t>
+            </a:r>
+            <a:endParaRPr lang="en-US" dirty="0"/>
+          </a:p>
+        </p:txBody>
+      </p:sp>
+      <p:sp>
+        <p:nvSpPr>
+          <p:cNvPr id="4" name="Slide Number Placeholder 3"/>
+          <p:cNvSpPr>
+            <a:spLocks noGrp="1"/>
+          </p:cNvSpPr>
+          <p:nvPr>
+            <p:ph type="sldNum" sz="quarter" idx="10"/>
+          </p:nvPr>
+        </p:nvSpPr>
+        <p:spPr/>
+        <p:txBody>
+          <a:bodyPr/>
+          <a:lstStyle/>
+          <a:p>
+            <a:fld id="{F7021451-1387-4CA6-816F-3879F97B5CBC}" type="slidenum">
+              <a:rPr lang="en-US"/>
+              <a:t>48</a:t>
+            </a:fld>
+            <a:endParaRPr lang="en-US"/>
+          </a:p>
+        </p:txBody>
+      </p:sp>
+    </p:spTree>
+    <p:extLst>
+      <p:ext uri="{BB962C8B-B14F-4D97-AF65-F5344CB8AC3E}">
+        <p14:creationId xmlns:p14="http://schemas.microsoft.com/office/powerpoint/2010/main" val="1024086991"/>
+      </p:ext>
+    </p:extLst>
+  </p:cSld>
+  <p:clrMapOvr>
+    <a:masterClrMapping/>
+  </p:clrMapOvr>
+</p:notes>
+</file>
+
+<file path=ppt/notesSlides/notesSlide49.xml><?xml version="1.0" encoding="utf-8"?>
+<p:notes xmlns:a="http://schemas.openxmlformats.org/drawingml/2006/main" xmlns:r="http://schemas.openxmlformats.org/officeDocument/2006/relationships" xmlns:p="http://schemas.openxmlformats.org/presentationml/2006/main">
+  <p:cSld>
+    <p:spTree>
+      <p:nvGrpSpPr>
+        <p:cNvPr id="1" name=""/>
+        <p:cNvGrpSpPr/>
+        <p:nvPr/>
+      </p:nvGrpSpPr>
+      <p:grpSpPr>
+        <a:xfrm>
+          <a:off x="0" y="0"/>
+          <a:ext cx="0" cy="0"/>
+          <a:chOff x="0" y="0"/>
+          <a:chExt cx="0" cy="0"/>
+        </a:xfrm>
+      </p:grpSpPr>
+      <p:sp>
+        <p:nvSpPr>
+          <p:cNvPr id="2" name="Slide Image Placeholder 1"/>
+          <p:cNvSpPr>
+            <a:spLocks noGrp="1" noRot="1" noChangeAspect="1"/>
+          </p:cNvSpPr>
+          <p:nvPr>
+            <p:ph type="sldImg"/>
+          </p:nvPr>
+        </p:nvSpPr>
+        <p:spPr/>
+      </p:sp>
+      <p:sp>
+        <p:nvSpPr>
+          <p:cNvPr id="3" name="Notes Placeholder 2"/>
+          <p:cNvSpPr>
+            <a:spLocks noGrp="1"/>
+          </p:cNvSpPr>
+          <p:nvPr>
+            <p:ph type="body" idx="1"/>
+          </p:nvPr>
+        </p:nvSpPr>
+        <p:spPr/>
+        <p:txBody>
+          <a:bodyPr/>
+          <a:lstStyle/>
+          <a:p>
+            <a:r>
+              <a:rPr lang="en-US" dirty="0"/>
+              <a:t>I record this information in the official logbook of the class after the lesson.</a:t>
+            </a:r>
+            <a:endParaRPr lang="en-US" dirty="0"/>
+          </a:p>
+        </p:txBody>
+      </p:sp>
+      <p:sp>
+        <p:nvSpPr>
+          <p:cNvPr id="4" name="Slide Number Placeholder 3"/>
+          <p:cNvSpPr>
+            <a:spLocks noGrp="1"/>
+          </p:cNvSpPr>
+          <p:nvPr>
+            <p:ph type="sldNum" sz="quarter" idx="10"/>
+          </p:nvPr>
+        </p:nvSpPr>
+        <p:spPr/>
+        <p:txBody>
+          <a:bodyPr/>
+          <a:lstStyle/>
+          <a:p>
+            <a:fld id="{F7021451-1387-4CA6-816F-3879F97B5CBC}" type="slidenum">
+              <a:rPr lang="en-US"/>
+              <a:t>49</a:t>
             </a:fld>
             <a:endParaRPr lang="en-US"/>
           </a:p>
@@ -4179,6 +4449,270 @@
             <a:fld id="{F7021451-1387-4CA6-816F-3879F97B5CBC}" type="slidenum">
               <a:rPr lang="en-US"/>
               <a:t>5</a:t>
+            </a:fld>
+            <a:endParaRPr lang="en-US"/>
+          </a:p>
+        </p:txBody>
+      </p:sp>
+    </p:spTree>
+    <p:extLst>
+      <p:ext uri="{BB962C8B-B14F-4D97-AF65-F5344CB8AC3E}">
+        <p14:creationId xmlns:p14="http://schemas.microsoft.com/office/powerpoint/2010/main" val="1024086991"/>
+      </p:ext>
+    </p:extLst>
+  </p:cSld>
+  <p:clrMapOvr>
+    <a:masterClrMapping/>
+  </p:clrMapOvr>
+</p:notes>
+</file>
+
+<file path=ppt/notesSlides/notesSlide50.xml><?xml version="1.0" encoding="utf-8"?>
+<p:notes xmlns:a="http://schemas.openxmlformats.org/drawingml/2006/main" xmlns:r="http://schemas.openxmlformats.org/officeDocument/2006/relationships" xmlns:p="http://schemas.openxmlformats.org/presentationml/2006/main">
+  <p:cSld>
+    <p:spTree>
+      <p:nvGrpSpPr>
+        <p:cNvPr id="1" name=""/>
+        <p:cNvGrpSpPr/>
+        <p:nvPr/>
+      </p:nvGrpSpPr>
+      <p:grpSpPr>
+        <a:xfrm>
+          <a:off x="0" y="0"/>
+          <a:ext cx="0" cy="0"/>
+          <a:chOff x="0" y="0"/>
+          <a:chExt cx="0" cy="0"/>
+        </a:xfrm>
+      </p:grpSpPr>
+      <p:sp>
+        <p:nvSpPr>
+          <p:cNvPr id="2" name="Slide Image Placeholder 1"/>
+          <p:cNvSpPr>
+            <a:spLocks noGrp="1" noRot="1" noChangeAspect="1"/>
+          </p:cNvSpPr>
+          <p:nvPr>
+            <p:ph type="sldImg"/>
+          </p:nvPr>
+        </p:nvSpPr>
+        <p:spPr/>
+      </p:sp>
+      <p:sp>
+        <p:nvSpPr>
+          <p:cNvPr id="3" name="Notes Placeholder 2"/>
+          <p:cNvSpPr>
+            <a:spLocks noGrp="1"/>
+          </p:cNvSpPr>
+          <p:nvPr>
+            <p:ph type="body" idx="1"/>
+          </p:nvPr>
+        </p:nvSpPr>
+        <p:spPr/>
+        <p:txBody>
+          <a:bodyPr/>
+          <a:lstStyle/>
+          <a:p>
+            <a:r>
+              <a:rPr lang="en-US" dirty="0"/>
+              <a:t>I complete the second page of the logbook: the matter taught, the evaluation, the homework and the attendance.</a:t>
+            </a:r>
+            <a:endParaRPr lang="en-US" dirty="0"/>
+          </a:p>
+        </p:txBody>
+      </p:sp>
+      <p:sp>
+        <p:nvSpPr>
+          <p:cNvPr id="4" name="Slide Number Placeholder 3"/>
+          <p:cNvSpPr>
+            <a:spLocks noGrp="1"/>
+          </p:cNvSpPr>
+          <p:nvPr>
+            <p:ph type="sldNum" sz="quarter" idx="10"/>
+          </p:nvPr>
+        </p:nvSpPr>
+        <p:spPr/>
+        <p:txBody>
+          <a:bodyPr/>
+          <a:lstStyle/>
+          <a:p>
+            <a:fld id="{F7021451-1387-4CA6-816F-3879F97B5CBC}" type="slidenum">
+              <a:rPr lang="en-US"/>
+              <a:t>50</a:t>
+            </a:fld>
+            <a:endParaRPr lang="en-US"/>
+          </a:p>
+        </p:txBody>
+      </p:sp>
+    </p:spTree>
+    <p:extLst>
+      <p:ext uri="{BB962C8B-B14F-4D97-AF65-F5344CB8AC3E}">
+        <p14:creationId xmlns:p14="http://schemas.microsoft.com/office/powerpoint/2010/main" val="1024086991"/>
+      </p:ext>
+    </p:extLst>
+  </p:cSld>
+  <p:clrMapOvr>
+    <a:masterClrMapping/>
+  </p:clrMapOvr>
+</p:notes>
+</file>
+
+<file path=ppt/notesSlides/notesSlide51.xml><?xml version="1.0" encoding="utf-8"?>
+<p:notes xmlns:a="http://schemas.openxmlformats.org/drawingml/2006/main" xmlns:r="http://schemas.openxmlformats.org/officeDocument/2006/relationships" xmlns:p="http://schemas.openxmlformats.org/presentationml/2006/main">
+  <p:cSld>
+    <p:spTree>
+      <p:nvGrpSpPr>
+        <p:cNvPr id="1" name=""/>
+        <p:cNvGrpSpPr/>
+        <p:nvPr/>
+      </p:nvGrpSpPr>
+      <p:grpSpPr>
+        <a:xfrm>
+          <a:off x="0" y="0"/>
+          <a:ext cx="0" cy="0"/>
+          <a:chOff x="0" y="0"/>
+          <a:chExt cx="0" cy="0"/>
+        </a:xfrm>
+      </p:grpSpPr>
+      <p:sp>
+        <p:nvSpPr>
+          <p:cNvPr id="2" name="Slide Image Placeholder 1"/>
+          <p:cNvSpPr>
+            <a:spLocks noGrp="1" noRot="1" noChangeAspect="1"/>
+          </p:cNvSpPr>
+          <p:nvPr>
+            <p:ph type="sldImg"/>
+          </p:nvPr>
+        </p:nvSpPr>
+        <p:spPr/>
+      </p:sp>
+      <p:sp>
+        <p:nvSpPr>
+          <p:cNvPr id="3" name="Notes Placeholder 2"/>
+          <p:cNvSpPr>
+            <a:spLocks noGrp="1"/>
+          </p:cNvSpPr>
+          <p:nvPr>
+            <p:ph type="body" idx="1"/>
+          </p:nvPr>
+        </p:nvSpPr>
+        <p:spPr/>
+        <p:txBody>
+          <a:bodyPr/>
+          <a:lstStyle/>
+          <a:p>
+            <a:r>
+              <a:rPr lang="en-US" dirty="0"/>
+              <a:t>This slide is for me, the teacher: it gives the timing of the lesson and what to do if the projector is not available.</a:t>
+            </a:r>
+            <a:endParaRPr lang="en-US" dirty="0"/>
+          </a:p>
+        </p:txBody>
+      </p:sp>
+      <p:sp>
+        <p:nvSpPr>
+          <p:cNvPr id="4" name="Slide Number Placeholder 3"/>
+          <p:cNvSpPr>
+            <a:spLocks noGrp="1"/>
+          </p:cNvSpPr>
+          <p:nvPr>
+            <p:ph type="sldNum" sz="quarter" idx="10"/>
+          </p:nvPr>
+        </p:nvSpPr>
+        <p:spPr/>
+        <p:txBody>
+          <a:bodyPr/>
+          <a:lstStyle/>
+          <a:p>
+            <a:fld id="{F7021451-1387-4CA6-816F-3879F97B5CBC}" type="slidenum">
+              <a:rPr lang="en-US"/>
+              <a:t>51</a:t>
+            </a:fld>
+            <a:endParaRPr lang="en-US"/>
+          </a:p>
+        </p:txBody>
+      </p:sp>
+    </p:spTree>
+    <p:extLst>
+      <p:ext uri="{BB962C8B-B14F-4D97-AF65-F5344CB8AC3E}">
+        <p14:creationId xmlns:p14="http://schemas.microsoft.com/office/powerpoint/2010/main" val="1024086991"/>
+      </p:ext>
+    </p:extLst>
+  </p:cSld>
+  <p:clrMapOvr>
+    <a:masterClrMapping/>
+  </p:clrMapOvr>
+</p:notes>
+</file>
+
+<file path=ppt/notesSlides/notesSlide52.xml><?xml version="1.0" encoding="utf-8"?>
+<p:notes xmlns:a="http://schemas.openxmlformats.org/drawingml/2006/main" xmlns:r="http://schemas.openxmlformats.org/officeDocument/2006/relationships" xmlns:p="http://schemas.openxmlformats.org/presentationml/2006/main">
+  <p:cSld>
+    <p:spTree>
+      <p:nvGrpSpPr>
+        <p:cNvPr id="1" name=""/>
+        <p:cNvGrpSpPr/>
+        <p:nvPr/>
+      </p:nvGrpSpPr>
+      <p:grpSpPr>
+        <a:xfrm>
+          <a:off x="0" y="0"/>
+          <a:ext cx="0" cy="0"/>
+          <a:chOff x="0" y="0"/>
+          <a:chExt cx="0" cy="0"/>
+        </a:xfrm>
+      </p:grpSpPr>
+      <p:sp>
+        <p:nvSpPr>
+          <p:cNvPr id="2" name="Slide Image Placeholder 1"/>
+          <p:cNvSpPr>
+            <a:spLocks noGrp="1" noRot="1" noChangeAspect="1"/>
+          </p:cNvSpPr>
+          <p:nvPr>
+            <p:ph type="sldImg"/>
+          </p:nvPr>
+        </p:nvSpPr>
+        <p:spPr/>
+      </p:sp>
+      <p:sp>
+        <p:nvSpPr>
+          <p:cNvPr id="3" name="Notes Placeholder 2"/>
+          <p:cNvSpPr>
+            <a:spLocks noGrp="1"/>
+          </p:cNvSpPr>
+          <p:nvPr>
+            <p:ph type="body" idx="1"/>
+          </p:nvPr>
+        </p:nvSpPr>
+        <p:spPr/>
+        <p:txBody>
+          <a:bodyPr/>
+          <a:lstStyle/>
+          <a:p>
+            <a:r>
+              <a:rPr lang="en-US" dirty="0"/>
+              <a:t>These are the references and picture credits used to prepare this lesson.</a:t>
+            </a:r>
+            <a:endParaRPr lang="en-US" dirty="0"/>
+          </a:p>
+        </p:txBody>
+      </p:sp>
+      <p:sp>
+        <p:nvSpPr>
+          <p:cNvPr id="4" name="Slide Number Placeholder 3"/>
+          <p:cNvSpPr>
+            <a:spLocks noGrp="1"/>
+          </p:cNvSpPr>
+          <p:nvPr>
+            <p:ph type="sldNum" sz="quarter" idx="10"/>
+          </p:nvPr>
+        </p:nvSpPr>
+        <p:spPr/>
+        <p:txBody>
+          <a:bodyPr/>
+          <a:lstStyle/>
+          <a:p>
+            <a:fld id="{F7021451-1387-4CA6-816F-3879F97B5CBC}" type="slidenum">
+              <a:rPr lang="en-US"/>
+              <a:t>52</a:t>
             </a:fld>
             <a:endParaRPr lang="en-US"/>
           </a:p>
@@ -5971,7 +6505,7 @@
                 <a:ea typeface="Times New Roman" pitchFamily="34" charset="-122"/>
                 <a:cs typeface="Times New Roman" pitchFamily="34" charset="-120"/>
               </a:rPr>
-              <a:t>In September, it is the rainy season in Garoua and the Benue is full. In December and January, the dry Harmattan season comes. Salamatou wonders what causes this change every year.</a:t>
+              <a:t>In September, it is the rainy season in Garoua and the Benue is full. In December and January, the dry Harmattan season comes. Salamatou asks: "What makes the seasons change in the same way every year?"</a:t>
             </a:r>
             <a:endParaRPr lang="en-US" sz="4000" dirty="0"/>
           </a:p>
@@ -6409,7 +6943,7 @@
                 <a:ea typeface="Times New Roman" pitchFamily="34" charset="-122"/>
                 <a:cs typeface="Times New Roman" pitchFamily="34" charset="-120"/>
               </a:rPr>
-              <a:t>Salamatou does not know why the seasons change.</a:t>
+              <a:t>Salamatou does not know what causes the change of seasons every year.</a:t>
             </a:r>
             <a:endParaRPr lang="en-US" sz="4000" dirty="0"/>
           </a:p>
@@ -9082,7 +9616,7 @@
                 <a:ea typeface="Calibri" pitchFamily="34" charset="-122"/>
                 <a:cs typeface="Calibri" pitchFamily="34" charset="-120"/>
               </a:rPr>
-              <a:t>2. EQUINOXES AND SOLSTICES</a:t>
+              <a:t>1. MEANING OF REVOLUTION</a:t>
             </a:r>
             <a:endParaRPr lang="en-US" sz="1400" dirty="0"/>
           </a:p>
@@ -9296,7 +9830,7 @@
                 <a:ea typeface="Calibri" pitchFamily="34" charset="-122"/>
                 <a:cs typeface="Calibri" pitchFamily="34" charset="-120"/>
               </a:rPr>
-              <a:t>2. EQUINOXES AND SOLSTICES</a:t>
+              <a:t>1. MEANING OF REVOLUTION</a:t>
             </a:r>
             <a:endParaRPr lang="en-US" sz="1400" dirty="0"/>
           </a:p>
@@ -9361,7 +9895,7 @@
                 <a:ea typeface="Times New Roman" pitchFamily="34" charset="-122"/>
                 <a:cs typeface="Times New Roman" pitchFamily="34" charset="-120"/>
               </a:rPr>
-              <a:t>Activity 2: Question</a:t>
+              <a:t>Activity 2: Question 1</a:t>
             </a:r>
             <a:endParaRPr lang="en-US" sz="3600" dirty="0"/>
           </a:p>
@@ -9403,7 +9937,7 @@
                 <a:ea typeface="Times New Roman" pitchFamily="34" charset="-122"/>
                 <a:cs typeface="Times New Roman" pitchFamily="34" charset="-120"/>
               </a:rPr>
-              <a:t>Where is the Sun overhead on 21 June? And on 22 December?</a:t>
+              <a:t>Where is the Sun overhead on 21 June?</a:t>
             </a:r>
             <a:endParaRPr lang="en-US" sz="4000" dirty="0"/>
           </a:p>
@@ -9515,7 +10049,7 @@
                 <a:ea typeface="Calibri" pitchFamily="34" charset="-122"/>
                 <a:cs typeface="Calibri" pitchFamily="34" charset="-120"/>
               </a:rPr>
-              <a:t>2. EQUINOXES AND SOLSTICES</a:t>
+              <a:t>1. MEANING OF REVOLUTION</a:t>
             </a:r>
             <a:endParaRPr lang="en-US" sz="1400" dirty="0"/>
           </a:p>
@@ -9580,7 +10114,7 @@
                 <a:ea typeface="Times New Roman" pitchFamily="34" charset="-122"/>
                 <a:cs typeface="Times New Roman" pitchFamily="34" charset="-120"/>
               </a:rPr>
-              <a:t>Activity 2: Answer</a:t>
+              <a:t>Activity 2: Answer 1</a:t>
             </a:r>
             <a:endParaRPr lang="en-US" sz="3600" dirty="0"/>
           </a:p>
@@ -9622,7 +10156,7 @@
                 <a:ea typeface="Times New Roman" pitchFamily="34" charset="-122"/>
                 <a:cs typeface="Times New Roman" pitchFamily="34" charset="-120"/>
               </a:rPr>
-              <a:t>21 June: Tropic of Cancer. 22 December: Tropic of Capricorn.</a:t>
+              <a:t>At the Tropic of Cancer.</a:t>
             </a:r>
             <a:endParaRPr lang="en-US" sz="4000" dirty="0"/>
           </a:p>
@@ -9734,54 +10268,15 @@
                 <a:ea typeface="Calibri" pitchFamily="34" charset="-122"/>
                 <a:cs typeface="Calibri" pitchFamily="34" charset="-120"/>
               </a:rPr>
-              <a:t>3. EFFECTS OF REVOLUTION</a:t>
+              <a:t>1. MEANING OF REVOLUTION</a:t>
             </a:r>
             <a:endParaRPr lang="en-US" sz="1400" dirty="0"/>
-          </a:p>
-        </p:txBody>
-      </p:sp>
-      <p:sp>
-        <p:nvSpPr>
-          <p:cNvPr id="3" name="Text 1"/>
-          <p:cNvSpPr/>
-          <p:nvPr/>
-        </p:nvSpPr>
-        <p:spPr>
-          <a:xfrm>
-            <a:off x="457200" y="1005840"/>
-            <a:ext cx="11277295" cy="731520"/>
-          </a:xfrm>
-          <a:prstGeom prst="rect">
-            <a:avLst/>
-          </a:prstGeom>
-          <a:noFill/>
-          <a:ln/>
-        </p:spPr>
-        <p:txBody>
-          <a:bodyPr wrap="square" lIns="0" tIns="0" rIns="0" bIns="0" rtlCol="0" anchor="ctr"/>
-          <a:lstStyle/>
-          <a:p>
-            <a:pPr algn="ctr" indent="0" marL="0">
-              <a:buNone/>
-            </a:pPr>
-            <a:r>
-              <a:rPr lang="en-US" sz="3600" b="1" dirty="0">
-                <a:solidFill>
-                  <a:srgbClr val="990011"/>
-                </a:solidFill>
-                <a:latin typeface="Times New Roman" pitchFamily="34" charset="0"/>
-                <a:ea typeface="Times New Roman" pitchFamily="34" charset="-122"/>
-                <a:cs typeface="Times New Roman" pitchFamily="34" charset="-120"/>
-              </a:rPr>
-              <a:t>Activity 3</a:t>
-            </a:r>
-            <a:endParaRPr lang="en-US" sz="3600" dirty="0"/>
           </a:p>
         </p:txBody>
       </p:sp>
       <p:pic>
         <p:nvPicPr>
-          <p:cNvPr id="4" name="Image 0" descr="/home/claude/f4/img/v2/f4_rainyseason.jpg">    </p:cNvPr>
+          <p:cNvPr id="3" name="Image 0" descr="/home/claude/f4/img/minesec_sheet.png">    </p:cNvPr>
           <p:cNvPicPr>
             <a:picLocks noChangeAspect="1"/>
           </p:cNvPicPr>
@@ -9795,8 +10290,8 @@
         </p:blipFill>
         <p:spPr>
           <a:xfrm>
-            <a:off x="2250369" y="1783080"/>
-            <a:ext cx="7690957" cy="4270248"/>
+            <a:off x="0" y="658368"/>
+            <a:ext cx="5120640" cy="5833872"/>
           </a:xfrm>
           <a:prstGeom prst="rect">
             <a:avLst/>
@@ -9805,14 +10300,14 @@
       </p:pic>
       <p:sp>
         <p:nvSpPr>
-          <p:cNvPr id="5" name="Text 2"/>
+          <p:cNvPr id="4" name="Text 1"/>
           <p:cNvSpPr/>
           <p:nvPr/>
         </p:nvSpPr>
         <p:spPr>
           <a:xfrm>
-            <a:off x="457200" y="6089904"/>
-            <a:ext cx="11277295" cy="347472"/>
+            <a:off x="5349240" y="1005840"/>
+            <a:ext cx="6522415" cy="731520"/>
           </a:xfrm>
           <a:prstGeom prst="rect">
             <a:avLst/>
@@ -9821,24 +10316,68 @@
           <a:ln/>
         </p:spPr>
         <p:txBody>
-          <a:bodyPr wrap="square" lIns="0" tIns="0" rIns="0" bIns="0" rtlCol="0" anchor="ctr"/>
+          <a:bodyPr wrap="square" lIns="0" tIns="0" rIns="0" bIns="0" rtlCol="0" anchor="ctr">
+            <a:normAutofit/>
+          </a:bodyPr>
           <a:lstStyle/>
           <a:p>
             <a:pPr algn="ctr" indent="0" marL="0">
               <a:buNone/>
             </a:pPr>
             <a:r>
-              <a:rPr lang="en-US" sz="1800" i="1" dirty="0">
-                <a:solidFill>
-                  <a:srgbClr val="555555"/>
+              <a:rPr lang="en-US" sz="3600" b="1" dirty="0">
+                <a:solidFill>
+                  <a:srgbClr val="990011"/>
                 </a:solidFill>
                 <a:latin typeface="Times New Roman" pitchFamily="34" charset="0"/>
                 <a:ea typeface="Times New Roman" pitchFamily="34" charset="-122"/>
                 <a:cs typeface="Times New Roman" pitchFamily="34" charset="-120"/>
               </a:rPr>
-              <a:t>A farmer plants seeds when the rains begin.</a:t>
-            </a:r>
-            <a:endParaRPr lang="en-US" sz="1800" dirty="0"/>
+              <a:t>Activity 2: Question 2</a:t>
+            </a:r>
+            <a:endParaRPr lang="en-US" sz="3600" dirty="0"/>
+          </a:p>
+        </p:txBody>
+      </p:sp>
+      <p:sp>
+        <p:nvSpPr>
+          <p:cNvPr id="5" name="Text 2"/>
+          <p:cNvSpPr/>
+          <p:nvPr/>
+        </p:nvSpPr>
+        <p:spPr>
+          <a:xfrm>
+            <a:off x="5349240" y="1783080"/>
+            <a:ext cx="6522415" cy="4663440"/>
+          </a:xfrm>
+          <a:prstGeom prst="rect">
+            <a:avLst/>
+          </a:prstGeom>
+          <a:noFill/>
+          <a:ln/>
+        </p:spPr>
+        <p:txBody>
+          <a:bodyPr wrap="square" lIns="0" tIns="0" rIns="0" bIns="0" rtlCol="0" anchor="t"/>
+          <a:lstStyle/>
+          <a:p>
+            <a:pPr algn="l" indent="0" marL="0">
+              <a:spcAft>
+                <a:spcPts val="800"/>
+              </a:spcAft>
+              <a:buNone/>
+            </a:pPr>
+            <a:r>
+              <a:rPr lang="en-US" sz="4000" dirty="0">
+                <a:solidFill>
+                  <a:srgbClr val="111111"/>
+                </a:solidFill>
+                <a:latin typeface="Times New Roman" pitchFamily="34" charset="0"/>
+                <a:ea typeface="Times New Roman" pitchFamily="34" charset="-122"/>
+                <a:cs typeface="Times New Roman" pitchFamily="34" charset="-120"/>
+              </a:rPr>
+              <a:t>Where is it overhead on 22 December?</a:t>
+            </a:r>
+            <a:endParaRPr lang="en-US" sz="4000" dirty="0"/>
           </a:p>
         </p:txBody>
       </p:sp>
@@ -9948,7 +10487,7 @@
                 <a:ea typeface="Calibri" pitchFamily="34" charset="-122"/>
                 <a:cs typeface="Calibri" pitchFamily="34" charset="-120"/>
               </a:rPr>
-              <a:t>3. EFFECTS OF REVOLUTION</a:t>
+              <a:t>1. MEANING OF REVOLUTION</a:t>
             </a:r>
             <a:endParaRPr lang="en-US" sz="1400" dirty="0"/>
           </a:p>
@@ -10013,7 +10552,7 @@
                 <a:ea typeface="Times New Roman" pitchFamily="34" charset="-122"/>
                 <a:cs typeface="Times New Roman" pitchFamily="34" charset="-120"/>
               </a:rPr>
-              <a:t>Activity 3: Question</a:t>
+              <a:t>Activity 2: Answer 2</a:t>
             </a:r>
             <a:endParaRPr lang="en-US" sz="3600" dirty="0"/>
           </a:p>
@@ -10055,7 +10594,7 @@
                 <a:ea typeface="Times New Roman" pitchFamily="34" charset="-122"/>
                 <a:cs typeface="Times New Roman" pitchFamily="34" charset="-120"/>
               </a:rPr>
-              <a:t>In June, the Sun is overhead north of the Equator. What season does Garoua have?</a:t>
+              <a:t>At the Tropic of Capricorn.</a:t>
             </a:r>
             <a:endParaRPr lang="en-US" sz="4000" dirty="0"/>
           </a:p>
@@ -10167,15 +10706,54 @@
                 <a:ea typeface="Calibri" pitchFamily="34" charset="-122"/>
                 <a:cs typeface="Calibri" pitchFamily="34" charset="-120"/>
               </a:rPr>
-              <a:t>3. EFFECTS OF REVOLUTION</a:t>
+              <a:t>2. EFFECTS OF REVOLUTION</a:t>
             </a:r>
             <a:endParaRPr lang="en-US" sz="1400" dirty="0"/>
+          </a:p>
+        </p:txBody>
+      </p:sp>
+      <p:sp>
+        <p:nvSpPr>
+          <p:cNvPr id="3" name="Text 1"/>
+          <p:cNvSpPr/>
+          <p:nvPr/>
+        </p:nvSpPr>
+        <p:spPr>
+          <a:xfrm>
+            <a:off x="457200" y="1005840"/>
+            <a:ext cx="11277295" cy="731520"/>
+          </a:xfrm>
+          <a:prstGeom prst="rect">
+            <a:avLst/>
+          </a:prstGeom>
+          <a:noFill/>
+          <a:ln/>
+        </p:spPr>
+        <p:txBody>
+          <a:bodyPr wrap="square" lIns="0" tIns="0" rIns="0" bIns="0" rtlCol="0" anchor="ctr"/>
+          <a:lstStyle/>
+          <a:p>
+            <a:pPr algn="ctr" indent="0" marL="0">
+              <a:buNone/>
+            </a:pPr>
+            <a:r>
+              <a:rPr lang="en-US" sz="3600" b="1" dirty="0">
+                <a:solidFill>
+                  <a:srgbClr val="990011"/>
+                </a:solidFill>
+                <a:latin typeface="Times New Roman" pitchFamily="34" charset="0"/>
+                <a:ea typeface="Times New Roman" pitchFamily="34" charset="-122"/>
+                <a:cs typeface="Times New Roman" pitchFamily="34" charset="-120"/>
+              </a:rPr>
+              <a:t>Activity 3</a:t>
+            </a:r>
+            <a:endParaRPr lang="en-US" sz="3600" dirty="0"/>
           </a:p>
         </p:txBody>
       </p:sp>
       <p:pic>
         <p:nvPicPr>
-          <p:cNvPr id="3" name="Image 0" descr="/home/claude/f4/img/minesec_sheet.png">    </p:cNvPr>
+          <p:cNvPr id="4" name="Image 0" descr="/home/claude/f4/img/v2/f4_rainyseason.jpg">    </p:cNvPr>
           <p:cNvPicPr>
             <a:picLocks noChangeAspect="1"/>
           </p:cNvPicPr>
@@ -10189,8 +10767,8 @@
         </p:blipFill>
         <p:spPr>
           <a:xfrm>
-            <a:off x="0" y="658368"/>
-            <a:ext cx="5120640" cy="5833872"/>
+            <a:off x="2250369" y="1783080"/>
+            <a:ext cx="7690957" cy="4270248"/>
           </a:xfrm>
           <a:prstGeom prst="rect">
             <a:avLst/>
@@ -10199,14 +10777,14 @@
       </p:pic>
       <p:sp>
         <p:nvSpPr>
-          <p:cNvPr id="4" name="Text 1"/>
+          <p:cNvPr id="5" name="Text 2"/>
           <p:cNvSpPr/>
           <p:nvPr/>
         </p:nvSpPr>
         <p:spPr>
           <a:xfrm>
-            <a:off x="5349240" y="1005840"/>
-            <a:ext cx="6522415" cy="731520"/>
+            <a:off x="457200" y="6089904"/>
+            <a:ext cx="11277295" cy="347472"/>
           </a:xfrm>
           <a:prstGeom prst="rect">
             <a:avLst/>
@@ -10215,68 +10793,24 @@
           <a:ln/>
         </p:spPr>
         <p:txBody>
-          <a:bodyPr wrap="square" lIns="0" tIns="0" rIns="0" bIns="0" rtlCol="0" anchor="ctr">
-            <a:normAutofit/>
-          </a:bodyPr>
+          <a:bodyPr wrap="square" lIns="0" tIns="0" rIns="0" bIns="0" rtlCol="0" anchor="ctr"/>
           <a:lstStyle/>
           <a:p>
             <a:pPr algn="ctr" indent="0" marL="0">
               <a:buNone/>
             </a:pPr>
             <a:r>
-              <a:rPr lang="en-US" sz="3600" b="1" dirty="0">
-                <a:solidFill>
-                  <a:srgbClr val="990011"/>
+              <a:rPr lang="en-US" sz="1800" i="1" dirty="0">
+                <a:solidFill>
+                  <a:srgbClr val="555555"/>
                 </a:solidFill>
                 <a:latin typeface="Times New Roman" pitchFamily="34" charset="0"/>
                 <a:ea typeface="Times New Roman" pitchFamily="34" charset="-122"/>
                 <a:cs typeface="Times New Roman" pitchFamily="34" charset="-120"/>
               </a:rPr>
-              <a:t>Activity 3: Answer</a:t>
-            </a:r>
-            <a:endParaRPr lang="en-US" sz="3600" dirty="0"/>
-          </a:p>
-        </p:txBody>
-      </p:sp>
-      <p:sp>
-        <p:nvSpPr>
-          <p:cNvPr id="5" name="Text 2"/>
-          <p:cNvSpPr/>
-          <p:nvPr/>
-        </p:nvSpPr>
-        <p:spPr>
-          <a:xfrm>
-            <a:off x="5349240" y="1783080"/>
-            <a:ext cx="6522415" cy="4663440"/>
-          </a:xfrm>
-          <a:prstGeom prst="rect">
-            <a:avLst/>
-          </a:prstGeom>
-          <a:noFill/>
-          <a:ln/>
-        </p:spPr>
-        <p:txBody>
-          <a:bodyPr wrap="square" lIns="0" tIns="0" rIns="0" bIns="0" rtlCol="0" anchor="t"/>
-          <a:lstStyle/>
-          <a:p>
-            <a:pPr algn="l" indent="0" marL="0">
-              <a:spcAft>
-                <a:spcPts val="800"/>
-              </a:spcAft>
-              <a:buNone/>
-            </a:pPr>
-            <a:r>
-              <a:rPr lang="en-US" sz="4000" dirty="0">
-                <a:solidFill>
-                  <a:srgbClr val="111111"/>
-                </a:solidFill>
-                <a:latin typeface="Times New Roman" pitchFamily="34" charset="0"/>
-                <a:ea typeface="Times New Roman" pitchFamily="34" charset="-122"/>
-                <a:cs typeface="Times New Roman" pitchFamily="34" charset="-120"/>
-              </a:rPr>
-              <a:t>The rainy season.</a:t>
-            </a:r>
-            <a:endParaRPr lang="en-US" sz="4000" dirty="0"/>
+              <a:t>A farmer plants seeds when the rains begin.</a:t>
+            </a:r>
+            <a:endParaRPr lang="en-US" sz="1800" dirty="0"/>
           </a:p>
         </p:txBody>
       </p:sp>
@@ -10386,7 +10920,7 @@
                 <a:ea typeface="Calibri" pitchFamily="34" charset="-122"/>
                 <a:cs typeface="Calibri" pitchFamily="34" charset="-120"/>
               </a:rPr>
-              <a:t>BOARD SUMMARY</a:t>
+              <a:t>2. EFFECTS OF REVOLUTION</a:t>
             </a:r>
             <a:endParaRPr lang="en-US" sz="1400" dirty="0"/>
           </a:p>
@@ -10451,7 +10985,7 @@
                 <a:ea typeface="Times New Roman" pitchFamily="34" charset="-122"/>
                 <a:cs typeface="Times New Roman" pitchFamily="34" charset="-120"/>
               </a:rPr>
-              <a:t>Board Summary</a:t>
+              <a:t>Activity 3: Question</a:t>
             </a:r>
             <a:endParaRPr lang="en-US" sz="3600" dirty="0"/>
           </a:p>
@@ -10485,7 +11019,7 @@
               <a:buNone/>
             </a:pPr>
             <a:r>
-              <a:rPr lang="en-US" sz="4000" b="1" dirty="0">
+              <a:rPr lang="en-US" sz="4000" dirty="0">
                 <a:solidFill>
                   <a:srgbClr val="111111"/>
                 </a:solidFill>
@@ -10493,47 +11027,7 @@
                 <a:ea typeface="Times New Roman" pitchFamily="34" charset="-122"/>
                 <a:cs typeface="Times New Roman" pitchFamily="34" charset="-120"/>
               </a:rPr>
-              <a:t>Topic: The Earth as a Planet in the Solar System</a:t>
-            </a:r>
-            <a:endParaRPr lang="en-US" sz="4000" dirty="0"/>
-          </a:p>
-          <a:p>
-            <a:pPr algn="l" indent="0" marL="0">
-              <a:spcAft>
-                <a:spcPts val="800"/>
-              </a:spcAft>
-              <a:buNone/>
-            </a:pPr>
-            <a:r>
-              <a:rPr lang="en-US" sz="4000" b="1" dirty="0">
-                <a:solidFill>
-                  <a:srgbClr val="111111"/>
-                </a:solidFill>
-                <a:latin typeface="Times New Roman" pitchFamily="34" charset="0"/>
-                <a:ea typeface="Times New Roman" pitchFamily="34" charset="-122"/>
-                <a:cs typeface="Times New Roman" pitchFamily="34" charset="-120"/>
-              </a:rPr>
-              <a:t>Sub-topic: Location and Time</a:t>
-            </a:r>
-            <a:endParaRPr lang="en-US" sz="4000" dirty="0"/>
-          </a:p>
-          <a:p>
-            <a:pPr algn="l" indent="0" marL="0">
-              <a:spcAft>
-                <a:spcPts val="800"/>
-              </a:spcAft>
-              <a:buNone/>
-            </a:pPr>
-            <a:r>
-              <a:rPr lang="en-US" sz="4000" b="1" dirty="0">
-                <a:solidFill>
-                  <a:srgbClr val="990011"/>
-                </a:solidFill>
-                <a:latin typeface="Times New Roman" pitchFamily="34" charset="0"/>
-                <a:ea typeface="Times New Roman" pitchFamily="34" charset="-122"/>
-                <a:cs typeface="Times New Roman" pitchFamily="34" charset="-120"/>
-              </a:rPr>
-              <a:t>Lesson 6: The Revolution of the Earth</a:t>
+              <a:t>In June, the Sun is overhead north of the Equator. Which season does Garoua have?</a:t>
             </a:r>
             <a:endParaRPr lang="en-US" sz="4000" dirty="0"/>
           </a:p>
@@ -10645,7 +11139,7 @@
                 <a:ea typeface="Calibri" pitchFamily="34" charset="-122"/>
                 <a:cs typeface="Calibri" pitchFamily="34" charset="-120"/>
               </a:rPr>
-              <a:t>BOARD SUMMARY</a:t>
+              <a:t>2. EFFECTS OF REVOLUTION</a:t>
             </a:r>
             <a:endParaRPr lang="en-US" sz="1400" dirty="0"/>
           </a:p>
@@ -10668,7 +11162,7 @@
         <p:spPr>
           <a:xfrm>
             <a:off x="0" y="658368"/>
-            <a:ext cx="2468880" cy="5833872"/>
+            <a:ext cx="5120640" cy="5833872"/>
           </a:xfrm>
           <a:prstGeom prst="rect">
             <a:avLst/>
@@ -10683,8 +11177,8 @@
         </p:nvSpPr>
         <p:spPr>
           <a:xfrm>
-            <a:off x="2697480" y="1005840"/>
-            <a:ext cx="9174175" cy="731520"/>
+            <a:off x="5349240" y="1005840"/>
+            <a:ext cx="6522415" cy="731520"/>
           </a:xfrm>
           <a:prstGeom prst="rect">
             <a:avLst/>
@@ -10710,7 +11204,7 @@
                 <a:ea typeface="Times New Roman" pitchFamily="34" charset="-122"/>
                 <a:cs typeface="Times New Roman" pitchFamily="34" charset="-120"/>
               </a:rPr>
-              <a:t>1. Meaning of Revolution</a:t>
+              <a:t>Activity 3: Answer</a:t>
             </a:r>
             <a:endParaRPr lang="en-US" sz="3600" dirty="0"/>
           </a:p>
@@ -10724,8 +11218,8 @@
         </p:nvSpPr>
         <p:spPr>
           <a:xfrm>
-            <a:off x="2697480" y="1783080"/>
-            <a:ext cx="9174175" cy="4663440"/>
+            <a:off x="5349240" y="1783080"/>
+            <a:ext cx="6522415" cy="4663440"/>
           </a:xfrm>
           <a:prstGeom prst="rect">
             <a:avLst/>
@@ -10744,7 +11238,7 @@
               <a:buNone/>
             </a:pPr>
             <a:r>
-              <a:rPr lang="en-US" sz="4000" i="1" dirty="0">
+              <a:rPr lang="en-US" sz="4000" dirty="0">
                 <a:solidFill>
                   <a:srgbClr val="111111"/>
                 </a:solidFill>
@@ -10752,81 +11246,7 @@
                 <a:ea typeface="Times New Roman" pitchFamily="34" charset="-122"/>
                 <a:cs typeface="Times New Roman" pitchFamily="34" charset="-120"/>
               </a:rPr>
-              <a:t>The revolution of the Earth is explained as follows:</a:t>
-            </a:r>
-            <a:endParaRPr lang="en-US" sz="4000" dirty="0"/>
-          </a:p>
-          <a:p>
-            <a:pPr algn="l" indent="0" marL="0">
-              <a:spcAft>
-                <a:spcPts val="800"/>
-              </a:spcAft>
-              <a:buNone/>
-            </a:pPr>
-            <a:r>
-              <a:rPr lang="en-US" sz="4000" b="1" dirty="0">
-                <a:solidFill>
-                  <a:srgbClr val="111111"/>
-                </a:solidFill>
-                <a:latin typeface="Times New Roman" pitchFamily="34" charset="0"/>
-                <a:ea typeface="Times New Roman" pitchFamily="34" charset="-122"/>
-                <a:cs typeface="Times New Roman" pitchFamily="34" charset="-120"/>
-              </a:rPr>
-              <a:t>Revolution: </a:t>
-            </a:r>
-            <a:pPr algn="l" indent="0" marL="0">
-              <a:spcAft>
-                <a:spcPts val="800"/>
-              </a:spcAft>
-              <a:buNone/>
-            </a:pPr>
-            <a:r>
-              <a:rPr lang="en-US" sz="4000" dirty="0">
-                <a:solidFill>
-                  <a:srgbClr val="111111"/>
-                </a:solidFill>
-                <a:latin typeface="Times New Roman" pitchFamily="34" charset="0"/>
-                <a:ea typeface="Times New Roman" pitchFamily="34" charset="-122"/>
-                <a:cs typeface="Times New Roman" pitchFamily="34" charset="-120"/>
-              </a:rPr>
-              <a:t>It is the movement of the Earth around the Sun along its orbit.</a:t>
-            </a:r>
-            <a:endParaRPr lang="en-US" sz="4000" dirty="0"/>
-          </a:p>
-          <a:p>
-            <a:pPr algn="l" indent="0" marL="0">
-              <a:spcAft>
-                <a:spcPts val="800"/>
-              </a:spcAft>
-              <a:buNone/>
-            </a:pPr>
-            <a:r>
-              <a:rPr lang="en-US" sz="4000" b="1" dirty="0">
-                <a:solidFill>
-                  <a:srgbClr val="111111"/>
-                </a:solidFill>
-                <a:latin typeface="Times New Roman" pitchFamily="34" charset="0"/>
-                <a:ea typeface="Times New Roman" pitchFamily="34" charset="-122"/>
-                <a:cs typeface="Times New Roman" pitchFamily="34" charset="-120"/>
-              </a:rPr>
-              <a:t>Orbit: </a:t>
-            </a:r>
-            <a:pPr algn="l" indent="0" marL="0">
-              <a:spcAft>
-                <a:spcPts val="800"/>
-              </a:spcAft>
-              <a:buNone/>
-            </a:pPr>
-            <a:r>
-              <a:rPr lang="en-US" sz="4000" dirty="0">
-                <a:solidFill>
-                  <a:srgbClr val="111111"/>
-                </a:solidFill>
-                <a:latin typeface="Times New Roman" pitchFamily="34" charset="0"/>
-                <a:ea typeface="Times New Roman" pitchFamily="34" charset="-122"/>
-                <a:cs typeface="Times New Roman" pitchFamily="34" charset="-120"/>
-              </a:rPr>
-              <a:t>It is the oval path of the Earth around the Sun, which takes 365¼ days.</a:t>
+              <a:t>The rainy season.</a:t>
             </a:r>
             <a:endParaRPr lang="en-US" sz="4000" dirty="0"/>
           </a:p>
@@ -11970,7 +12390,7 @@
         <p:spPr>
           <a:xfrm>
             <a:off x="0" y="658368"/>
-            <a:ext cx="2468880" cy="5833872"/>
+            <a:ext cx="5120640" cy="5833872"/>
           </a:xfrm>
           <a:prstGeom prst="rect">
             <a:avLst/>
@@ -11985,8 +12405,8 @@
         </p:nvSpPr>
         <p:spPr>
           <a:xfrm>
-            <a:off x="2697480" y="1005840"/>
-            <a:ext cx="9174175" cy="731520"/>
+            <a:off x="5349240" y="1005840"/>
+            <a:ext cx="6522415" cy="731520"/>
           </a:xfrm>
           <a:prstGeom prst="rect">
             <a:avLst/>
@@ -12012,7 +12432,7 @@
                 <a:ea typeface="Times New Roman" pitchFamily="34" charset="-122"/>
                 <a:cs typeface="Times New Roman" pitchFamily="34" charset="-120"/>
               </a:rPr>
-              <a:t>2. Equinoxes and Solstices</a:t>
+              <a:t>Board Summary</a:t>
             </a:r>
             <a:endParaRPr lang="en-US" sz="3600" dirty="0"/>
           </a:p>
@@ -12026,8 +12446,8 @@
         </p:nvSpPr>
         <p:spPr>
           <a:xfrm>
-            <a:off x="2697480" y="1783080"/>
-            <a:ext cx="9174175" cy="4663440"/>
+            <a:off x="5349240" y="1783080"/>
+            <a:ext cx="6522415" cy="4663440"/>
           </a:xfrm>
           <a:prstGeom prst="rect">
             <a:avLst/>
@@ -12046,7 +12466,7 @@
               <a:buNone/>
             </a:pPr>
             <a:r>
-              <a:rPr lang="en-US" sz="4000" i="1" dirty="0">
+              <a:rPr lang="en-US" sz="4000" b="1" dirty="0">
                 <a:solidFill>
                   <a:srgbClr val="111111"/>
                 </a:solidFill>
@@ -12054,7 +12474,7 @@
                 <a:ea typeface="Times New Roman" pitchFamily="34" charset="-122"/>
                 <a:cs typeface="Times New Roman" pitchFamily="34" charset="-120"/>
               </a:rPr>
-              <a:t>The overhead Sun moves as follows during the year:</a:t>
+              <a:t>Topic: The Earth as a Planet in the Solar System</a:t>
             </a:r>
             <a:endParaRPr lang="en-US" sz="4000" dirty="0"/>
           </a:p>
@@ -12074,8 +12494,11 @@
                 <a:ea typeface="Times New Roman" pitchFamily="34" charset="-122"/>
                 <a:cs typeface="Times New Roman" pitchFamily="34" charset="-120"/>
               </a:rPr>
-              <a:t>Equinoxes: </a:t>
-            </a:r>
+              <a:t>Sub-topic: Location and Time</a:t>
+            </a:r>
+            <a:endParaRPr lang="en-US" sz="4000" dirty="0"/>
+          </a:p>
+          <a:p>
             <a:pPr algn="l" indent="0" marL="0">
               <a:spcAft>
                 <a:spcPts val="800"/>
@@ -12083,52 +12506,15 @@
               <a:buNone/>
             </a:pPr>
             <a:r>
-              <a:rPr lang="en-US" sz="4000" dirty="0">
-                <a:solidFill>
-                  <a:srgbClr val="111111"/>
+              <a:rPr lang="en-US" sz="4000" b="1" dirty="0">
+                <a:solidFill>
+                  <a:srgbClr val="990011"/>
                 </a:solidFill>
                 <a:latin typeface="Times New Roman" pitchFamily="34" charset="0"/>
                 <a:ea typeface="Times New Roman" pitchFamily="34" charset="-122"/>
                 <a:cs typeface="Times New Roman" pitchFamily="34" charset="-120"/>
               </a:rPr>
-              <a:t>On 21 March and 23 September, the Sun is overhead at the Equator and day and night are equal everywhere.</a:t>
-            </a:r>
-            <a:endParaRPr lang="en-US" sz="4000" dirty="0"/>
-          </a:p>
-          <a:p>
-            <a:pPr algn="l" indent="0" marL="0">
-              <a:spcAft>
-                <a:spcPts val="800"/>
-              </a:spcAft>
-              <a:buNone/>
-            </a:pPr>
-            <a:r>
-              <a:rPr lang="en-US" sz="4000" b="1" dirty="0">
-                <a:solidFill>
-                  <a:srgbClr val="111111"/>
-                </a:solidFill>
-                <a:latin typeface="Times New Roman" pitchFamily="34" charset="0"/>
-                <a:ea typeface="Times New Roman" pitchFamily="34" charset="-122"/>
-                <a:cs typeface="Times New Roman" pitchFamily="34" charset="-120"/>
-              </a:rPr>
-              <a:t>June solstice: </a:t>
-            </a:r>
-            <a:pPr algn="l" indent="0" marL="0">
-              <a:spcAft>
-                <a:spcPts val="800"/>
-              </a:spcAft>
-              <a:buNone/>
-            </a:pPr>
-            <a:r>
-              <a:rPr lang="en-US" sz="4000" dirty="0">
-                <a:solidFill>
-                  <a:srgbClr val="111111"/>
-                </a:solidFill>
-                <a:latin typeface="Times New Roman" pitchFamily="34" charset="0"/>
-                <a:ea typeface="Times New Roman" pitchFamily="34" charset="-122"/>
-                <a:cs typeface="Times New Roman" pitchFamily="34" charset="-120"/>
-              </a:rPr>
-              <a:t>On 21 June, the Sun is overhead at the Tropic of Cancer.</a:t>
+              <a:t>Lesson 6: The Revolution of the Earth</a:t>
             </a:r>
             <a:endParaRPr lang="en-US" sz="4000" dirty="0"/>
           </a:p>
@@ -12263,7 +12649,7 @@
         <p:spPr>
           <a:xfrm>
             <a:off x="0" y="658368"/>
-            <a:ext cx="5120640" cy="5833872"/>
+            <a:ext cx="3840480" cy="5833872"/>
           </a:xfrm>
           <a:prstGeom prst="rect">
             <a:avLst/>
@@ -12278,8 +12664,8 @@
         </p:nvSpPr>
         <p:spPr>
           <a:xfrm>
-            <a:off x="5349240" y="1005840"/>
-            <a:ext cx="6522415" cy="731520"/>
+            <a:off x="4069080" y="1005840"/>
+            <a:ext cx="7802575" cy="731520"/>
           </a:xfrm>
           <a:prstGeom prst="rect">
             <a:avLst/>
@@ -12305,7 +12691,7 @@
                 <a:ea typeface="Times New Roman" pitchFamily="34" charset="-122"/>
                 <a:cs typeface="Times New Roman" pitchFamily="34" charset="-120"/>
               </a:rPr>
-              <a:t>2. Equinoxes and Solstices (continued)</a:t>
+              <a:t>DEFINITIONS</a:t>
             </a:r>
             <a:endParaRPr lang="en-US" sz="3600" dirty="0"/>
           </a:p>
@@ -12319,8 +12705,8 @@
         </p:nvSpPr>
         <p:spPr>
           <a:xfrm>
-            <a:off x="5349240" y="1783080"/>
-            <a:ext cx="6522415" cy="4663440"/>
+            <a:off x="4069080" y="1783080"/>
+            <a:ext cx="7802575" cy="4663440"/>
           </a:xfrm>
           <a:prstGeom prst="rect">
             <a:avLst/>
@@ -12339,7 +12725,7 @@
               <a:buNone/>
             </a:pPr>
             <a:r>
-              <a:rPr lang="en-US" sz="4000" b="1" dirty="0">
+              <a:rPr lang="en-US" sz="4000" i="1" dirty="0">
                 <a:solidFill>
                   <a:srgbClr val="111111"/>
                 </a:solidFill>
@@ -12347,8 +12733,11 @@
                 <a:ea typeface="Times New Roman" pitchFamily="34" charset="-122"/>
                 <a:cs typeface="Times New Roman" pitchFamily="34" charset="-120"/>
               </a:rPr>
-              <a:t>December solstice: </a:t>
-            </a:r>
+              <a:t>The key terms of this lesson are defined as follows:</a:t>
+            </a:r>
+            <a:endParaRPr lang="en-US" sz="4000" dirty="0"/>
+          </a:p>
+          <a:p>
             <a:pPr algn="l" indent="0" marL="0">
               <a:spcAft>
                 <a:spcPts val="800"/>
@@ -12356,7 +12745,7 @@
               <a:buNone/>
             </a:pPr>
             <a:r>
-              <a:rPr lang="en-US" sz="4000" dirty="0">
+              <a:rPr lang="en-US" sz="4000" b="1" dirty="0">
                 <a:solidFill>
                   <a:srgbClr val="111111"/>
                 </a:solidFill>
@@ -12364,7 +12753,61 @@
                 <a:ea typeface="Times New Roman" pitchFamily="34" charset="-122"/>
                 <a:cs typeface="Times New Roman" pitchFamily="34" charset="-120"/>
               </a:rPr>
-              <a:t>On 22 December, the Sun is overhead at the Tropic of Capricorn.</a:t>
+              <a:t>Revolution: </a:t>
+            </a:r>
+            <a:pPr algn="l" indent="0" marL="0">
+              <a:spcAft>
+                <a:spcPts val="800"/>
+              </a:spcAft>
+              <a:buNone/>
+            </a:pPr>
+            <a:r>
+              <a:rPr lang="en-US" sz="4000" dirty="0">
+                <a:solidFill>
+                  <a:srgbClr val="111111"/>
+                </a:solidFill>
+                <a:latin typeface="Times New Roman" pitchFamily="34" charset="0"/>
+                <a:ea typeface="Times New Roman" pitchFamily="34" charset="-122"/>
+                <a:cs typeface="Times New Roman" pitchFamily="34" charset="-120"/>
+              </a:rPr>
+              <a:t>It is the movement of the Earth around the Sun.</a:t>
+            </a:r>
+            <a:endParaRPr lang="en-US" sz="4000" dirty="0"/>
+          </a:p>
+          <a:p>
+            <a:pPr algn="l" indent="0" marL="0">
+              <a:spcAft>
+                <a:spcPts val="800"/>
+              </a:spcAft>
+              <a:buNone/>
+            </a:pPr>
+            <a:r>
+              <a:rPr lang="en-US" sz="4000" b="1" dirty="0">
+                <a:solidFill>
+                  <a:srgbClr val="111111"/>
+                </a:solidFill>
+                <a:latin typeface="Times New Roman" pitchFamily="34" charset="0"/>
+                <a:ea typeface="Times New Roman" pitchFamily="34" charset="-122"/>
+                <a:cs typeface="Times New Roman" pitchFamily="34" charset="-120"/>
+              </a:rPr>
+              <a:t>Orbit: </a:t>
+            </a:r>
+            <a:pPr algn="l" indent="0" marL="0">
+              <a:spcAft>
+                <a:spcPts val="800"/>
+              </a:spcAft>
+              <a:buNone/>
+            </a:pPr>
+            <a:r>
+              <a:rPr lang="en-US" sz="4000" dirty="0">
+                <a:solidFill>
+                  <a:srgbClr val="111111"/>
+                </a:solidFill>
+                <a:latin typeface="Times New Roman" pitchFamily="34" charset="0"/>
+                <a:ea typeface="Times New Roman" pitchFamily="34" charset="-122"/>
+                <a:cs typeface="Times New Roman" pitchFamily="34" charset="-120"/>
+              </a:rPr>
+              <a:t>It is the oval (elliptical) path of the Earth around the Sun.</a:t>
             </a:r>
             <a:endParaRPr lang="en-US" sz="4000" dirty="0"/>
           </a:p>
@@ -12482,48 +12925,9 @@
           </a:p>
         </p:txBody>
       </p:sp>
-      <p:sp>
-        <p:nvSpPr>
-          <p:cNvPr id="3" name="Text 1"/>
-          <p:cNvSpPr/>
-          <p:nvPr/>
-        </p:nvSpPr>
-        <p:spPr>
-          <a:xfrm>
-            <a:off x="457200" y="1005840"/>
-            <a:ext cx="11277295" cy="731520"/>
-          </a:xfrm>
-          <a:prstGeom prst="rect">
-            <a:avLst/>
-          </a:prstGeom>
-          <a:noFill/>
-          <a:ln/>
-        </p:spPr>
-        <p:txBody>
-          <a:bodyPr wrap="square" lIns="0" tIns="0" rIns="0" bIns="0" rtlCol="0" anchor="ctr"/>
-          <a:lstStyle/>
-          <a:p>
-            <a:pPr algn="ctr" indent="0" marL="0">
-              <a:buNone/>
-            </a:pPr>
-            <a:r>
-              <a:rPr lang="en-US" sz="3600" b="1" dirty="0">
-                <a:solidFill>
-                  <a:srgbClr val="990011"/>
-                </a:solidFill>
-                <a:latin typeface="Times New Roman" pitchFamily="34" charset="0"/>
-                <a:ea typeface="Times New Roman" pitchFamily="34" charset="-122"/>
-                <a:cs typeface="Times New Roman" pitchFamily="34" charset="-120"/>
-              </a:rPr>
-              <a:t>2. Equinoxes and Solstices</a:t>
-            </a:r>
-            <a:endParaRPr lang="en-US" sz="3600" dirty="0"/>
-          </a:p>
-        </p:txBody>
-      </p:sp>
       <p:pic>
         <p:nvPicPr>
-          <p:cNvPr id="4" name="Image 0" descr="/home/claude/f4/img/v2/overhead_sun_big.png">    </p:cNvPr>
+          <p:cNvPr id="3" name="Image 0" descr="/home/claude/f4/img/minesec_sheet.png">    </p:cNvPr>
           <p:cNvPicPr>
             <a:picLocks noChangeAspect="1"/>
           </p:cNvPicPr>
@@ -12537,8 +12941,8 @@
         </p:blipFill>
         <p:spPr>
           <a:xfrm>
-            <a:off x="629930" y="1783080"/>
-            <a:ext cx="10931835" cy="4270248"/>
+            <a:off x="0" y="658368"/>
+            <a:ext cx="2468880" cy="5833872"/>
           </a:xfrm>
           <a:prstGeom prst="rect">
             <a:avLst/>
@@ -12547,14 +12951,14 @@
       </p:pic>
       <p:sp>
         <p:nvSpPr>
-          <p:cNvPr id="5" name="Text 2"/>
+          <p:cNvPr id="4" name="Text 1"/>
           <p:cNvSpPr/>
           <p:nvPr/>
         </p:nvSpPr>
         <p:spPr>
           <a:xfrm>
-            <a:off x="457200" y="6089904"/>
-            <a:ext cx="11277295" cy="347472"/>
+            <a:off x="2697480" y="1005840"/>
+            <a:ext cx="9174175" cy="731520"/>
           </a:xfrm>
           <a:prstGeom prst="rect">
             <a:avLst/>
@@ -12563,24 +12967,159 @@
           <a:ln/>
         </p:spPr>
         <p:txBody>
-          <a:bodyPr wrap="square" lIns="0" tIns="0" rIns="0" bIns="0" rtlCol="0" anchor="ctr"/>
+          <a:bodyPr wrap="square" lIns="0" tIns="0" rIns="0" bIns="0" rtlCol="0" anchor="ctr">
+            <a:normAutofit/>
+          </a:bodyPr>
           <a:lstStyle/>
           <a:p>
             <a:pPr algn="ctr" indent="0" marL="0">
               <a:buNone/>
             </a:pPr>
             <a:r>
-              <a:rPr lang="en-US" sz="1800" i="1" dirty="0">
-                <a:solidFill>
-                  <a:srgbClr val="555555"/>
+              <a:rPr lang="en-US" sz="3600" b="1" dirty="0">
+                <a:solidFill>
+                  <a:srgbClr val="990011"/>
                 </a:solidFill>
                 <a:latin typeface="Times New Roman" pitchFamily="34" charset="0"/>
                 <a:ea typeface="Times New Roman" pitchFamily="34" charset="-122"/>
                 <a:cs typeface="Times New Roman" pitchFamily="34" charset="-120"/>
               </a:rPr>
-              <a:t>Illustration: the overhead Sun during the year</a:t>
-            </a:r>
-            <a:endParaRPr lang="en-US" sz="1800" dirty="0"/>
+              <a:t>DEFINITIONS (continued)</a:t>
+            </a:r>
+            <a:endParaRPr lang="en-US" sz="3600" dirty="0"/>
+          </a:p>
+        </p:txBody>
+      </p:sp>
+      <p:sp>
+        <p:nvSpPr>
+          <p:cNvPr id="5" name="Text 2"/>
+          <p:cNvSpPr/>
+          <p:nvPr/>
+        </p:nvSpPr>
+        <p:spPr>
+          <a:xfrm>
+            <a:off x="2697480" y="1783080"/>
+            <a:ext cx="9174175" cy="4663440"/>
+          </a:xfrm>
+          <a:prstGeom prst="rect">
+            <a:avLst/>
+          </a:prstGeom>
+          <a:noFill/>
+          <a:ln/>
+        </p:spPr>
+        <p:txBody>
+          <a:bodyPr wrap="square" lIns="0" tIns="0" rIns="0" bIns="0" rtlCol="0" anchor="t"/>
+          <a:lstStyle/>
+          <a:p>
+            <a:pPr algn="l" indent="0" marL="0">
+              <a:spcAft>
+                <a:spcPts val="800"/>
+              </a:spcAft>
+              <a:buNone/>
+            </a:pPr>
+            <a:r>
+              <a:rPr lang="en-US" sz="4000" b="1" dirty="0">
+                <a:solidFill>
+                  <a:srgbClr val="111111"/>
+                </a:solidFill>
+                <a:latin typeface="Times New Roman" pitchFamily="34" charset="0"/>
+                <a:ea typeface="Times New Roman" pitchFamily="34" charset="-122"/>
+                <a:cs typeface="Times New Roman" pitchFamily="34" charset="-120"/>
+              </a:rPr>
+              <a:t>Equinox: </a:t>
+            </a:r>
+            <a:pPr algn="l" indent="0" marL="0">
+              <a:spcAft>
+                <a:spcPts val="800"/>
+              </a:spcAft>
+              <a:buNone/>
+            </a:pPr>
+            <a:r>
+              <a:rPr lang="en-US" sz="4000" dirty="0">
+                <a:solidFill>
+                  <a:srgbClr val="111111"/>
+                </a:solidFill>
+                <a:latin typeface="Times New Roman" pitchFamily="34" charset="0"/>
+                <a:ea typeface="Times New Roman" pitchFamily="34" charset="-122"/>
+                <a:cs typeface="Times New Roman" pitchFamily="34" charset="-120"/>
+              </a:rPr>
+              <a:t>It is the day when the Sun is overhead at the Equator and day and night are equal everywhere.</a:t>
+            </a:r>
+            <a:endParaRPr lang="en-US" sz="4000" dirty="0"/>
+          </a:p>
+          <a:p>
+            <a:pPr algn="l" indent="0" marL="0">
+              <a:spcAft>
+                <a:spcPts val="800"/>
+              </a:spcAft>
+              <a:buNone/>
+            </a:pPr>
+            <a:r>
+              <a:rPr lang="en-US" sz="4000" b="1" dirty="0">
+                <a:solidFill>
+                  <a:srgbClr val="111111"/>
+                </a:solidFill>
+                <a:latin typeface="Times New Roman" pitchFamily="34" charset="0"/>
+                <a:ea typeface="Times New Roman" pitchFamily="34" charset="-122"/>
+                <a:cs typeface="Times New Roman" pitchFamily="34" charset="-120"/>
+              </a:rPr>
+              <a:t>Solstice: </a:t>
+            </a:r>
+            <a:pPr algn="l" indent="0" marL="0">
+              <a:spcAft>
+                <a:spcPts val="800"/>
+              </a:spcAft>
+              <a:buNone/>
+            </a:pPr>
+            <a:r>
+              <a:rPr lang="en-US" sz="4000" dirty="0">
+                <a:solidFill>
+                  <a:srgbClr val="111111"/>
+                </a:solidFill>
+                <a:latin typeface="Times New Roman" pitchFamily="34" charset="0"/>
+                <a:ea typeface="Times New Roman" pitchFamily="34" charset="-122"/>
+                <a:cs typeface="Times New Roman" pitchFamily="34" charset="-120"/>
+              </a:rPr>
+              <a:t>It is the day when the Sun is overhead at one of the tropics.</a:t>
+            </a:r>
+            <a:endParaRPr lang="en-US" sz="4000" dirty="0"/>
+          </a:p>
+          <a:p>
+            <a:pPr algn="l" indent="0" marL="0">
+              <a:spcAft>
+                <a:spcPts val="800"/>
+              </a:spcAft>
+              <a:buNone/>
+            </a:pPr>
+            <a:r>
+              <a:rPr lang="en-US" sz="4000" b="1" dirty="0">
+                <a:solidFill>
+                  <a:srgbClr val="111111"/>
+                </a:solidFill>
+                <a:latin typeface="Times New Roman" pitchFamily="34" charset="0"/>
+                <a:ea typeface="Times New Roman" pitchFamily="34" charset="-122"/>
+                <a:cs typeface="Times New Roman" pitchFamily="34" charset="-120"/>
+              </a:rPr>
+              <a:t>Leap year: </a:t>
+            </a:r>
+            <a:pPr algn="l" indent="0" marL="0">
+              <a:spcAft>
+                <a:spcPts val="800"/>
+              </a:spcAft>
+              <a:buNone/>
+            </a:pPr>
+            <a:r>
+              <a:rPr lang="en-US" sz="4000" dirty="0">
+                <a:solidFill>
+                  <a:srgbClr val="111111"/>
+                </a:solidFill>
+                <a:latin typeface="Times New Roman" pitchFamily="34" charset="0"/>
+                <a:ea typeface="Times New Roman" pitchFamily="34" charset="-122"/>
+                <a:cs typeface="Times New Roman" pitchFamily="34" charset="-120"/>
+              </a:rPr>
+              <a:t>It is a year of 366 days, which comes every four years.</a:t>
+            </a:r>
+            <a:endParaRPr lang="en-US" sz="4000" dirty="0"/>
           </a:p>
         </p:txBody>
       </p:sp>
@@ -12696,9 +13235,129 @@
           </a:p>
         </p:txBody>
       </p:sp>
+      <p:sp>
+        <p:nvSpPr>
+          <p:cNvPr id="3" name="Text 1"/>
+          <p:cNvSpPr/>
+          <p:nvPr/>
+        </p:nvSpPr>
+        <p:spPr>
+          <a:xfrm>
+            <a:off x="365760" y="1005840"/>
+            <a:ext cx="11460175" cy="731520"/>
+          </a:xfrm>
+          <a:prstGeom prst="rect">
+            <a:avLst/>
+          </a:prstGeom>
+          <a:noFill/>
+          <a:ln/>
+        </p:spPr>
+        <p:txBody>
+          <a:bodyPr wrap="square" lIns="0" tIns="0" rIns="0" bIns="0" rtlCol="0" anchor="ctr">
+            <a:normAutofit/>
+          </a:bodyPr>
+          <a:lstStyle/>
+          <a:p>
+            <a:pPr algn="ctr" indent="0" marL="0">
+              <a:buNone/>
+            </a:pPr>
+            <a:r>
+              <a:rPr lang="en-US" sz="3600" b="1" dirty="0">
+                <a:solidFill>
+                  <a:srgbClr val="990011"/>
+                </a:solidFill>
+                <a:latin typeface="Times New Roman" pitchFamily="34" charset="0"/>
+                <a:ea typeface="Times New Roman" pitchFamily="34" charset="-122"/>
+                <a:cs typeface="Times New Roman" pitchFamily="34" charset="-120"/>
+              </a:rPr>
+              <a:t>1. Meaning and Illustration of Revolution</a:t>
+            </a:r>
+            <a:endParaRPr lang="en-US" sz="3600" dirty="0"/>
+          </a:p>
+        </p:txBody>
+      </p:sp>
+      <p:sp>
+        <p:nvSpPr>
+          <p:cNvPr id="4" name="Text 2"/>
+          <p:cNvSpPr/>
+          <p:nvPr/>
+        </p:nvSpPr>
+        <p:spPr>
+          <a:xfrm>
+            <a:off x="365760" y="1783080"/>
+            <a:ext cx="4846320" cy="4617720"/>
+          </a:xfrm>
+          <a:prstGeom prst="rect">
+            <a:avLst/>
+          </a:prstGeom>
+          <a:noFill/>
+          <a:ln/>
+        </p:spPr>
+        <p:txBody>
+          <a:bodyPr wrap="square" lIns="0" tIns="0" rIns="0" bIns="0" rtlCol="0" anchor="t"/>
+          <a:lstStyle/>
+          <a:p>
+            <a:pPr algn="l" indent="0" marL="0">
+              <a:spcAft>
+                <a:spcPts val="800"/>
+              </a:spcAft>
+              <a:buNone/>
+            </a:pPr>
+            <a:r>
+              <a:rPr lang="en-US" sz="3600" i="1" dirty="0">
+                <a:solidFill>
+                  <a:srgbClr val="111111"/>
+                </a:solidFill>
+                <a:latin typeface="Times New Roman" pitchFamily="34" charset="0"/>
+                <a:ea typeface="Times New Roman" pitchFamily="34" charset="-122"/>
+                <a:cs typeface="Times New Roman" pitchFamily="34" charset="-120"/>
+              </a:rPr>
+              <a:t>The revolution of the Earth is described as follows:</a:t>
+            </a:r>
+            <a:endParaRPr lang="en-US" sz="3600" dirty="0"/>
+          </a:p>
+          <a:p>
+            <a:pPr algn="l" indent="0" marL="0">
+              <a:spcAft>
+                <a:spcPts val="800"/>
+              </a:spcAft>
+              <a:buNone/>
+            </a:pPr>
+            <a:r>
+              <a:rPr lang="en-US" sz="3600" b="1" dirty="0">
+                <a:solidFill>
+                  <a:srgbClr val="111111"/>
+                </a:solidFill>
+                <a:latin typeface="Times New Roman" pitchFamily="34" charset="0"/>
+                <a:ea typeface="Times New Roman" pitchFamily="34" charset="-122"/>
+                <a:cs typeface="Times New Roman" pitchFamily="34" charset="-120"/>
+              </a:rPr>
+              <a:t>Duration: </a:t>
+            </a:r>
+            <a:pPr algn="l" indent="0" marL="0">
+              <a:spcAft>
+                <a:spcPts val="800"/>
+              </a:spcAft>
+              <a:buNone/>
+            </a:pPr>
+            <a:r>
+              <a:rPr lang="en-US" sz="3600" dirty="0">
+                <a:solidFill>
+                  <a:srgbClr val="111111"/>
+                </a:solidFill>
+                <a:latin typeface="Times New Roman" pitchFamily="34" charset="0"/>
+                <a:ea typeface="Times New Roman" pitchFamily="34" charset="-122"/>
+                <a:cs typeface="Times New Roman" pitchFamily="34" charset="-120"/>
+              </a:rPr>
+              <a:t>One revolution takes 365¼ days, which is one year.</a:t>
+            </a:r>
+            <a:endParaRPr lang="en-US" sz="3600" dirty="0"/>
+          </a:p>
+        </p:txBody>
+      </p:sp>
       <p:pic>
         <p:nvPicPr>
-          <p:cNvPr id="3" name="Image 0" descr="/home/claude/f4/img/minesec_sheet.png">    </p:cNvPr>
+          <p:cNvPr id="5" name="Image 0" descr="/home/claude/f4/img/v2/revolution_june.png">    </p:cNvPr>
           <p:cNvPicPr>
             <a:picLocks noChangeAspect="1"/>
           </p:cNvPicPr>
@@ -12712,8 +13371,8 @@
         </p:blipFill>
         <p:spPr>
           <a:xfrm>
-            <a:off x="0" y="658368"/>
-            <a:ext cx="1463040" cy="5833872"/>
+            <a:off x="5349240" y="2617506"/>
+            <a:ext cx="6659575" cy="2601397"/>
           </a:xfrm>
           <a:prstGeom prst="rect">
             <a:avLst/>
@@ -12722,14 +13381,14 @@
       </p:pic>
       <p:sp>
         <p:nvSpPr>
-          <p:cNvPr id="4" name="Text 1"/>
+          <p:cNvPr id="6" name="Text 3"/>
           <p:cNvSpPr/>
           <p:nvPr/>
         </p:nvSpPr>
         <p:spPr>
           <a:xfrm>
-            <a:off x="1691640" y="1005840"/>
-            <a:ext cx="10180015" cy="731520"/>
+            <a:off x="5349240" y="6089904"/>
+            <a:ext cx="6659575" cy="347472"/>
           </a:xfrm>
           <a:prstGeom prst="rect">
             <a:avLst/>
@@ -12738,142 +13397,24 @@
           <a:ln/>
         </p:spPr>
         <p:txBody>
-          <a:bodyPr wrap="square" lIns="0" tIns="0" rIns="0" bIns="0" rtlCol="0" anchor="ctr">
-            <a:normAutofit/>
-          </a:bodyPr>
+          <a:bodyPr wrap="square" lIns="0" tIns="0" rIns="0" bIns="0" rtlCol="0" anchor="ctr"/>
           <a:lstStyle/>
           <a:p>
             <a:pPr algn="ctr" indent="0" marL="0">
               <a:buNone/>
             </a:pPr>
             <a:r>
-              <a:rPr lang="en-US" sz="3600" b="1" dirty="0">
-                <a:solidFill>
-                  <a:srgbClr val="990011"/>
+              <a:rPr lang="en-US" sz="1600" i="1" dirty="0">
+                <a:solidFill>
+                  <a:srgbClr val="555555"/>
                 </a:solidFill>
                 <a:latin typeface="Times New Roman" pitchFamily="34" charset="0"/>
                 <a:ea typeface="Times New Roman" pitchFamily="34" charset="-122"/>
                 <a:cs typeface="Times New Roman" pitchFamily="34" charset="-120"/>
               </a:rPr>
-              <a:t>3. Effects of Revolution</a:t>
-            </a:r>
-            <a:endParaRPr lang="en-US" sz="3600" dirty="0"/>
-          </a:p>
-        </p:txBody>
-      </p:sp>
-      <p:sp>
-        <p:nvSpPr>
-          <p:cNvPr id="5" name="Text 2"/>
-          <p:cNvSpPr/>
-          <p:nvPr/>
-        </p:nvSpPr>
-        <p:spPr>
-          <a:xfrm>
-            <a:off x="1691640" y="1783080"/>
-            <a:ext cx="10180015" cy="4663440"/>
-          </a:xfrm>
-          <a:prstGeom prst="rect">
-            <a:avLst/>
-          </a:prstGeom>
-          <a:noFill/>
-          <a:ln/>
-        </p:spPr>
-        <p:txBody>
-          <a:bodyPr wrap="square" lIns="0" tIns="0" rIns="0" bIns="0" rtlCol="0" anchor="t"/>
-          <a:lstStyle/>
-          <a:p>
-            <a:pPr algn="l" indent="0" marL="0">
-              <a:spcAft>
-                <a:spcPts val="800"/>
-              </a:spcAft>
-              <a:buNone/>
-            </a:pPr>
-            <a:r>
-              <a:rPr lang="en-US" sz="4000" i="1" dirty="0">
-                <a:solidFill>
-                  <a:srgbClr val="111111"/>
-                </a:solidFill>
-                <a:latin typeface="Times New Roman" pitchFamily="34" charset="0"/>
-                <a:ea typeface="Times New Roman" pitchFamily="34" charset="-122"/>
-                <a:cs typeface="Times New Roman" pitchFamily="34" charset="-120"/>
-              </a:rPr>
-              <a:t>The revolution of the Earth has the following effects:</a:t>
-            </a:r>
-            <a:endParaRPr lang="en-US" sz="4000" dirty="0"/>
-          </a:p>
-          <a:p>
-            <a:pPr algn="l" indent="0" marL="0">
-              <a:spcAft>
-                <a:spcPts val="800"/>
-              </a:spcAft>
-              <a:buNone/>
-            </a:pPr>
-            <a:r>
-              <a:rPr lang="en-US" sz="4000" b="1" dirty="0">
-                <a:solidFill>
-                  <a:srgbClr val="111111"/>
-                </a:solidFill>
-                <a:latin typeface="Times New Roman" pitchFamily="34" charset="0"/>
-                <a:ea typeface="Times New Roman" pitchFamily="34" charset="-122"/>
-                <a:cs typeface="Times New Roman" pitchFamily="34" charset="-120"/>
-              </a:rPr>
-              <a:t>Seasons: </a:t>
-            </a:r>
-            <a:pPr algn="l" indent="0" marL="0">
-              <a:spcAft>
-                <a:spcPts val="800"/>
-              </a:spcAft>
-              <a:buNone/>
-            </a:pPr>
-            <a:r>
-              <a:rPr lang="en-US" sz="4000" dirty="0">
-                <a:solidFill>
-                  <a:srgbClr val="111111"/>
-                </a:solidFill>
-                <a:latin typeface="Times New Roman" pitchFamily="34" charset="0"/>
-                <a:ea typeface="Times New Roman" pitchFamily="34" charset="-122"/>
-                <a:cs typeface="Times New Roman" pitchFamily="34" charset="-120"/>
-              </a:rPr>
-              <a:t>Revolution causes the seasons, such as the rainy and dry seasons in Garoua.</a:t>
-            </a:r>
-            <a:endParaRPr lang="en-US" sz="4000" dirty="0"/>
-          </a:p>
-          <a:p>
-            <a:pPr algn="l" indent="0" marL="0">
-              <a:spcAft>
-                <a:spcPts val="800"/>
-              </a:spcAft>
-              <a:buNone/>
-            </a:pPr>
-            <a:r>
-              <a:rPr lang="en-US" sz="4000" b="1" dirty="0">
-                <a:solidFill>
-                  <a:srgbClr val="111111"/>
-                </a:solidFill>
-                <a:latin typeface="Times New Roman" pitchFamily="34" charset="0"/>
-                <a:ea typeface="Times New Roman" pitchFamily="34" charset="-122"/>
-                <a:cs typeface="Times New Roman" pitchFamily="34" charset="-120"/>
-              </a:rPr>
-              <a:t>Length of day: </a:t>
-            </a:r>
-            <a:pPr algn="l" indent="0" marL="0">
-              <a:spcAft>
-                <a:spcPts val="800"/>
-              </a:spcAft>
-              <a:buNone/>
-            </a:pPr>
-            <a:r>
-              <a:rPr lang="en-US" sz="4000" dirty="0">
-                <a:solidFill>
-                  <a:srgbClr val="111111"/>
-                </a:solidFill>
-                <a:latin typeface="Times New Roman" pitchFamily="34" charset="0"/>
-                <a:ea typeface="Times New Roman" pitchFamily="34" charset="-122"/>
-                <a:cs typeface="Times New Roman" pitchFamily="34" charset="-120"/>
-              </a:rPr>
-              <a:t>The length of day and night changes during the year away from the Equator.</a:t>
-            </a:r>
-            <a:endParaRPr lang="en-US" sz="4000" dirty="0"/>
+              <a:t>Illustration: the Earth on its orbit</a:t>
+            </a:r>
+            <a:endParaRPr lang="en-US" sz="1600" dirty="0"/>
           </a:p>
         </p:txBody>
       </p:sp>
@@ -13048,7 +13589,7 @@
                 <a:ea typeface="Times New Roman" pitchFamily="34" charset="-122"/>
                 <a:cs typeface="Times New Roman" pitchFamily="34" charset="-120"/>
               </a:rPr>
-              <a:t>3. Effects of Revolution (continued)</a:t>
+              <a:t>1. Meaning and Illustration of Revolution</a:t>
             </a:r>
             <a:endParaRPr lang="en-US" sz="3600" dirty="0"/>
           </a:p>
@@ -13090,7 +13631,7 @@
                 <a:ea typeface="Times New Roman" pitchFamily="34" charset="-122"/>
                 <a:cs typeface="Times New Roman" pitchFamily="34" charset="-120"/>
               </a:rPr>
-              <a:t>The year and leap year: </a:t>
+              <a:t>Tilted axis: </a:t>
             </a:r>
             <a:pPr algn="l" indent="0" marL="0">
               <a:spcAft>
@@ -13107,7 +13648,7 @@
                 <a:ea typeface="Times New Roman" pitchFamily="34" charset="-122"/>
                 <a:cs typeface="Times New Roman" pitchFamily="34" charset="-120"/>
               </a:rPr>
-              <a:t>A year has 365 days, and every fourth year is a leap year of 366 days.</a:t>
+              <a:t>During its revolution, the axis of the Earth stays tilted at 23½° in the same direction.</a:t>
             </a:r>
             <a:endParaRPr lang="en-US" sz="4000" dirty="0"/>
           </a:p>
@@ -13219,15 +13760,115 @@
                 <a:ea typeface="Calibri" pitchFamily="34" charset="-122"/>
                 <a:cs typeface="Calibri" pitchFamily="34" charset="-120"/>
               </a:rPr>
-              <a:t>FORMATIVE EVALUATION</a:t>
+              <a:t>BOARD SUMMARY</a:t>
             </a:r>
             <a:endParaRPr lang="en-US" sz="1400" dirty="0"/>
+          </a:p>
+        </p:txBody>
+      </p:sp>
+      <p:sp>
+        <p:nvSpPr>
+          <p:cNvPr id="3" name="Text 1"/>
+          <p:cNvSpPr/>
+          <p:nvPr/>
+        </p:nvSpPr>
+        <p:spPr>
+          <a:xfrm>
+            <a:off x="365760" y="1005840"/>
+            <a:ext cx="11460175" cy="731520"/>
+          </a:xfrm>
+          <a:prstGeom prst="rect">
+            <a:avLst/>
+          </a:prstGeom>
+          <a:noFill/>
+          <a:ln/>
+        </p:spPr>
+        <p:txBody>
+          <a:bodyPr wrap="square" lIns="0" tIns="0" rIns="0" bIns="0" rtlCol="0" anchor="ctr">
+            <a:normAutofit/>
+          </a:bodyPr>
+          <a:lstStyle/>
+          <a:p>
+            <a:pPr algn="ctr" indent="0" marL="0">
+              <a:buNone/>
+            </a:pPr>
+            <a:r>
+              <a:rPr lang="en-US" sz="3600" b="1" dirty="0">
+                <a:solidFill>
+                  <a:srgbClr val="990011"/>
+                </a:solidFill>
+                <a:latin typeface="Times New Roman" pitchFamily="34" charset="0"/>
+                <a:ea typeface="Times New Roman" pitchFamily="34" charset="-122"/>
+                <a:cs typeface="Times New Roman" pitchFamily="34" charset="-120"/>
+              </a:rPr>
+              <a:t>1. Meaning and Illustration of Revolution</a:t>
+            </a:r>
+            <a:endParaRPr lang="en-US" sz="3600" dirty="0"/>
+          </a:p>
+        </p:txBody>
+      </p:sp>
+      <p:sp>
+        <p:nvSpPr>
+          <p:cNvPr id="4" name="Text 2"/>
+          <p:cNvSpPr/>
+          <p:nvPr/>
+        </p:nvSpPr>
+        <p:spPr>
+          <a:xfrm>
+            <a:off x="365760" y="1783080"/>
+            <a:ext cx="4846320" cy="4617720"/>
+          </a:xfrm>
+          <a:prstGeom prst="rect">
+            <a:avLst/>
+          </a:prstGeom>
+          <a:noFill/>
+          <a:ln/>
+        </p:spPr>
+        <p:txBody>
+          <a:bodyPr wrap="square" lIns="0" tIns="0" rIns="0" bIns="0" rtlCol="0" anchor="t"/>
+          <a:lstStyle/>
+          <a:p>
+            <a:pPr algn="l" indent="0" marL="0">
+              <a:spcAft>
+                <a:spcPts val="800"/>
+              </a:spcAft>
+              <a:buNone/>
+            </a:pPr>
+            <a:r>
+              <a:rPr lang="en-US" sz="3600" b="1" dirty="0">
+                <a:solidFill>
+                  <a:srgbClr val="111111"/>
+                </a:solidFill>
+                <a:latin typeface="Times New Roman" pitchFamily="34" charset="0"/>
+                <a:ea typeface="Times New Roman" pitchFamily="34" charset="-122"/>
+                <a:cs typeface="Times New Roman" pitchFamily="34" charset="-120"/>
+              </a:rPr>
+              <a:t>March equinox (21 March): </a:t>
+            </a:r>
+            <a:pPr algn="l" indent="0" marL="0">
+              <a:spcAft>
+                <a:spcPts val="800"/>
+              </a:spcAft>
+              <a:buNone/>
+            </a:pPr>
+            <a:r>
+              <a:rPr lang="en-US" sz="3600" dirty="0">
+                <a:solidFill>
+                  <a:srgbClr val="111111"/>
+                </a:solidFill>
+                <a:latin typeface="Times New Roman" pitchFamily="34" charset="0"/>
+                <a:ea typeface="Times New Roman" pitchFamily="34" charset="-122"/>
+                <a:cs typeface="Times New Roman" pitchFamily="34" charset="-120"/>
+              </a:rPr>
+              <a:t>The Sun is overhead at the Equator.</a:t>
+            </a:r>
+            <a:endParaRPr lang="en-US" sz="3600" dirty="0"/>
           </a:p>
         </p:txBody>
       </p:sp>
       <p:pic>
         <p:nvPicPr>
-          <p:cNvPr id="3" name="Image 0" descr="/home/claude/f4/img/minesec_sheet.png">    </p:cNvPr>
+          <p:cNvPr id="5" name="Image 0" descr="/home/claude/f4/img/v2/overhead_sun_big.png">    </p:cNvPr>
           <p:cNvPicPr>
             <a:picLocks noChangeAspect="1"/>
           </p:cNvPicPr>
@@ -13241,8 +13882,8 @@
         </p:blipFill>
         <p:spPr>
           <a:xfrm>
-            <a:off x="0" y="658368"/>
-            <a:ext cx="5120640" cy="5833872"/>
+            <a:off x="5349240" y="2617506"/>
+            <a:ext cx="6659575" cy="2601397"/>
           </a:xfrm>
           <a:prstGeom prst="rect">
             <a:avLst/>
@@ -13251,14 +13892,14 @@
       </p:pic>
       <p:sp>
         <p:nvSpPr>
-          <p:cNvPr id="4" name="Text 1"/>
+          <p:cNvPr id="6" name="Text 3"/>
           <p:cNvSpPr/>
           <p:nvPr/>
         </p:nvSpPr>
         <p:spPr>
           <a:xfrm>
-            <a:off x="5349240" y="1005840"/>
-            <a:ext cx="6522415" cy="731520"/>
+            <a:off x="5349240" y="6089904"/>
+            <a:ext cx="6659575" cy="347472"/>
           </a:xfrm>
           <a:prstGeom prst="rect">
             <a:avLst/>
@@ -13267,68 +13908,24 @@
           <a:ln/>
         </p:spPr>
         <p:txBody>
-          <a:bodyPr wrap="square" lIns="0" tIns="0" rIns="0" bIns="0" rtlCol="0" anchor="ctr">
-            <a:normAutofit/>
-          </a:bodyPr>
+          <a:bodyPr wrap="square" lIns="0" tIns="0" rIns="0" bIns="0" rtlCol="0" anchor="ctr"/>
           <a:lstStyle/>
           <a:p>
             <a:pPr algn="ctr" indent="0" marL="0">
               <a:buNone/>
             </a:pPr>
             <a:r>
-              <a:rPr lang="en-US" sz="3600" b="1" dirty="0">
-                <a:solidFill>
-                  <a:srgbClr val="990011"/>
+              <a:rPr lang="en-US" sz="1600" i="1" dirty="0">
+                <a:solidFill>
+                  <a:srgbClr val="555555"/>
                 </a:solidFill>
                 <a:latin typeface="Times New Roman" pitchFamily="34" charset="0"/>
                 <a:ea typeface="Times New Roman" pitchFamily="34" charset="-122"/>
                 <a:cs typeface="Times New Roman" pitchFamily="34" charset="-120"/>
               </a:rPr>
-              <a:t>Evaluation 1</a:t>
-            </a:r>
-            <a:endParaRPr lang="en-US" sz="3600" dirty="0"/>
-          </a:p>
-        </p:txBody>
-      </p:sp>
-      <p:sp>
-        <p:nvSpPr>
-          <p:cNvPr id="5" name="Text 2"/>
-          <p:cNvSpPr/>
-          <p:nvPr/>
-        </p:nvSpPr>
-        <p:spPr>
-          <a:xfrm>
-            <a:off x="5349240" y="1783080"/>
-            <a:ext cx="6522415" cy="4663440"/>
-          </a:xfrm>
-          <a:prstGeom prst="rect">
-            <a:avLst/>
-          </a:prstGeom>
-          <a:noFill/>
-          <a:ln/>
-        </p:spPr>
-        <p:txBody>
-          <a:bodyPr wrap="square" lIns="0" tIns="0" rIns="0" bIns="0" rtlCol="0" anchor="t"/>
-          <a:lstStyle/>
-          <a:p>
-            <a:pPr algn="l" indent="0" marL="0">
-              <a:spcAft>
-                <a:spcPts val="800"/>
-              </a:spcAft>
-              <a:buNone/>
-            </a:pPr>
-            <a:r>
-              <a:rPr lang="en-US" sz="4000" dirty="0">
-                <a:solidFill>
-                  <a:srgbClr val="111111"/>
-                </a:solidFill>
-                <a:latin typeface="Times New Roman" pitchFamily="34" charset="0"/>
-                <a:ea typeface="Times New Roman" pitchFamily="34" charset="-122"/>
-                <a:cs typeface="Times New Roman" pitchFamily="34" charset="-120"/>
-              </a:rPr>
-              <a:t>How long does one revolution take?</a:t>
-            </a:r>
-            <a:endParaRPr lang="en-US" sz="4000" dirty="0"/>
+              <a:t>Illustration: the overhead Sun during the year</a:t>
+            </a:r>
+            <a:endParaRPr lang="en-US" sz="1600" dirty="0"/>
           </a:p>
         </p:txBody>
       </p:sp>
@@ -13438,7 +14035,7 @@
                 <a:ea typeface="Calibri" pitchFamily="34" charset="-122"/>
                 <a:cs typeface="Calibri" pitchFamily="34" charset="-120"/>
               </a:rPr>
-              <a:t>FORMATIVE EVALUATION</a:t>
+              <a:t>BOARD SUMMARY</a:t>
             </a:r>
             <a:endParaRPr lang="en-US" sz="1400" dirty="0"/>
           </a:p>
@@ -13461,7 +14058,7 @@
         <p:spPr>
           <a:xfrm>
             <a:off x="0" y="658368"/>
-            <a:ext cx="5120640" cy="5833872"/>
+            <a:ext cx="2468880" cy="5833872"/>
           </a:xfrm>
           <a:prstGeom prst="rect">
             <a:avLst/>
@@ -13476,8 +14073,8 @@
         </p:nvSpPr>
         <p:spPr>
           <a:xfrm>
-            <a:off x="5349240" y="1005840"/>
-            <a:ext cx="6522415" cy="731520"/>
+            <a:off x="2697480" y="1005840"/>
+            <a:ext cx="9174175" cy="731520"/>
           </a:xfrm>
           <a:prstGeom prst="rect">
             <a:avLst/>
@@ -13503,7 +14100,7 @@
                 <a:ea typeface="Times New Roman" pitchFamily="34" charset="-122"/>
                 <a:cs typeface="Times New Roman" pitchFamily="34" charset="-120"/>
               </a:rPr>
-              <a:t>Expected Answer</a:t>
+              <a:t>1. Meaning and Illustration of Revolution</a:t>
             </a:r>
             <a:endParaRPr lang="en-US" sz="3600" dirty="0"/>
           </a:p>
@@ -13517,8 +14114,8 @@
         </p:nvSpPr>
         <p:spPr>
           <a:xfrm>
-            <a:off x="5349240" y="1783080"/>
-            <a:ext cx="6522415" cy="4663440"/>
+            <a:off x="2697480" y="1783080"/>
+            <a:ext cx="9174175" cy="4663440"/>
           </a:xfrm>
           <a:prstGeom prst="rect">
             <a:avLst/>
@@ -13537,7 +14134,7 @@
               <a:buNone/>
             </a:pPr>
             <a:r>
-              <a:rPr lang="en-US" sz="4000" dirty="0">
+              <a:rPr lang="en-US" sz="4000" b="1" dirty="0">
                 <a:solidFill>
                   <a:srgbClr val="111111"/>
                 </a:solidFill>
@@ -13545,7 +14142,98 @@
                 <a:ea typeface="Times New Roman" pitchFamily="34" charset="-122"/>
                 <a:cs typeface="Times New Roman" pitchFamily="34" charset="-120"/>
               </a:rPr>
-              <a:t>365¼ days.</a:t>
+              <a:t>June solstice (21 June): </a:t>
+            </a:r>
+            <a:pPr algn="l" indent="0" marL="0">
+              <a:spcAft>
+                <a:spcPts val="800"/>
+              </a:spcAft>
+              <a:buNone/>
+            </a:pPr>
+            <a:r>
+              <a:rPr lang="en-US" sz="4000" dirty="0">
+                <a:solidFill>
+                  <a:srgbClr val="111111"/>
+                </a:solidFill>
+                <a:latin typeface="Times New Roman" pitchFamily="34" charset="0"/>
+                <a:ea typeface="Times New Roman" pitchFamily="34" charset="-122"/>
+                <a:cs typeface="Times New Roman" pitchFamily="34" charset="-120"/>
+              </a:rPr>
+              <a:t>The Sun is overhead at the Tropic of Cancer.</a:t>
+            </a:r>
+            <a:endParaRPr lang="en-US" sz="4000" dirty="0"/>
+          </a:p>
+          <a:p>
+            <a:pPr algn="l" indent="0" marL="0">
+              <a:spcAft>
+                <a:spcPts val="800"/>
+              </a:spcAft>
+              <a:buNone/>
+            </a:pPr>
+            <a:r>
+              <a:rPr lang="en-US" sz="4000" b="1" dirty="0">
+                <a:solidFill>
+                  <a:srgbClr val="111111"/>
+                </a:solidFill>
+                <a:latin typeface="Times New Roman" pitchFamily="34" charset="0"/>
+                <a:ea typeface="Times New Roman" pitchFamily="34" charset="-122"/>
+                <a:cs typeface="Times New Roman" pitchFamily="34" charset="-120"/>
+              </a:rPr>
+              <a:t>September equinox (23 September): </a:t>
+            </a:r>
+            <a:pPr algn="l" indent="0" marL="0">
+              <a:spcAft>
+                <a:spcPts val="800"/>
+              </a:spcAft>
+              <a:buNone/>
+            </a:pPr>
+            <a:r>
+              <a:rPr lang="en-US" sz="4000" dirty="0">
+                <a:solidFill>
+                  <a:srgbClr val="111111"/>
+                </a:solidFill>
+                <a:latin typeface="Times New Roman" pitchFamily="34" charset="0"/>
+                <a:ea typeface="Times New Roman" pitchFamily="34" charset="-122"/>
+                <a:cs typeface="Times New Roman" pitchFamily="34" charset="-120"/>
+              </a:rPr>
+              <a:t>The Sun is overhead at the Equator again.</a:t>
+            </a:r>
+            <a:endParaRPr lang="en-US" sz="4000" dirty="0"/>
+          </a:p>
+          <a:p>
+            <a:pPr algn="l" indent="0" marL="0">
+              <a:spcAft>
+                <a:spcPts val="800"/>
+              </a:spcAft>
+              <a:buNone/>
+            </a:pPr>
+            <a:r>
+              <a:rPr lang="en-US" sz="4000" b="1" dirty="0">
+                <a:solidFill>
+                  <a:srgbClr val="111111"/>
+                </a:solidFill>
+                <a:latin typeface="Times New Roman" pitchFamily="34" charset="0"/>
+                <a:ea typeface="Times New Roman" pitchFamily="34" charset="-122"/>
+                <a:cs typeface="Times New Roman" pitchFamily="34" charset="-120"/>
+              </a:rPr>
+              <a:t>December solstice (22 December): </a:t>
+            </a:r>
+            <a:pPr algn="l" indent="0" marL="0">
+              <a:spcAft>
+                <a:spcPts val="800"/>
+              </a:spcAft>
+              <a:buNone/>
+            </a:pPr>
+            <a:r>
+              <a:rPr lang="en-US" sz="4000" dirty="0">
+                <a:solidFill>
+                  <a:srgbClr val="111111"/>
+                </a:solidFill>
+                <a:latin typeface="Times New Roman" pitchFamily="34" charset="0"/>
+                <a:ea typeface="Times New Roman" pitchFamily="34" charset="-122"/>
+                <a:cs typeface="Times New Roman" pitchFamily="34" charset="-120"/>
+              </a:rPr>
+              <a:t>The Sun is overhead at the Tropic of Capricorn.</a:t>
             </a:r>
             <a:endParaRPr lang="en-US" sz="4000" dirty="0"/>
           </a:p>
@@ -13657,15 +14345,135 @@
                 <a:ea typeface="Calibri" pitchFamily="34" charset="-122"/>
                 <a:cs typeface="Calibri" pitchFamily="34" charset="-120"/>
               </a:rPr>
-              <a:t>FORMATIVE EVALUATION</a:t>
+              <a:t>BOARD SUMMARY</a:t>
             </a:r>
             <a:endParaRPr lang="en-US" sz="1400" dirty="0"/>
+          </a:p>
+        </p:txBody>
+      </p:sp>
+      <p:sp>
+        <p:nvSpPr>
+          <p:cNvPr id="3" name="Text 1"/>
+          <p:cNvSpPr/>
+          <p:nvPr/>
+        </p:nvSpPr>
+        <p:spPr>
+          <a:xfrm>
+            <a:off x="365760" y="1005840"/>
+            <a:ext cx="11460175" cy="731520"/>
+          </a:xfrm>
+          <a:prstGeom prst="rect">
+            <a:avLst/>
+          </a:prstGeom>
+          <a:noFill/>
+          <a:ln/>
+        </p:spPr>
+        <p:txBody>
+          <a:bodyPr wrap="square" lIns="0" tIns="0" rIns="0" bIns="0" rtlCol="0" anchor="ctr">
+            <a:normAutofit/>
+          </a:bodyPr>
+          <a:lstStyle/>
+          <a:p>
+            <a:pPr algn="ctr" indent="0" marL="0">
+              <a:buNone/>
+            </a:pPr>
+            <a:r>
+              <a:rPr lang="en-US" sz="3600" b="1" dirty="0">
+                <a:solidFill>
+                  <a:srgbClr val="990011"/>
+                </a:solidFill>
+                <a:latin typeface="Times New Roman" pitchFamily="34" charset="0"/>
+                <a:ea typeface="Times New Roman" pitchFamily="34" charset="-122"/>
+                <a:cs typeface="Times New Roman" pitchFamily="34" charset="-120"/>
+              </a:rPr>
+              <a:t>2. Effects of Revolution</a:t>
+            </a:r>
+            <a:endParaRPr lang="en-US" sz="3600" dirty="0"/>
+          </a:p>
+        </p:txBody>
+      </p:sp>
+      <p:sp>
+        <p:nvSpPr>
+          <p:cNvPr id="4" name="Text 2"/>
+          <p:cNvSpPr/>
+          <p:nvPr/>
+        </p:nvSpPr>
+        <p:spPr>
+          <a:xfrm>
+            <a:off x="365760" y="1783080"/>
+            <a:ext cx="4846320" cy="4617720"/>
+          </a:xfrm>
+          <a:prstGeom prst="rect">
+            <a:avLst/>
+          </a:prstGeom>
+          <a:noFill/>
+          <a:ln/>
+        </p:spPr>
+        <p:txBody>
+          <a:bodyPr wrap="square" lIns="0" tIns="0" rIns="0" bIns="0" rtlCol="0" anchor="t"/>
+          <a:lstStyle/>
+          <a:p>
+            <a:pPr algn="l" indent="0" marL="0">
+              <a:spcAft>
+                <a:spcPts val="800"/>
+              </a:spcAft>
+              <a:buNone/>
+            </a:pPr>
+            <a:r>
+              <a:rPr lang="en-US" sz="3200" i="1" dirty="0">
+                <a:solidFill>
+                  <a:srgbClr val="111111"/>
+                </a:solidFill>
+                <a:latin typeface="Times New Roman" pitchFamily="34" charset="0"/>
+                <a:ea typeface="Times New Roman" pitchFamily="34" charset="-122"/>
+                <a:cs typeface="Times New Roman" pitchFamily="34" charset="-120"/>
+              </a:rPr>
+              <a:t>The revolution of the Earth has the following effects:</a:t>
+            </a:r>
+            <a:endParaRPr lang="en-US" sz="3200" dirty="0"/>
+          </a:p>
+          <a:p>
+            <a:pPr algn="l" indent="0" marL="0">
+              <a:spcAft>
+                <a:spcPts val="800"/>
+              </a:spcAft>
+              <a:buNone/>
+            </a:pPr>
+            <a:r>
+              <a:rPr lang="en-US" sz="3200" b="1" dirty="0">
+                <a:solidFill>
+                  <a:srgbClr val="111111"/>
+                </a:solidFill>
+                <a:latin typeface="Times New Roman" pitchFamily="34" charset="0"/>
+                <a:ea typeface="Times New Roman" pitchFamily="34" charset="-122"/>
+                <a:cs typeface="Times New Roman" pitchFamily="34" charset="-120"/>
+              </a:rPr>
+              <a:t>Seasons: </a:t>
+            </a:r>
+            <a:pPr algn="l" indent="0" marL="0">
+              <a:spcAft>
+                <a:spcPts val="800"/>
+              </a:spcAft>
+              <a:buNone/>
+            </a:pPr>
+            <a:r>
+              <a:rPr lang="en-US" sz="3200" dirty="0">
+                <a:solidFill>
+                  <a:srgbClr val="111111"/>
+                </a:solidFill>
+                <a:latin typeface="Times New Roman" pitchFamily="34" charset="0"/>
+                <a:ea typeface="Times New Roman" pitchFamily="34" charset="-122"/>
+                <a:cs typeface="Times New Roman" pitchFamily="34" charset="-120"/>
+              </a:rPr>
+              <a:t>The overhead Sun moves between the tropics, which gives the seasons, such as the rainy and dry seasons of Garoua.</a:t>
+            </a:r>
+            <a:endParaRPr lang="en-US" sz="3200" dirty="0"/>
           </a:p>
         </p:txBody>
       </p:sp>
       <p:pic>
         <p:nvPicPr>
-          <p:cNvPr id="3" name="Image 0" descr="/home/claude/f4/img/minesec_sheet.png">    </p:cNvPr>
+          <p:cNvPr id="5" name="Image 0" descr="/home/claude/f4/img/v2/f4_rainyseason.jpg">    </p:cNvPr>
           <p:cNvPicPr>
             <a:picLocks noChangeAspect="1"/>
           </p:cNvPicPr>
@@ -13679,8 +14487,8 @@
         </p:blipFill>
         <p:spPr>
           <a:xfrm>
-            <a:off x="0" y="658368"/>
-            <a:ext cx="5120640" cy="5833872"/>
+            <a:off x="5349240" y="2069407"/>
+            <a:ext cx="6659575" cy="3697594"/>
           </a:xfrm>
           <a:prstGeom prst="rect">
             <a:avLst/>
@@ -13689,14 +14497,14 @@
       </p:pic>
       <p:sp>
         <p:nvSpPr>
-          <p:cNvPr id="4" name="Text 1"/>
+          <p:cNvPr id="6" name="Text 3"/>
           <p:cNvSpPr/>
           <p:nvPr/>
         </p:nvSpPr>
         <p:spPr>
           <a:xfrm>
-            <a:off x="5349240" y="1005840"/>
-            <a:ext cx="6522415" cy="731520"/>
+            <a:off x="5349240" y="6089904"/>
+            <a:ext cx="6659575" cy="347472"/>
           </a:xfrm>
           <a:prstGeom prst="rect">
             <a:avLst/>
@@ -13705,68 +14513,24 @@
           <a:ln/>
         </p:spPr>
         <p:txBody>
-          <a:bodyPr wrap="square" lIns="0" tIns="0" rIns="0" bIns="0" rtlCol="0" anchor="ctr">
-            <a:normAutofit/>
-          </a:bodyPr>
+          <a:bodyPr wrap="square" lIns="0" tIns="0" rIns="0" bIns="0" rtlCol="0" anchor="ctr"/>
           <a:lstStyle/>
           <a:p>
             <a:pPr algn="ctr" indent="0" marL="0">
               <a:buNone/>
             </a:pPr>
             <a:r>
-              <a:rPr lang="en-US" sz="3600" b="1" dirty="0">
-                <a:solidFill>
-                  <a:srgbClr val="990011"/>
+              <a:rPr lang="en-US" sz="1600" i="1" dirty="0">
+                <a:solidFill>
+                  <a:srgbClr val="555555"/>
                 </a:solidFill>
                 <a:latin typeface="Times New Roman" pitchFamily="34" charset="0"/>
                 <a:ea typeface="Times New Roman" pitchFamily="34" charset="-122"/>
                 <a:cs typeface="Times New Roman" pitchFamily="34" charset="-120"/>
               </a:rPr>
-              <a:t>Evaluation 2</a:t>
-            </a:r>
-            <a:endParaRPr lang="en-US" sz="3600" dirty="0"/>
-          </a:p>
-        </p:txBody>
-      </p:sp>
-      <p:sp>
-        <p:nvSpPr>
-          <p:cNvPr id="5" name="Text 2"/>
-          <p:cNvSpPr/>
-          <p:nvPr/>
-        </p:nvSpPr>
-        <p:spPr>
-          <a:xfrm>
-            <a:off x="5349240" y="1783080"/>
-            <a:ext cx="6522415" cy="4663440"/>
-          </a:xfrm>
-          <a:prstGeom prst="rect">
-            <a:avLst/>
-          </a:prstGeom>
-          <a:noFill/>
-          <a:ln/>
-        </p:spPr>
-        <p:txBody>
-          <a:bodyPr wrap="square" lIns="0" tIns="0" rIns="0" bIns="0" rtlCol="0" anchor="t"/>
-          <a:lstStyle/>
-          <a:p>
-            <a:pPr algn="l" indent="0" marL="0">
-              <a:spcAft>
-                <a:spcPts val="800"/>
-              </a:spcAft>
-              <a:buNone/>
-            </a:pPr>
-            <a:r>
-              <a:rPr lang="en-US" sz="4000" dirty="0">
-                <a:solidFill>
-                  <a:srgbClr val="111111"/>
-                </a:solidFill>
-                <a:latin typeface="Times New Roman" pitchFamily="34" charset="0"/>
-                <a:ea typeface="Times New Roman" pitchFamily="34" charset="-122"/>
-                <a:cs typeface="Times New Roman" pitchFamily="34" charset="-120"/>
-              </a:rPr>
-              <a:t>Where is the Sun overhead on 21 March?</a:t>
-            </a:r>
-            <a:endParaRPr lang="en-US" sz="4000" dirty="0"/>
+              <a:t>Illustration: planting at the start of the rains</a:t>
+            </a:r>
+            <a:endParaRPr lang="en-US" sz="1600" dirty="0"/>
           </a:p>
         </p:txBody>
       </p:sp>
@@ -13876,7 +14640,7 @@
                 <a:ea typeface="Calibri" pitchFamily="34" charset="-122"/>
                 <a:cs typeface="Calibri" pitchFamily="34" charset="-120"/>
               </a:rPr>
-              <a:t>FORMATIVE EVALUATION</a:t>
+              <a:t>BOARD SUMMARY</a:t>
             </a:r>
             <a:endParaRPr lang="en-US" sz="1400" dirty="0"/>
           </a:p>
@@ -13899,7 +14663,7 @@
         <p:spPr>
           <a:xfrm>
             <a:off x="0" y="658368"/>
-            <a:ext cx="5120640" cy="5833872"/>
+            <a:ext cx="2468880" cy="5833872"/>
           </a:xfrm>
           <a:prstGeom prst="rect">
             <a:avLst/>
@@ -13914,8 +14678,8 @@
         </p:nvSpPr>
         <p:spPr>
           <a:xfrm>
-            <a:off x="5349240" y="1005840"/>
-            <a:ext cx="6522415" cy="731520"/>
+            <a:off x="2697480" y="1005840"/>
+            <a:ext cx="9174175" cy="731520"/>
           </a:xfrm>
           <a:prstGeom prst="rect">
             <a:avLst/>
@@ -13941,7 +14705,7 @@
                 <a:ea typeface="Times New Roman" pitchFamily="34" charset="-122"/>
                 <a:cs typeface="Times New Roman" pitchFamily="34" charset="-120"/>
               </a:rPr>
-              <a:t>Expected Answer</a:t>
+              <a:t>2. Effects of Revolution</a:t>
             </a:r>
             <a:endParaRPr lang="en-US" sz="3600" dirty="0"/>
           </a:p>
@@ -13955,8 +14719,8 @@
         </p:nvSpPr>
         <p:spPr>
           <a:xfrm>
-            <a:off x="5349240" y="1783080"/>
-            <a:ext cx="6522415" cy="4663440"/>
+            <a:off x="2697480" y="1783080"/>
+            <a:ext cx="9174175" cy="4663440"/>
           </a:xfrm>
           <a:prstGeom prst="rect">
             <a:avLst/>
@@ -13975,7 +14739,7 @@
               <a:buNone/>
             </a:pPr>
             <a:r>
-              <a:rPr lang="en-US" sz="4000" dirty="0">
+              <a:rPr lang="en-US" sz="4000" b="1" dirty="0">
                 <a:solidFill>
                   <a:srgbClr val="111111"/>
                 </a:solidFill>
@@ -13983,7 +14747,61 @@
                 <a:ea typeface="Times New Roman" pitchFamily="34" charset="-122"/>
                 <a:cs typeface="Times New Roman" pitchFamily="34" charset="-120"/>
               </a:rPr>
-              <a:t>At the Equator.</a:t>
+              <a:t>Varying length of day and night: </a:t>
+            </a:r>
+            <a:pPr algn="l" indent="0" marL="0">
+              <a:spcAft>
+                <a:spcPts val="800"/>
+              </a:spcAft>
+              <a:buNone/>
+            </a:pPr>
+            <a:r>
+              <a:rPr lang="en-US" sz="4000" dirty="0">
+                <a:solidFill>
+                  <a:srgbClr val="111111"/>
+                </a:solidFill>
+                <a:latin typeface="Times New Roman" pitchFamily="34" charset="0"/>
+                <a:ea typeface="Times New Roman" pitchFamily="34" charset="-122"/>
+                <a:cs typeface="Times New Roman" pitchFamily="34" charset="-120"/>
+              </a:rPr>
+              <a:t>Away from the Equator, days are longer in summer and shorter in winter.</a:t>
+            </a:r>
+            <a:endParaRPr lang="en-US" sz="4000" dirty="0"/>
+          </a:p>
+          <a:p>
+            <a:pPr algn="l" indent="0" marL="0">
+              <a:spcAft>
+                <a:spcPts val="800"/>
+              </a:spcAft>
+              <a:buNone/>
+            </a:pPr>
+            <a:r>
+              <a:rPr lang="en-US" sz="4000" b="1" dirty="0">
+                <a:solidFill>
+                  <a:srgbClr val="111111"/>
+                </a:solidFill>
+                <a:latin typeface="Times New Roman" pitchFamily="34" charset="0"/>
+                <a:ea typeface="Times New Roman" pitchFamily="34" charset="-122"/>
+                <a:cs typeface="Times New Roman" pitchFamily="34" charset="-120"/>
+              </a:rPr>
+              <a:t>Midnight Sun and polar night: </a:t>
+            </a:r>
+            <a:pPr algn="l" indent="0" marL="0">
+              <a:spcAft>
+                <a:spcPts val="800"/>
+              </a:spcAft>
+              <a:buNone/>
+            </a:pPr>
+            <a:r>
+              <a:rPr lang="en-US" sz="4000" dirty="0">
+                <a:solidFill>
+                  <a:srgbClr val="111111"/>
+                </a:solidFill>
+                <a:latin typeface="Times New Roman" pitchFamily="34" charset="0"/>
+                <a:ea typeface="Times New Roman" pitchFamily="34" charset="-122"/>
+                <a:cs typeface="Times New Roman" pitchFamily="34" charset="-120"/>
+              </a:rPr>
+              <a:t>Beyond the polar circles, the Sun can stay up, or stay down, for 24 hours or more.</a:t>
             </a:r>
             <a:endParaRPr lang="en-US" sz="4000" dirty="0"/>
           </a:p>
@@ -14095,7 +14913,7 @@
                 <a:ea typeface="Calibri" pitchFamily="34" charset="-122"/>
                 <a:cs typeface="Calibri" pitchFamily="34" charset="-120"/>
               </a:rPr>
-              <a:t>REMEDIATION</a:t>
+              <a:t>BOARD SUMMARY</a:t>
             </a:r>
             <a:endParaRPr lang="en-US" sz="1400" dirty="0"/>
           </a:p>
@@ -14118,7 +14936,7 @@
         <p:spPr>
           <a:xfrm>
             <a:off x="0" y="658368"/>
-            <a:ext cx="2468880" cy="5833872"/>
+            <a:ext cx="5120640" cy="5833872"/>
           </a:xfrm>
           <a:prstGeom prst="rect">
             <a:avLst/>
@@ -14133,8 +14951,8 @@
         </p:nvSpPr>
         <p:spPr>
           <a:xfrm>
-            <a:off x="2697480" y="1005840"/>
-            <a:ext cx="9174175" cy="731520"/>
+            <a:off x="5349240" y="1005840"/>
+            <a:ext cx="6522415" cy="731520"/>
           </a:xfrm>
           <a:prstGeom prst="rect">
             <a:avLst/>
@@ -14160,7 +14978,7 @@
                 <a:ea typeface="Times New Roman" pitchFamily="34" charset="-122"/>
                 <a:cs typeface="Times New Roman" pitchFamily="34" charset="-120"/>
               </a:rPr>
-              <a:t>Remediation</a:t>
+              <a:t>2. Effects of Revolution (continued)</a:t>
             </a:r>
             <a:endParaRPr lang="en-US" sz="3600" dirty="0"/>
           </a:p>
@@ -14174,8 +14992,8 @@
         </p:nvSpPr>
         <p:spPr>
           <a:xfrm>
-            <a:off x="2697480" y="1783080"/>
-            <a:ext cx="9174175" cy="4663440"/>
+            <a:off x="5349240" y="1783080"/>
+            <a:ext cx="6522415" cy="4663440"/>
           </a:xfrm>
           <a:prstGeom prst="rect">
             <a:avLst/>
@@ -14202,18 +15020,13 @@
                 <a:ea typeface="Times New Roman" pitchFamily="34" charset="-122"/>
                 <a:cs typeface="Times New Roman" pitchFamily="34" charset="-120"/>
               </a:rPr>
-              <a:t>Fill in the blanks:</a:t>
-            </a:r>
-            <a:endParaRPr lang="en-US" sz="4000" dirty="0"/>
-          </a:p>
-          <a:p>
-            <a:pPr algn="l" marL="342900" indent="-342900">
+              <a:t>The year and leap year: </a:t>
+            </a:r>
+            <a:pPr algn="l" indent="0" marL="0">
               <a:spcAft>
                 <a:spcPts val="800"/>
               </a:spcAft>
-              <a:buSzPct val="100000"/>
-              <a:buFont typeface="+mj-lt"/>
-              <a:buAutoNum type="arabicPeriod" startAt="1"/>
+              <a:buNone/>
             </a:pPr>
             <a:r>
               <a:rPr lang="en-US" sz="4000" dirty="0">
@@ -14224,51 +15037,7 @@
                 <a:ea typeface="Times New Roman" pitchFamily="34" charset="-122"/>
                 <a:cs typeface="Times New Roman" pitchFamily="34" charset="-120"/>
               </a:rPr>
-              <a:t>The movement of the Earth around the Sun is ______.</a:t>
-            </a:r>
-            <a:endParaRPr lang="en-US" sz="4000" dirty="0"/>
-          </a:p>
-          <a:p>
-            <a:pPr algn="l" marL="342900" indent="-342900">
-              <a:spcAft>
-                <a:spcPts val="800"/>
-              </a:spcAft>
-              <a:buSzPct val="100000"/>
-              <a:buFont typeface="+mj-lt"/>
-              <a:buAutoNum type="arabicPeriod" startAt="1"/>
-            </a:pPr>
-            <a:r>
-              <a:rPr lang="en-US" sz="4000" dirty="0">
-                <a:solidFill>
-                  <a:srgbClr val="111111"/>
-                </a:solidFill>
-                <a:latin typeface="Times New Roman" pitchFamily="34" charset="0"/>
-                <a:ea typeface="Times New Roman" pitchFamily="34" charset="-122"/>
-                <a:cs typeface="Times New Roman" pitchFamily="34" charset="-120"/>
-              </a:rPr>
-              <a:t>On 21 June, the Sun is overhead at the Tropic of ______.</a:t>
-            </a:r>
-            <a:endParaRPr lang="en-US" sz="4000" dirty="0"/>
-          </a:p>
-          <a:p>
-            <a:pPr algn="l" marL="342900" indent="-342900">
-              <a:spcAft>
-                <a:spcPts val="800"/>
-              </a:spcAft>
-              <a:buSzPct val="100000"/>
-              <a:buFont typeface="+mj-lt"/>
-              <a:buAutoNum type="arabicPeriod" startAt="1"/>
-            </a:pPr>
-            <a:r>
-              <a:rPr lang="en-US" sz="4000" dirty="0">
-                <a:solidFill>
-                  <a:srgbClr val="111111"/>
-                </a:solidFill>
-                <a:latin typeface="Times New Roman" pitchFamily="34" charset="0"/>
-                <a:ea typeface="Times New Roman" pitchFamily="34" charset="-122"/>
-                <a:cs typeface="Times New Roman" pitchFamily="34" charset="-120"/>
-              </a:rPr>
-              <a:t>A year of 366 days is a ______ year.</a:t>
+              <a:t>A year has 365 days, and the extra quarter day gives a leap year of 366 days every four years.</a:t>
             </a:r>
             <a:endParaRPr lang="en-US" sz="4000" dirty="0"/>
           </a:p>
@@ -14619,15 +15388,115 @@
                 <a:ea typeface="Calibri" pitchFamily="34" charset="-122"/>
                 <a:cs typeface="Calibri" pitchFamily="34" charset="-120"/>
               </a:rPr>
-              <a:t>HOMEWORK</a:t>
+              <a:t>BOARD SUMMARY</a:t>
             </a:r>
             <a:endParaRPr lang="en-US" sz="1400" dirty="0"/>
+          </a:p>
+        </p:txBody>
+      </p:sp>
+      <p:sp>
+        <p:nvSpPr>
+          <p:cNvPr id="3" name="Text 1"/>
+          <p:cNvSpPr/>
+          <p:nvPr/>
+        </p:nvSpPr>
+        <p:spPr>
+          <a:xfrm>
+            <a:off x="365760" y="1005840"/>
+            <a:ext cx="11460175" cy="731520"/>
+          </a:xfrm>
+          <a:prstGeom prst="rect">
+            <a:avLst/>
+          </a:prstGeom>
+          <a:noFill/>
+          <a:ln/>
+        </p:spPr>
+        <p:txBody>
+          <a:bodyPr wrap="square" lIns="0" tIns="0" rIns="0" bIns="0" rtlCol="0" anchor="ctr">
+            <a:normAutofit/>
+          </a:bodyPr>
+          <a:lstStyle/>
+          <a:p>
+            <a:pPr algn="ctr" indent="0" marL="0">
+              <a:buNone/>
+            </a:pPr>
+            <a:r>
+              <a:rPr lang="en-US" sz="3600" b="1" dirty="0">
+                <a:solidFill>
+                  <a:srgbClr val="990011"/>
+                </a:solidFill>
+                <a:latin typeface="Times New Roman" pitchFamily="34" charset="0"/>
+                <a:ea typeface="Times New Roman" pitchFamily="34" charset="-122"/>
+                <a:cs typeface="Times New Roman" pitchFamily="34" charset="-120"/>
+              </a:rPr>
+              <a:t>2. Effects of Revolution</a:t>
+            </a:r>
+            <a:endParaRPr lang="en-US" sz="3600" dirty="0"/>
+          </a:p>
+        </p:txBody>
+      </p:sp>
+      <p:sp>
+        <p:nvSpPr>
+          <p:cNvPr id="4" name="Text 2"/>
+          <p:cNvSpPr/>
+          <p:nvPr/>
+        </p:nvSpPr>
+        <p:spPr>
+          <a:xfrm>
+            <a:off x="365760" y="1783080"/>
+            <a:ext cx="4846320" cy="4617720"/>
+          </a:xfrm>
+          <a:prstGeom prst="rect">
+            <a:avLst/>
+          </a:prstGeom>
+          <a:noFill/>
+          <a:ln/>
+        </p:spPr>
+        <p:txBody>
+          <a:bodyPr wrap="square" lIns="0" tIns="0" rIns="0" bIns="0" rtlCol="0" anchor="t"/>
+          <a:lstStyle/>
+          <a:p>
+            <a:pPr algn="l" indent="0" marL="0">
+              <a:spcAft>
+                <a:spcPts val="800"/>
+              </a:spcAft>
+              <a:buNone/>
+            </a:pPr>
+            <a:r>
+              <a:rPr lang="en-US" sz="3600" b="1" dirty="0">
+                <a:solidFill>
+                  <a:srgbClr val="111111"/>
+                </a:solidFill>
+                <a:latin typeface="Times New Roman" pitchFamily="34" charset="0"/>
+                <a:ea typeface="Times New Roman" pitchFamily="34" charset="-122"/>
+                <a:cs typeface="Times New Roman" pitchFamily="34" charset="-120"/>
+              </a:rPr>
+              <a:t>Different heating of the Earth: </a:t>
+            </a:r>
+            <a:pPr algn="l" indent="0" marL="0">
+              <a:spcAft>
+                <a:spcPts val="800"/>
+              </a:spcAft>
+              <a:buNone/>
+            </a:pPr>
+            <a:r>
+              <a:rPr lang="en-US" sz="3600" dirty="0">
+                <a:solidFill>
+                  <a:srgbClr val="111111"/>
+                </a:solidFill>
+                <a:latin typeface="Times New Roman" pitchFamily="34" charset="0"/>
+                <a:ea typeface="Times New Roman" pitchFamily="34" charset="-122"/>
+                <a:cs typeface="Times New Roman" pitchFamily="34" charset="-120"/>
+              </a:rPr>
+              <a:t>The tilted axis makes the Sun's rays direct near the tropics and slanting near the poles.</a:t>
+            </a:r>
+            <a:endParaRPr lang="en-US" sz="3600" dirty="0"/>
           </a:p>
         </p:txBody>
       </p:sp>
       <p:pic>
         <p:nvPicPr>
-          <p:cNvPr id="3" name="Image 0" descr="/home/claude/f4/img/minesec_sheet.png">    </p:cNvPr>
+          <p:cNvPr id="5" name="Image 0" descr="/home/claude/f4/img/v2/sun_rays_big.png">    </p:cNvPr>
           <p:cNvPicPr>
             <a:picLocks noChangeAspect="1"/>
           </p:cNvPicPr>
@@ -14641,8 +15510,8 @@
         </p:blipFill>
         <p:spPr>
           <a:xfrm>
-            <a:off x="0" y="658368"/>
-            <a:ext cx="5120640" cy="5833872"/>
+            <a:off x="5349240" y="2617506"/>
+            <a:ext cx="6659575" cy="2601397"/>
           </a:xfrm>
           <a:prstGeom prst="rect">
             <a:avLst/>
@@ -14651,14 +15520,14 @@
       </p:pic>
       <p:sp>
         <p:nvSpPr>
-          <p:cNvPr id="4" name="Text 1"/>
+          <p:cNvPr id="6" name="Text 3"/>
           <p:cNvSpPr/>
           <p:nvPr/>
         </p:nvSpPr>
         <p:spPr>
           <a:xfrm>
-            <a:off x="5349240" y="1005840"/>
-            <a:ext cx="6522415" cy="731520"/>
+            <a:off x="5349240" y="6089904"/>
+            <a:ext cx="6659575" cy="347472"/>
           </a:xfrm>
           <a:prstGeom prst="rect">
             <a:avLst/>
@@ -14667,68 +15536,24 @@
           <a:ln/>
         </p:spPr>
         <p:txBody>
-          <a:bodyPr wrap="square" lIns="0" tIns="0" rIns="0" bIns="0" rtlCol="0" anchor="ctr">
-            <a:normAutofit/>
-          </a:bodyPr>
+          <a:bodyPr wrap="square" lIns="0" tIns="0" rIns="0" bIns="0" rtlCol="0" anchor="ctr"/>
           <a:lstStyle/>
           <a:p>
             <a:pPr algn="ctr" indent="0" marL="0">
               <a:buNone/>
             </a:pPr>
             <a:r>
-              <a:rPr lang="en-US" sz="3600" b="1" dirty="0">
-                <a:solidFill>
-                  <a:srgbClr val="990011"/>
+              <a:rPr lang="en-US" sz="1600" i="1" dirty="0">
+                <a:solidFill>
+                  <a:srgbClr val="555555"/>
                 </a:solidFill>
                 <a:latin typeface="Times New Roman" pitchFamily="34" charset="0"/>
                 <a:ea typeface="Times New Roman" pitchFamily="34" charset="-122"/>
                 <a:cs typeface="Times New Roman" pitchFamily="34" charset="-120"/>
               </a:rPr>
-              <a:t>Homework</a:t>
-            </a:r>
-            <a:endParaRPr lang="en-US" sz="3600" dirty="0"/>
-          </a:p>
-        </p:txBody>
-      </p:sp>
-      <p:sp>
-        <p:nvSpPr>
-          <p:cNvPr id="5" name="Text 2"/>
-          <p:cNvSpPr/>
-          <p:nvPr/>
-        </p:nvSpPr>
-        <p:spPr>
-          <a:xfrm>
-            <a:off x="5349240" y="1783080"/>
-            <a:ext cx="6522415" cy="4663440"/>
-          </a:xfrm>
-          <a:prstGeom prst="rect">
-            <a:avLst/>
-          </a:prstGeom>
-          <a:noFill/>
-          <a:ln/>
-        </p:spPr>
-        <p:txBody>
-          <a:bodyPr wrap="square" lIns="0" tIns="0" rIns="0" bIns="0" rtlCol="0" anchor="t"/>
-          <a:lstStyle/>
-          <a:p>
-            <a:pPr algn="l" indent="0" marL="0">
-              <a:spcAft>
-                <a:spcPts val="800"/>
-              </a:spcAft>
-              <a:buNone/>
-            </a:pPr>
-            <a:r>
-              <a:rPr lang="en-US" sz="4000" dirty="0">
-                <a:solidFill>
-                  <a:srgbClr val="111111"/>
-                </a:solidFill>
-                <a:latin typeface="Times New Roman" pitchFamily="34" charset="0"/>
-                <a:ea typeface="Times New Roman" pitchFamily="34" charset="-122"/>
-                <a:cs typeface="Times New Roman" pitchFamily="34" charset="-120"/>
-              </a:rPr>
-              <a:t>Cut an orange, an onion or an egg in half. Draw what you see inside and name its layers.</a:t>
-            </a:r>
-            <a:endParaRPr lang="en-US" sz="4000" dirty="0"/>
+              <a:t>Illustration: the Sun's rays and latitude</a:t>
+            </a:r>
+            <a:endParaRPr lang="en-US" sz="1600" dirty="0"/>
           </a:p>
         </p:txBody>
       </p:sp>
@@ -14838,7 +15663,7 @@
                 <a:ea typeface="Calibri" pitchFamily="34" charset="-122"/>
                 <a:cs typeface="Calibri" pitchFamily="34" charset="-120"/>
               </a:rPr>
-              <a:t>NEXT LESSON</a:t>
+              <a:t>FORMATIVE EVALUATION</a:t>
             </a:r>
             <a:endParaRPr lang="en-US" sz="1400" dirty="0"/>
           </a:p>
@@ -14903,7 +15728,7 @@
                 <a:ea typeface="Times New Roman" pitchFamily="34" charset="-122"/>
                 <a:cs typeface="Times New Roman" pitchFamily="34" charset="-120"/>
               </a:rPr>
-              <a:t>Next Lesson</a:t>
+              <a:t>Evaluation 1</a:t>
             </a:r>
             <a:endParaRPr lang="en-US" sz="3600" dirty="0"/>
           </a:p>
@@ -14927,17 +15752,17 @@
           <a:ln/>
         </p:spPr>
         <p:txBody>
-          <a:bodyPr wrap="square" lIns="0" tIns="0" rIns="0" bIns="0" rtlCol="0" anchor="ctr"/>
-          <a:lstStyle/>
-          <a:p>
-            <a:pPr algn="ctr" indent="0" marL="0">
+          <a:bodyPr wrap="square" lIns="0" tIns="0" rIns="0" bIns="0" rtlCol="0" anchor="t"/>
+          <a:lstStyle/>
+          <a:p>
+            <a:pPr algn="l" indent="0" marL="0">
               <a:spcAft>
                 <a:spcPts val="800"/>
               </a:spcAft>
               <a:buNone/>
             </a:pPr>
             <a:r>
-              <a:rPr lang="en-US" sz="4000" b="1" dirty="0">
+              <a:rPr lang="en-US" sz="4000" dirty="0">
                 <a:solidFill>
                   <a:srgbClr val="111111"/>
                 </a:solidFill>
@@ -14945,27 +15770,7 @@
                 <a:ea typeface="Times New Roman" pitchFamily="34" charset="-122"/>
                 <a:cs typeface="Times New Roman" pitchFamily="34" charset="-120"/>
               </a:rPr>
-              <a:t>Our next lesson will be on:</a:t>
-            </a:r>
-            <a:endParaRPr lang="en-US" sz="4000" dirty="0"/>
-          </a:p>
-          <a:p>
-            <a:pPr algn="ctr" indent="0" marL="0">
-              <a:spcAft>
-                <a:spcPts val="800"/>
-              </a:spcAft>
-              <a:buNone/>
-            </a:pPr>
-            <a:r>
-              <a:rPr lang="en-US" sz="4000" b="1" dirty="0">
-                <a:solidFill>
-                  <a:srgbClr val="990011"/>
-                </a:solidFill>
-                <a:latin typeface="Times New Roman" pitchFamily="34" charset="0"/>
-                <a:ea typeface="Times New Roman" pitchFamily="34" charset="-122"/>
-                <a:cs typeface="Times New Roman" pitchFamily="34" charset="-120"/>
-              </a:rPr>
-              <a:t>Lesson 7: The Internal Structure of the Earth</a:t>
+              <a:t>How long does one revolution take?</a:t>
             </a:r>
             <a:endParaRPr lang="en-US" sz="4000" dirty="0"/>
           </a:p>
@@ -15077,6 +15882,1406 @@
                 <a:ea typeface="Calibri" pitchFamily="34" charset="-122"/>
                 <a:cs typeface="Calibri" pitchFamily="34" charset="-120"/>
               </a:rPr>
+              <a:t>FORMATIVE EVALUATION</a:t>
+            </a:r>
+            <a:endParaRPr lang="en-US" sz="1400" dirty="0"/>
+          </a:p>
+        </p:txBody>
+      </p:sp>
+      <p:pic>
+        <p:nvPicPr>
+          <p:cNvPr id="3" name="Image 0" descr="/home/claude/f4/img/minesec_sheet.png">    </p:cNvPr>
+          <p:cNvPicPr>
+            <a:picLocks noChangeAspect="1"/>
+          </p:cNvPicPr>
+          <p:nvPr/>
+        </p:nvPicPr>
+        <p:blipFill>
+          <a:blip r:embed="rId1"/>
+          <a:stretch>
+            <a:fillRect/>
+          </a:stretch>
+        </p:blipFill>
+        <p:spPr>
+          <a:xfrm>
+            <a:off x="0" y="658368"/>
+            <a:ext cx="5120640" cy="5833872"/>
+          </a:xfrm>
+          <a:prstGeom prst="rect">
+            <a:avLst/>
+          </a:prstGeom>
+        </p:spPr>
+      </p:pic>
+      <p:sp>
+        <p:nvSpPr>
+          <p:cNvPr id="4" name="Text 1"/>
+          <p:cNvSpPr/>
+          <p:nvPr/>
+        </p:nvSpPr>
+        <p:spPr>
+          <a:xfrm>
+            <a:off x="5349240" y="1005840"/>
+            <a:ext cx="6522415" cy="731520"/>
+          </a:xfrm>
+          <a:prstGeom prst="rect">
+            <a:avLst/>
+          </a:prstGeom>
+          <a:noFill/>
+          <a:ln/>
+        </p:spPr>
+        <p:txBody>
+          <a:bodyPr wrap="square" lIns="0" tIns="0" rIns="0" bIns="0" rtlCol="0" anchor="ctr">
+            <a:normAutofit/>
+          </a:bodyPr>
+          <a:lstStyle/>
+          <a:p>
+            <a:pPr algn="ctr" indent="0" marL="0">
+              <a:buNone/>
+            </a:pPr>
+            <a:r>
+              <a:rPr lang="en-US" sz="3600" b="1" dirty="0">
+                <a:solidFill>
+                  <a:srgbClr val="990011"/>
+                </a:solidFill>
+                <a:latin typeface="Times New Roman" pitchFamily="34" charset="0"/>
+                <a:ea typeface="Times New Roman" pitchFamily="34" charset="-122"/>
+                <a:cs typeface="Times New Roman" pitchFamily="34" charset="-120"/>
+              </a:rPr>
+              <a:t>Expected Answer</a:t>
+            </a:r>
+            <a:endParaRPr lang="en-US" sz="3600" dirty="0"/>
+          </a:p>
+        </p:txBody>
+      </p:sp>
+      <p:sp>
+        <p:nvSpPr>
+          <p:cNvPr id="5" name="Text 2"/>
+          <p:cNvSpPr/>
+          <p:nvPr/>
+        </p:nvSpPr>
+        <p:spPr>
+          <a:xfrm>
+            <a:off x="5349240" y="1783080"/>
+            <a:ext cx="6522415" cy="4663440"/>
+          </a:xfrm>
+          <a:prstGeom prst="rect">
+            <a:avLst/>
+          </a:prstGeom>
+          <a:noFill/>
+          <a:ln/>
+        </p:spPr>
+        <p:txBody>
+          <a:bodyPr wrap="square" lIns="0" tIns="0" rIns="0" bIns="0" rtlCol="0" anchor="t"/>
+          <a:lstStyle/>
+          <a:p>
+            <a:pPr algn="l" indent="0" marL="0">
+              <a:spcAft>
+                <a:spcPts val="800"/>
+              </a:spcAft>
+              <a:buNone/>
+            </a:pPr>
+            <a:r>
+              <a:rPr lang="en-US" sz="4000" dirty="0">
+                <a:solidFill>
+                  <a:srgbClr val="111111"/>
+                </a:solidFill>
+                <a:latin typeface="Times New Roman" pitchFamily="34" charset="0"/>
+                <a:ea typeface="Times New Roman" pitchFamily="34" charset="-122"/>
+                <a:cs typeface="Times New Roman" pitchFamily="34" charset="-120"/>
+              </a:rPr>
+              <a:t>365¼ days.</a:t>
+            </a:r>
+            <a:endParaRPr lang="en-US" sz="4000" dirty="0"/>
+          </a:p>
+        </p:txBody>
+      </p:sp>
+      <p:sp>
+        <p:nvSpPr>
+          <p:cNvPr id="25" name="Slide Number Placeholder 0"/>
+          <p:cNvSpPr>
+            <a:spLocks noGrp="1"/>
+          </p:cNvSpPr>
+          <p:nvPr>
+            <p:ph type="sldNum" sz="quarter" idx="4294967295"/>
+          </p:nvPr>
+        </p:nvSpPr>
+        <p:spPr>
+          <a:xfrm>
+            <a:off x="27432" y="91440"/>
+            <a:ext cx="585216" cy="475488"/>
+          </a:xfrm>
+          <a:prstGeom prst="rect">
+            <a:avLst/>
+          </a:prstGeom>
+          <a:extLst>
+            <a:ext uri="{C572A759-6A51-4108-AA02-DFA0A04FC94B}">
+              <ma14:wrappingTextBoxFlag xmlns:ma14="http://schemas.microsoft.com/office/mac/drawingml/2011/main" val="0"/>
+            </a:ext>
+          </a:extLst>
+        </p:spPr>
+        <p:txBody>
+          <a:bodyPr/>
+          <a:lstStyle>
+            <a:lvl1pPr>
+              <a:defRPr sz="2000">
+                <a:solidFill>
+                  <a:srgbClr val="FFFFFF"/>
+                </a:solidFill>
+                <a:latin typeface="Calibri"/>
+                <a:ea typeface="Calibri"/>
+                <a:cs typeface="Calibri"/>
+              </a:defRPr>
+            </a:lvl1pPr>
+          </a:lstStyle>
+          <a:p>
+            <a:pPr algn="ctr"/>
+            <a:fld id="{F7021451-1387-4CA6-816F-3879F97B5CBC}" type="slidenum">
+              <a:rPr b="1" lang="en-US"/>
+              <a:t>42</a:t>
+            </a:fld>
+            <a:endParaRPr lang="en-US"/>
+          </a:p>
+        </p:txBody>
+      </p:sp>
+    </p:spTree>
+  </p:cSld>
+  <p:clrMapOvr>
+    <a:masterClrMapping/>
+  </p:clrMapOvr>
+</p:sld>
+</file>
+
+<file path=ppt/slides/slide43.xml><?xml version="1.0" encoding="utf-8"?>
+<p:sld xmlns:a="http://schemas.openxmlformats.org/drawingml/2006/main" xmlns:r="http://schemas.openxmlformats.org/officeDocument/2006/relationships" xmlns:p="http://schemas.openxmlformats.org/presentationml/2006/main">
+  <p:cSld name="Slide 43">
+    <p:spTree>
+      <p:nvGrpSpPr>
+        <p:cNvPr id="1" name=""/>
+        <p:cNvGrpSpPr/>
+        <p:nvPr/>
+      </p:nvGrpSpPr>
+      <p:grpSpPr>
+        <a:xfrm>
+          <a:off x="0" y="0"/>
+          <a:ext cx="0" cy="0"/>
+          <a:chOff x="0" y="0"/>
+          <a:chExt cx="0" cy="0"/>
+        </a:xfrm>
+      </p:grpSpPr>
+      <p:sp>
+        <p:nvSpPr>
+          <p:cNvPr id="2" name="Text 0"/>
+          <p:cNvSpPr/>
+          <p:nvPr/>
+        </p:nvSpPr>
+        <p:spPr>
+          <a:xfrm>
+            <a:off x="457200" y="713232"/>
+            <a:ext cx="11368735" cy="274320"/>
+          </a:xfrm>
+          <a:prstGeom prst="rect">
+            <a:avLst/>
+          </a:prstGeom>
+          <a:noFill/>
+          <a:ln/>
+        </p:spPr>
+        <p:txBody>
+          <a:bodyPr wrap="square" lIns="0" tIns="0" rIns="0" bIns="0" rtlCol="0" anchor="ctr"/>
+          <a:lstStyle/>
+          <a:p>
+            <a:pPr algn="r" indent="0" marL="0">
+              <a:buNone/>
+            </a:pPr>
+            <a:r>
+              <a:rPr lang="en-US" sz="1400" b="1" dirty="0">
+                <a:solidFill>
+                  <a:srgbClr val="1C3F6E"/>
+                </a:solidFill>
+                <a:latin typeface="Calibri" pitchFamily="34" charset="0"/>
+                <a:ea typeface="Calibri" pitchFamily="34" charset="-122"/>
+                <a:cs typeface="Calibri" pitchFamily="34" charset="-120"/>
+              </a:rPr>
+              <a:t>FORMATIVE EVALUATION</a:t>
+            </a:r>
+            <a:endParaRPr lang="en-US" sz="1400" dirty="0"/>
+          </a:p>
+        </p:txBody>
+      </p:sp>
+      <p:pic>
+        <p:nvPicPr>
+          <p:cNvPr id="3" name="Image 0" descr="/home/claude/f4/img/minesec_sheet.png">    </p:cNvPr>
+          <p:cNvPicPr>
+            <a:picLocks noChangeAspect="1"/>
+          </p:cNvPicPr>
+          <p:nvPr/>
+        </p:nvPicPr>
+        <p:blipFill>
+          <a:blip r:embed="rId1"/>
+          <a:stretch>
+            <a:fillRect/>
+          </a:stretch>
+        </p:blipFill>
+        <p:spPr>
+          <a:xfrm>
+            <a:off x="0" y="658368"/>
+            <a:ext cx="5120640" cy="5833872"/>
+          </a:xfrm>
+          <a:prstGeom prst="rect">
+            <a:avLst/>
+          </a:prstGeom>
+        </p:spPr>
+      </p:pic>
+      <p:sp>
+        <p:nvSpPr>
+          <p:cNvPr id="4" name="Text 1"/>
+          <p:cNvSpPr/>
+          <p:nvPr/>
+        </p:nvSpPr>
+        <p:spPr>
+          <a:xfrm>
+            <a:off x="5349240" y="1005840"/>
+            <a:ext cx="6522415" cy="731520"/>
+          </a:xfrm>
+          <a:prstGeom prst="rect">
+            <a:avLst/>
+          </a:prstGeom>
+          <a:noFill/>
+          <a:ln/>
+        </p:spPr>
+        <p:txBody>
+          <a:bodyPr wrap="square" lIns="0" tIns="0" rIns="0" bIns="0" rtlCol="0" anchor="ctr">
+            <a:normAutofit/>
+          </a:bodyPr>
+          <a:lstStyle/>
+          <a:p>
+            <a:pPr algn="ctr" indent="0" marL="0">
+              <a:buNone/>
+            </a:pPr>
+            <a:r>
+              <a:rPr lang="en-US" sz="3600" b="1" dirty="0">
+                <a:solidFill>
+                  <a:srgbClr val="990011"/>
+                </a:solidFill>
+                <a:latin typeface="Times New Roman" pitchFamily="34" charset="0"/>
+                <a:ea typeface="Times New Roman" pitchFamily="34" charset="-122"/>
+                <a:cs typeface="Times New Roman" pitchFamily="34" charset="-120"/>
+              </a:rPr>
+              <a:t>Evaluation 2</a:t>
+            </a:r>
+            <a:endParaRPr lang="en-US" sz="3600" dirty="0"/>
+          </a:p>
+        </p:txBody>
+      </p:sp>
+      <p:sp>
+        <p:nvSpPr>
+          <p:cNvPr id="5" name="Text 2"/>
+          <p:cNvSpPr/>
+          <p:nvPr/>
+        </p:nvSpPr>
+        <p:spPr>
+          <a:xfrm>
+            <a:off x="5349240" y="1783080"/>
+            <a:ext cx="6522415" cy="4663440"/>
+          </a:xfrm>
+          <a:prstGeom prst="rect">
+            <a:avLst/>
+          </a:prstGeom>
+          <a:noFill/>
+          <a:ln/>
+        </p:spPr>
+        <p:txBody>
+          <a:bodyPr wrap="square" lIns="0" tIns="0" rIns="0" bIns="0" rtlCol="0" anchor="t"/>
+          <a:lstStyle/>
+          <a:p>
+            <a:pPr algn="l" indent="0" marL="0">
+              <a:spcAft>
+                <a:spcPts val="800"/>
+              </a:spcAft>
+              <a:buNone/>
+            </a:pPr>
+            <a:r>
+              <a:rPr lang="en-US" sz="4000" dirty="0">
+                <a:solidFill>
+                  <a:srgbClr val="111111"/>
+                </a:solidFill>
+                <a:latin typeface="Times New Roman" pitchFamily="34" charset="0"/>
+                <a:ea typeface="Times New Roman" pitchFamily="34" charset="-122"/>
+                <a:cs typeface="Times New Roman" pitchFamily="34" charset="-120"/>
+              </a:rPr>
+              <a:t>Where is the Sun overhead on 21 March?</a:t>
+            </a:r>
+            <a:endParaRPr lang="en-US" sz="4000" dirty="0"/>
+          </a:p>
+        </p:txBody>
+      </p:sp>
+      <p:sp>
+        <p:nvSpPr>
+          <p:cNvPr id="25" name="Slide Number Placeholder 0"/>
+          <p:cNvSpPr>
+            <a:spLocks noGrp="1"/>
+          </p:cNvSpPr>
+          <p:nvPr>
+            <p:ph type="sldNum" sz="quarter" idx="4294967295"/>
+          </p:nvPr>
+        </p:nvSpPr>
+        <p:spPr>
+          <a:xfrm>
+            <a:off x="27432" y="91440"/>
+            <a:ext cx="585216" cy="475488"/>
+          </a:xfrm>
+          <a:prstGeom prst="rect">
+            <a:avLst/>
+          </a:prstGeom>
+          <a:extLst>
+            <a:ext uri="{C572A759-6A51-4108-AA02-DFA0A04FC94B}">
+              <ma14:wrappingTextBoxFlag xmlns:ma14="http://schemas.microsoft.com/office/mac/drawingml/2011/main" val="0"/>
+            </a:ext>
+          </a:extLst>
+        </p:spPr>
+        <p:txBody>
+          <a:bodyPr/>
+          <a:lstStyle>
+            <a:lvl1pPr>
+              <a:defRPr sz="2000">
+                <a:solidFill>
+                  <a:srgbClr val="FFFFFF"/>
+                </a:solidFill>
+                <a:latin typeface="Calibri"/>
+                <a:ea typeface="Calibri"/>
+                <a:cs typeface="Calibri"/>
+              </a:defRPr>
+            </a:lvl1pPr>
+          </a:lstStyle>
+          <a:p>
+            <a:pPr algn="ctr"/>
+            <a:fld id="{F7021451-1387-4CA6-816F-3879F97B5CBC}" type="slidenum">
+              <a:rPr b="1" lang="en-US"/>
+              <a:t>43</a:t>
+            </a:fld>
+            <a:endParaRPr lang="en-US"/>
+          </a:p>
+        </p:txBody>
+      </p:sp>
+    </p:spTree>
+  </p:cSld>
+  <p:clrMapOvr>
+    <a:masterClrMapping/>
+  </p:clrMapOvr>
+</p:sld>
+</file>
+
+<file path=ppt/slides/slide44.xml><?xml version="1.0" encoding="utf-8"?>
+<p:sld xmlns:a="http://schemas.openxmlformats.org/drawingml/2006/main" xmlns:r="http://schemas.openxmlformats.org/officeDocument/2006/relationships" xmlns:p="http://schemas.openxmlformats.org/presentationml/2006/main">
+  <p:cSld name="Slide 44">
+    <p:spTree>
+      <p:nvGrpSpPr>
+        <p:cNvPr id="1" name=""/>
+        <p:cNvGrpSpPr/>
+        <p:nvPr/>
+      </p:nvGrpSpPr>
+      <p:grpSpPr>
+        <a:xfrm>
+          <a:off x="0" y="0"/>
+          <a:ext cx="0" cy="0"/>
+          <a:chOff x="0" y="0"/>
+          <a:chExt cx="0" cy="0"/>
+        </a:xfrm>
+      </p:grpSpPr>
+      <p:sp>
+        <p:nvSpPr>
+          <p:cNvPr id="2" name="Text 0"/>
+          <p:cNvSpPr/>
+          <p:nvPr/>
+        </p:nvSpPr>
+        <p:spPr>
+          <a:xfrm>
+            <a:off x="457200" y="713232"/>
+            <a:ext cx="11368735" cy="274320"/>
+          </a:xfrm>
+          <a:prstGeom prst="rect">
+            <a:avLst/>
+          </a:prstGeom>
+          <a:noFill/>
+          <a:ln/>
+        </p:spPr>
+        <p:txBody>
+          <a:bodyPr wrap="square" lIns="0" tIns="0" rIns="0" bIns="0" rtlCol="0" anchor="ctr"/>
+          <a:lstStyle/>
+          <a:p>
+            <a:pPr algn="r" indent="0" marL="0">
+              <a:buNone/>
+            </a:pPr>
+            <a:r>
+              <a:rPr lang="en-US" sz="1400" b="1" dirty="0">
+                <a:solidFill>
+                  <a:srgbClr val="1C3F6E"/>
+                </a:solidFill>
+                <a:latin typeface="Calibri" pitchFamily="34" charset="0"/>
+                <a:ea typeface="Calibri" pitchFamily="34" charset="-122"/>
+                <a:cs typeface="Calibri" pitchFamily="34" charset="-120"/>
+              </a:rPr>
+              <a:t>FORMATIVE EVALUATION</a:t>
+            </a:r>
+            <a:endParaRPr lang="en-US" sz="1400" dirty="0"/>
+          </a:p>
+        </p:txBody>
+      </p:sp>
+      <p:pic>
+        <p:nvPicPr>
+          <p:cNvPr id="3" name="Image 0" descr="/home/claude/f4/img/minesec_sheet.png">    </p:cNvPr>
+          <p:cNvPicPr>
+            <a:picLocks noChangeAspect="1"/>
+          </p:cNvPicPr>
+          <p:nvPr/>
+        </p:nvPicPr>
+        <p:blipFill>
+          <a:blip r:embed="rId1"/>
+          <a:stretch>
+            <a:fillRect/>
+          </a:stretch>
+        </p:blipFill>
+        <p:spPr>
+          <a:xfrm>
+            <a:off x="0" y="658368"/>
+            <a:ext cx="5120640" cy="5833872"/>
+          </a:xfrm>
+          <a:prstGeom prst="rect">
+            <a:avLst/>
+          </a:prstGeom>
+        </p:spPr>
+      </p:pic>
+      <p:sp>
+        <p:nvSpPr>
+          <p:cNvPr id="4" name="Text 1"/>
+          <p:cNvSpPr/>
+          <p:nvPr/>
+        </p:nvSpPr>
+        <p:spPr>
+          <a:xfrm>
+            <a:off x="5349240" y="1005840"/>
+            <a:ext cx="6522415" cy="731520"/>
+          </a:xfrm>
+          <a:prstGeom prst="rect">
+            <a:avLst/>
+          </a:prstGeom>
+          <a:noFill/>
+          <a:ln/>
+        </p:spPr>
+        <p:txBody>
+          <a:bodyPr wrap="square" lIns="0" tIns="0" rIns="0" bIns="0" rtlCol="0" anchor="ctr">
+            <a:normAutofit/>
+          </a:bodyPr>
+          <a:lstStyle/>
+          <a:p>
+            <a:pPr algn="ctr" indent="0" marL="0">
+              <a:buNone/>
+            </a:pPr>
+            <a:r>
+              <a:rPr lang="en-US" sz="3600" b="1" dirty="0">
+                <a:solidFill>
+                  <a:srgbClr val="990011"/>
+                </a:solidFill>
+                <a:latin typeface="Times New Roman" pitchFamily="34" charset="0"/>
+                <a:ea typeface="Times New Roman" pitchFamily="34" charset="-122"/>
+                <a:cs typeface="Times New Roman" pitchFamily="34" charset="-120"/>
+              </a:rPr>
+              <a:t>Expected Answer</a:t>
+            </a:r>
+            <a:endParaRPr lang="en-US" sz="3600" dirty="0"/>
+          </a:p>
+        </p:txBody>
+      </p:sp>
+      <p:sp>
+        <p:nvSpPr>
+          <p:cNvPr id="5" name="Text 2"/>
+          <p:cNvSpPr/>
+          <p:nvPr/>
+        </p:nvSpPr>
+        <p:spPr>
+          <a:xfrm>
+            <a:off x="5349240" y="1783080"/>
+            <a:ext cx="6522415" cy="4663440"/>
+          </a:xfrm>
+          <a:prstGeom prst="rect">
+            <a:avLst/>
+          </a:prstGeom>
+          <a:noFill/>
+          <a:ln/>
+        </p:spPr>
+        <p:txBody>
+          <a:bodyPr wrap="square" lIns="0" tIns="0" rIns="0" bIns="0" rtlCol="0" anchor="t"/>
+          <a:lstStyle/>
+          <a:p>
+            <a:pPr algn="l" indent="0" marL="0">
+              <a:spcAft>
+                <a:spcPts val="800"/>
+              </a:spcAft>
+              <a:buNone/>
+            </a:pPr>
+            <a:r>
+              <a:rPr lang="en-US" sz="4000" dirty="0">
+                <a:solidFill>
+                  <a:srgbClr val="111111"/>
+                </a:solidFill>
+                <a:latin typeface="Times New Roman" pitchFamily="34" charset="0"/>
+                <a:ea typeface="Times New Roman" pitchFamily="34" charset="-122"/>
+                <a:cs typeface="Times New Roman" pitchFamily="34" charset="-120"/>
+              </a:rPr>
+              <a:t>At the Equator.</a:t>
+            </a:r>
+            <a:endParaRPr lang="en-US" sz="4000" dirty="0"/>
+          </a:p>
+        </p:txBody>
+      </p:sp>
+      <p:sp>
+        <p:nvSpPr>
+          <p:cNvPr id="25" name="Slide Number Placeholder 0"/>
+          <p:cNvSpPr>
+            <a:spLocks noGrp="1"/>
+          </p:cNvSpPr>
+          <p:nvPr>
+            <p:ph type="sldNum" sz="quarter" idx="4294967295"/>
+          </p:nvPr>
+        </p:nvSpPr>
+        <p:spPr>
+          <a:xfrm>
+            <a:off x="27432" y="91440"/>
+            <a:ext cx="585216" cy="475488"/>
+          </a:xfrm>
+          <a:prstGeom prst="rect">
+            <a:avLst/>
+          </a:prstGeom>
+          <a:extLst>
+            <a:ext uri="{C572A759-6A51-4108-AA02-DFA0A04FC94B}">
+              <ma14:wrappingTextBoxFlag xmlns:ma14="http://schemas.microsoft.com/office/mac/drawingml/2011/main" val="0"/>
+            </a:ext>
+          </a:extLst>
+        </p:spPr>
+        <p:txBody>
+          <a:bodyPr/>
+          <a:lstStyle>
+            <a:lvl1pPr>
+              <a:defRPr sz="2000">
+                <a:solidFill>
+                  <a:srgbClr val="FFFFFF"/>
+                </a:solidFill>
+                <a:latin typeface="Calibri"/>
+                <a:ea typeface="Calibri"/>
+                <a:cs typeface="Calibri"/>
+              </a:defRPr>
+            </a:lvl1pPr>
+          </a:lstStyle>
+          <a:p>
+            <a:pPr algn="ctr"/>
+            <a:fld id="{F7021451-1387-4CA6-816F-3879F97B5CBC}" type="slidenum">
+              <a:rPr b="1" lang="en-US"/>
+              <a:t>44</a:t>
+            </a:fld>
+            <a:endParaRPr lang="en-US"/>
+          </a:p>
+        </p:txBody>
+      </p:sp>
+    </p:spTree>
+  </p:cSld>
+  <p:clrMapOvr>
+    <a:masterClrMapping/>
+  </p:clrMapOvr>
+</p:sld>
+</file>
+
+<file path=ppt/slides/slide45.xml><?xml version="1.0" encoding="utf-8"?>
+<p:sld xmlns:a="http://schemas.openxmlformats.org/drawingml/2006/main" xmlns:r="http://schemas.openxmlformats.org/officeDocument/2006/relationships" xmlns:p="http://schemas.openxmlformats.org/presentationml/2006/main">
+  <p:cSld name="Slide 45">
+    <p:spTree>
+      <p:nvGrpSpPr>
+        <p:cNvPr id="1" name=""/>
+        <p:cNvGrpSpPr/>
+        <p:nvPr/>
+      </p:nvGrpSpPr>
+      <p:grpSpPr>
+        <a:xfrm>
+          <a:off x="0" y="0"/>
+          <a:ext cx="0" cy="0"/>
+          <a:chOff x="0" y="0"/>
+          <a:chExt cx="0" cy="0"/>
+        </a:xfrm>
+      </p:grpSpPr>
+      <p:sp>
+        <p:nvSpPr>
+          <p:cNvPr id="2" name="Text 0"/>
+          <p:cNvSpPr/>
+          <p:nvPr/>
+        </p:nvSpPr>
+        <p:spPr>
+          <a:xfrm>
+            <a:off x="457200" y="713232"/>
+            <a:ext cx="11368735" cy="274320"/>
+          </a:xfrm>
+          <a:prstGeom prst="rect">
+            <a:avLst/>
+          </a:prstGeom>
+          <a:noFill/>
+          <a:ln/>
+        </p:spPr>
+        <p:txBody>
+          <a:bodyPr wrap="square" lIns="0" tIns="0" rIns="0" bIns="0" rtlCol="0" anchor="ctr"/>
+          <a:lstStyle/>
+          <a:p>
+            <a:pPr algn="r" indent="0" marL="0">
+              <a:buNone/>
+            </a:pPr>
+            <a:r>
+              <a:rPr lang="en-US" sz="1400" b="1" dirty="0">
+                <a:solidFill>
+                  <a:srgbClr val="1C3F6E"/>
+                </a:solidFill>
+                <a:latin typeface="Calibri" pitchFamily="34" charset="0"/>
+                <a:ea typeface="Calibri" pitchFamily="34" charset="-122"/>
+                <a:cs typeface="Calibri" pitchFamily="34" charset="-120"/>
+              </a:rPr>
+              <a:t>REMEDIATION</a:t>
+            </a:r>
+            <a:endParaRPr lang="en-US" sz="1400" dirty="0"/>
+          </a:p>
+        </p:txBody>
+      </p:sp>
+      <p:pic>
+        <p:nvPicPr>
+          <p:cNvPr id="3" name="Image 0" descr="/home/claude/f4/img/minesec_sheet.png">    </p:cNvPr>
+          <p:cNvPicPr>
+            <a:picLocks noChangeAspect="1"/>
+          </p:cNvPicPr>
+          <p:nvPr/>
+        </p:nvPicPr>
+        <p:blipFill>
+          <a:blip r:embed="rId1"/>
+          <a:stretch>
+            <a:fillRect/>
+          </a:stretch>
+        </p:blipFill>
+        <p:spPr>
+          <a:xfrm>
+            <a:off x="0" y="658368"/>
+            <a:ext cx="2468880" cy="5833872"/>
+          </a:xfrm>
+          <a:prstGeom prst="rect">
+            <a:avLst/>
+          </a:prstGeom>
+        </p:spPr>
+      </p:pic>
+      <p:sp>
+        <p:nvSpPr>
+          <p:cNvPr id="4" name="Text 1"/>
+          <p:cNvSpPr/>
+          <p:nvPr/>
+        </p:nvSpPr>
+        <p:spPr>
+          <a:xfrm>
+            <a:off x="2697480" y="1005840"/>
+            <a:ext cx="9174175" cy="731520"/>
+          </a:xfrm>
+          <a:prstGeom prst="rect">
+            <a:avLst/>
+          </a:prstGeom>
+          <a:noFill/>
+          <a:ln/>
+        </p:spPr>
+        <p:txBody>
+          <a:bodyPr wrap="square" lIns="0" tIns="0" rIns="0" bIns="0" rtlCol="0" anchor="ctr">
+            <a:normAutofit/>
+          </a:bodyPr>
+          <a:lstStyle/>
+          <a:p>
+            <a:pPr algn="ctr" indent="0" marL="0">
+              <a:buNone/>
+            </a:pPr>
+            <a:r>
+              <a:rPr lang="en-US" sz="3600" b="1" dirty="0">
+                <a:solidFill>
+                  <a:srgbClr val="990011"/>
+                </a:solidFill>
+                <a:latin typeface="Times New Roman" pitchFamily="34" charset="0"/>
+                <a:ea typeface="Times New Roman" pitchFamily="34" charset="-122"/>
+                <a:cs typeface="Times New Roman" pitchFamily="34" charset="-120"/>
+              </a:rPr>
+              <a:t>Remediation</a:t>
+            </a:r>
+            <a:endParaRPr lang="en-US" sz="3600" dirty="0"/>
+          </a:p>
+        </p:txBody>
+      </p:sp>
+      <p:sp>
+        <p:nvSpPr>
+          <p:cNvPr id="5" name="Text 2"/>
+          <p:cNvSpPr/>
+          <p:nvPr/>
+        </p:nvSpPr>
+        <p:spPr>
+          <a:xfrm>
+            <a:off x="2697480" y="1783080"/>
+            <a:ext cx="9174175" cy="4663440"/>
+          </a:xfrm>
+          <a:prstGeom prst="rect">
+            <a:avLst/>
+          </a:prstGeom>
+          <a:noFill/>
+          <a:ln/>
+        </p:spPr>
+        <p:txBody>
+          <a:bodyPr wrap="square" lIns="0" tIns="0" rIns="0" bIns="0" rtlCol="0" anchor="t"/>
+          <a:lstStyle/>
+          <a:p>
+            <a:pPr algn="l" indent="0" marL="0">
+              <a:spcAft>
+                <a:spcPts val="800"/>
+              </a:spcAft>
+              <a:buNone/>
+            </a:pPr>
+            <a:r>
+              <a:rPr lang="en-US" sz="4000" b="1" dirty="0">
+                <a:solidFill>
+                  <a:srgbClr val="111111"/>
+                </a:solidFill>
+                <a:latin typeface="Times New Roman" pitchFamily="34" charset="0"/>
+                <a:ea typeface="Times New Roman" pitchFamily="34" charset="-122"/>
+                <a:cs typeface="Times New Roman" pitchFamily="34" charset="-120"/>
+              </a:rPr>
+              <a:t>Fill in the blanks:</a:t>
+            </a:r>
+            <a:endParaRPr lang="en-US" sz="4000" dirty="0"/>
+          </a:p>
+          <a:p>
+            <a:pPr algn="l" marL="342900" indent="-342900">
+              <a:spcAft>
+                <a:spcPts val="800"/>
+              </a:spcAft>
+              <a:buSzPct val="100000"/>
+              <a:buFont typeface="+mj-lt"/>
+              <a:buAutoNum type="arabicPeriod" startAt="1"/>
+            </a:pPr>
+            <a:r>
+              <a:rPr lang="en-US" sz="4000" dirty="0">
+                <a:solidFill>
+                  <a:srgbClr val="111111"/>
+                </a:solidFill>
+                <a:latin typeface="Times New Roman" pitchFamily="34" charset="0"/>
+                <a:ea typeface="Times New Roman" pitchFamily="34" charset="-122"/>
+                <a:cs typeface="Times New Roman" pitchFamily="34" charset="-120"/>
+              </a:rPr>
+              <a:t>The movement of the Earth around the Sun is ______.</a:t>
+            </a:r>
+            <a:endParaRPr lang="en-US" sz="4000" dirty="0"/>
+          </a:p>
+          <a:p>
+            <a:pPr algn="l" marL="342900" indent="-342900">
+              <a:spcAft>
+                <a:spcPts val="800"/>
+              </a:spcAft>
+              <a:buSzPct val="100000"/>
+              <a:buFont typeface="+mj-lt"/>
+              <a:buAutoNum type="arabicPeriod" startAt="1"/>
+            </a:pPr>
+            <a:r>
+              <a:rPr lang="en-US" sz="4000" dirty="0">
+                <a:solidFill>
+                  <a:srgbClr val="111111"/>
+                </a:solidFill>
+                <a:latin typeface="Times New Roman" pitchFamily="34" charset="0"/>
+                <a:ea typeface="Times New Roman" pitchFamily="34" charset="-122"/>
+                <a:cs typeface="Times New Roman" pitchFamily="34" charset="-120"/>
+              </a:rPr>
+              <a:t>On 21 June, the Sun is overhead at the Tropic of ______.</a:t>
+            </a:r>
+            <a:endParaRPr lang="en-US" sz="4000" dirty="0"/>
+          </a:p>
+          <a:p>
+            <a:pPr algn="l" marL="342900" indent="-342900">
+              <a:spcAft>
+                <a:spcPts val="800"/>
+              </a:spcAft>
+              <a:buSzPct val="100000"/>
+              <a:buFont typeface="+mj-lt"/>
+              <a:buAutoNum type="arabicPeriod" startAt="1"/>
+            </a:pPr>
+            <a:r>
+              <a:rPr lang="en-US" sz="4000" dirty="0">
+                <a:solidFill>
+                  <a:srgbClr val="111111"/>
+                </a:solidFill>
+                <a:latin typeface="Times New Roman" pitchFamily="34" charset="0"/>
+                <a:ea typeface="Times New Roman" pitchFamily="34" charset="-122"/>
+                <a:cs typeface="Times New Roman" pitchFamily="34" charset="-120"/>
+              </a:rPr>
+              <a:t>A year of 366 days is a ______ year.</a:t>
+            </a:r>
+            <a:endParaRPr lang="en-US" sz="4000" dirty="0"/>
+          </a:p>
+        </p:txBody>
+      </p:sp>
+      <p:sp>
+        <p:nvSpPr>
+          <p:cNvPr id="25" name="Slide Number Placeholder 0"/>
+          <p:cNvSpPr>
+            <a:spLocks noGrp="1"/>
+          </p:cNvSpPr>
+          <p:nvPr>
+            <p:ph type="sldNum" sz="quarter" idx="4294967295"/>
+          </p:nvPr>
+        </p:nvSpPr>
+        <p:spPr>
+          <a:xfrm>
+            <a:off x="27432" y="91440"/>
+            <a:ext cx="585216" cy="475488"/>
+          </a:xfrm>
+          <a:prstGeom prst="rect">
+            <a:avLst/>
+          </a:prstGeom>
+          <a:extLst>
+            <a:ext uri="{C572A759-6A51-4108-AA02-DFA0A04FC94B}">
+              <ma14:wrappingTextBoxFlag xmlns:ma14="http://schemas.microsoft.com/office/mac/drawingml/2011/main" val="0"/>
+            </a:ext>
+          </a:extLst>
+        </p:spPr>
+        <p:txBody>
+          <a:bodyPr/>
+          <a:lstStyle>
+            <a:lvl1pPr>
+              <a:defRPr sz="2000">
+                <a:solidFill>
+                  <a:srgbClr val="FFFFFF"/>
+                </a:solidFill>
+                <a:latin typeface="Calibri"/>
+                <a:ea typeface="Calibri"/>
+                <a:cs typeface="Calibri"/>
+              </a:defRPr>
+            </a:lvl1pPr>
+          </a:lstStyle>
+          <a:p>
+            <a:pPr algn="ctr"/>
+            <a:fld id="{F7021451-1387-4CA6-816F-3879F97B5CBC}" type="slidenum">
+              <a:rPr b="1" lang="en-US"/>
+              <a:t>45</a:t>
+            </a:fld>
+            <a:endParaRPr lang="en-US"/>
+          </a:p>
+        </p:txBody>
+      </p:sp>
+    </p:spTree>
+  </p:cSld>
+  <p:clrMapOvr>
+    <a:masterClrMapping/>
+  </p:clrMapOvr>
+</p:sld>
+</file>
+
+<file path=ppt/slides/slide46.xml><?xml version="1.0" encoding="utf-8"?>
+<p:sld xmlns:a="http://schemas.openxmlformats.org/drawingml/2006/main" xmlns:r="http://schemas.openxmlformats.org/officeDocument/2006/relationships" xmlns:p="http://schemas.openxmlformats.org/presentationml/2006/main">
+  <p:cSld name="Slide 46">
+    <p:spTree>
+      <p:nvGrpSpPr>
+        <p:cNvPr id="1" name=""/>
+        <p:cNvGrpSpPr/>
+        <p:nvPr/>
+      </p:nvGrpSpPr>
+      <p:grpSpPr>
+        <a:xfrm>
+          <a:off x="0" y="0"/>
+          <a:ext cx="0" cy="0"/>
+          <a:chOff x="0" y="0"/>
+          <a:chExt cx="0" cy="0"/>
+        </a:xfrm>
+      </p:grpSpPr>
+      <p:sp>
+        <p:nvSpPr>
+          <p:cNvPr id="2" name="Text 0"/>
+          <p:cNvSpPr/>
+          <p:nvPr/>
+        </p:nvSpPr>
+        <p:spPr>
+          <a:xfrm>
+            <a:off x="457200" y="713232"/>
+            <a:ext cx="11368735" cy="274320"/>
+          </a:xfrm>
+          <a:prstGeom prst="rect">
+            <a:avLst/>
+          </a:prstGeom>
+          <a:noFill/>
+          <a:ln/>
+        </p:spPr>
+        <p:txBody>
+          <a:bodyPr wrap="square" lIns="0" tIns="0" rIns="0" bIns="0" rtlCol="0" anchor="ctr"/>
+          <a:lstStyle/>
+          <a:p>
+            <a:pPr algn="r" indent="0" marL="0">
+              <a:buNone/>
+            </a:pPr>
+            <a:r>
+              <a:rPr lang="en-US" sz="1400" b="1" dirty="0">
+                <a:solidFill>
+                  <a:srgbClr val="1C3F6E"/>
+                </a:solidFill>
+                <a:latin typeface="Calibri" pitchFamily="34" charset="0"/>
+                <a:ea typeface="Calibri" pitchFamily="34" charset="-122"/>
+                <a:cs typeface="Calibri" pitchFamily="34" charset="-120"/>
+              </a:rPr>
+              <a:t>HOMEWORK</a:t>
+            </a:r>
+            <a:endParaRPr lang="en-US" sz="1400" dirty="0"/>
+          </a:p>
+        </p:txBody>
+      </p:sp>
+      <p:pic>
+        <p:nvPicPr>
+          <p:cNvPr id="3" name="Image 0" descr="/home/claude/f4/img/minesec_sheet.png">    </p:cNvPr>
+          <p:cNvPicPr>
+            <a:picLocks noChangeAspect="1"/>
+          </p:cNvPicPr>
+          <p:nvPr/>
+        </p:nvPicPr>
+        <p:blipFill>
+          <a:blip r:embed="rId1"/>
+          <a:stretch>
+            <a:fillRect/>
+          </a:stretch>
+        </p:blipFill>
+        <p:spPr>
+          <a:xfrm>
+            <a:off x="0" y="658368"/>
+            <a:ext cx="5120640" cy="5833872"/>
+          </a:xfrm>
+          <a:prstGeom prst="rect">
+            <a:avLst/>
+          </a:prstGeom>
+        </p:spPr>
+      </p:pic>
+      <p:sp>
+        <p:nvSpPr>
+          <p:cNvPr id="4" name="Text 1"/>
+          <p:cNvSpPr/>
+          <p:nvPr/>
+        </p:nvSpPr>
+        <p:spPr>
+          <a:xfrm>
+            <a:off x="5349240" y="1005840"/>
+            <a:ext cx="6522415" cy="731520"/>
+          </a:xfrm>
+          <a:prstGeom prst="rect">
+            <a:avLst/>
+          </a:prstGeom>
+          <a:noFill/>
+          <a:ln/>
+        </p:spPr>
+        <p:txBody>
+          <a:bodyPr wrap="square" lIns="0" tIns="0" rIns="0" bIns="0" rtlCol="0" anchor="ctr">
+            <a:normAutofit/>
+          </a:bodyPr>
+          <a:lstStyle/>
+          <a:p>
+            <a:pPr algn="ctr" indent="0" marL="0">
+              <a:buNone/>
+            </a:pPr>
+            <a:r>
+              <a:rPr lang="en-US" sz="3600" b="1" dirty="0">
+                <a:solidFill>
+                  <a:srgbClr val="990011"/>
+                </a:solidFill>
+                <a:latin typeface="Times New Roman" pitchFamily="34" charset="0"/>
+                <a:ea typeface="Times New Roman" pitchFamily="34" charset="-122"/>
+                <a:cs typeface="Times New Roman" pitchFamily="34" charset="-120"/>
+              </a:rPr>
+              <a:t>Homework</a:t>
+            </a:r>
+            <a:endParaRPr lang="en-US" sz="3600" dirty="0"/>
+          </a:p>
+        </p:txBody>
+      </p:sp>
+      <p:sp>
+        <p:nvSpPr>
+          <p:cNvPr id="5" name="Text 2"/>
+          <p:cNvSpPr/>
+          <p:nvPr/>
+        </p:nvSpPr>
+        <p:spPr>
+          <a:xfrm>
+            <a:off x="5349240" y="1783080"/>
+            <a:ext cx="6522415" cy="4663440"/>
+          </a:xfrm>
+          <a:prstGeom prst="rect">
+            <a:avLst/>
+          </a:prstGeom>
+          <a:noFill/>
+          <a:ln/>
+        </p:spPr>
+        <p:txBody>
+          <a:bodyPr wrap="square" lIns="0" tIns="0" rIns="0" bIns="0" rtlCol="0" anchor="t"/>
+          <a:lstStyle/>
+          <a:p>
+            <a:pPr algn="l" indent="0" marL="0">
+              <a:spcAft>
+                <a:spcPts val="800"/>
+              </a:spcAft>
+              <a:buNone/>
+            </a:pPr>
+            <a:r>
+              <a:rPr lang="en-US" sz="4000" dirty="0">
+                <a:solidFill>
+                  <a:srgbClr val="111111"/>
+                </a:solidFill>
+                <a:latin typeface="Times New Roman" pitchFamily="34" charset="0"/>
+                <a:ea typeface="Times New Roman" pitchFamily="34" charset="-122"/>
+                <a:cs typeface="Times New Roman" pitchFamily="34" charset="-120"/>
+              </a:rPr>
+              <a:t>Cut an orange, an onion or an egg in half. Draw what you see inside and name its layers.</a:t>
+            </a:r>
+            <a:endParaRPr lang="en-US" sz="4000" dirty="0"/>
+          </a:p>
+        </p:txBody>
+      </p:sp>
+      <p:sp>
+        <p:nvSpPr>
+          <p:cNvPr id="25" name="Slide Number Placeholder 0"/>
+          <p:cNvSpPr>
+            <a:spLocks noGrp="1"/>
+          </p:cNvSpPr>
+          <p:nvPr>
+            <p:ph type="sldNum" sz="quarter" idx="4294967295"/>
+          </p:nvPr>
+        </p:nvSpPr>
+        <p:spPr>
+          <a:xfrm>
+            <a:off x="27432" y="91440"/>
+            <a:ext cx="585216" cy="475488"/>
+          </a:xfrm>
+          <a:prstGeom prst="rect">
+            <a:avLst/>
+          </a:prstGeom>
+          <a:extLst>
+            <a:ext uri="{C572A759-6A51-4108-AA02-DFA0A04FC94B}">
+              <ma14:wrappingTextBoxFlag xmlns:ma14="http://schemas.microsoft.com/office/mac/drawingml/2011/main" val="0"/>
+            </a:ext>
+          </a:extLst>
+        </p:spPr>
+        <p:txBody>
+          <a:bodyPr/>
+          <a:lstStyle>
+            <a:lvl1pPr>
+              <a:defRPr sz="2000">
+                <a:solidFill>
+                  <a:srgbClr val="FFFFFF"/>
+                </a:solidFill>
+                <a:latin typeface="Calibri"/>
+                <a:ea typeface="Calibri"/>
+                <a:cs typeface="Calibri"/>
+              </a:defRPr>
+            </a:lvl1pPr>
+          </a:lstStyle>
+          <a:p>
+            <a:pPr algn="ctr"/>
+            <a:fld id="{F7021451-1387-4CA6-816F-3879F97B5CBC}" type="slidenum">
+              <a:rPr b="1" lang="en-US"/>
+              <a:t>46</a:t>
+            </a:fld>
+            <a:endParaRPr lang="en-US"/>
+          </a:p>
+        </p:txBody>
+      </p:sp>
+    </p:spTree>
+  </p:cSld>
+  <p:clrMapOvr>
+    <a:masterClrMapping/>
+  </p:clrMapOvr>
+</p:sld>
+</file>
+
+<file path=ppt/slides/slide47.xml><?xml version="1.0" encoding="utf-8"?>
+<p:sld xmlns:a="http://schemas.openxmlformats.org/drawingml/2006/main" xmlns:r="http://schemas.openxmlformats.org/officeDocument/2006/relationships" xmlns:p="http://schemas.openxmlformats.org/presentationml/2006/main">
+  <p:cSld name="Slide 47">
+    <p:spTree>
+      <p:nvGrpSpPr>
+        <p:cNvPr id="1" name=""/>
+        <p:cNvGrpSpPr/>
+        <p:nvPr/>
+      </p:nvGrpSpPr>
+      <p:grpSpPr>
+        <a:xfrm>
+          <a:off x="0" y="0"/>
+          <a:ext cx="0" cy="0"/>
+          <a:chOff x="0" y="0"/>
+          <a:chExt cx="0" cy="0"/>
+        </a:xfrm>
+      </p:grpSpPr>
+      <p:sp>
+        <p:nvSpPr>
+          <p:cNvPr id="2" name="Text 0"/>
+          <p:cNvSpPr/>
+          <p:nvPr/>
+        </p:nvSpPr>
+        <p:spPr>
+          <a:xfrm>
+            <a:off x="457200" y="713232"/>
+            <a:ext cx="11368735" cy="274320"/>
+          </a:xfrm>
+          <a:prstGeom prst="rect">
+            <a:avLst/>
+          </a:prstGeom>
+          <a:noFill/>
+          <a:ln/>
+        </p:spPr>
+        <p:txBody>
+          <a:bodyPr wrap="square" lIns="0" tIns="0" rIns="0" bIns="0" rtlCol="0" anchor="ctr"/>
+          <a:lstStyle/>
+          <a:p>
+            <a:pPr algn="r" indent="0" marL="0">
+              <a:buNone/>
+            </a:pPr>
+            <a:r>
+              <a:rPr lang="en-US" sz="1400" b="1" dirty="0">
+                <a:solidFill>
+                  <a:srgbClr val="1C3F6E"/>
+                </a:solidFill>
+                <a:latin typeface="Calibri" pitchFamily="34" charset="0"/>
+                <a:ea typeface="Calibri" pitchFamily="34" charset="-122"/>
+                <a:cs typeface="Calibri" pitchFamily="34" charset="-120"/>
+              </a:rPr>
+              <a:t>NEXT LESSON</a:t>
+            </a:r>
+            <a:endParaRPr lang="en-US" sz="1400" dirty="0"/>
+          </a:p>
+        </p:txBody>
+      </p:sp>
+      <p:pic>
+        <p:nvPicPr>
+          <p:cNvPr id="3" name="Image 0" descr="/home/claude/f4/img/minesec_sheet.png">    </p:cNvPr>
+          <p:cNvPicPr>
+            <a:picLocks noChangeAspect="1"/>
+          </p:cNvPicPr>
+          <p:nvPr/>
+        </p:nvPicPr>
+        <p:blipFill>
+          <a:blip r:embed="rId1"/>
+          <a:stretch>
+            <a:fillRect/>
+          </a:stretch>
+        </p:blipFill>
+        <p:spPr>
+          <a:xfrm>
+            <a:off x="0" y="658368"/>
+            <a:ext cx="5120640" cy="5833872"/>
+          </a:xfrm>
+          <a:prstGeom prst="rect">
+            <a:avLst/>
+          </a:prstGeom>
+        </p:spPr>
+      </p:pic>
+      <p:sp>
+        <p:nvSpPr>
+          <p:cNvPr id="4" name="Text 1"/>
+          <p:cNvSpPr/>
+          <p:nvPr/>
+        </p:nvSpPr>
+        <p:spPr>
+          <a:xfrm>
+            <a:off x="5349240" y="1005840"/>
+            <a:ext cx="6522415" cy="731520"/>
+          </a:xfrm>
+          <a:prstGeom prst="rect">
+            <a:avLst/>
+          </a:prstGeom>
+          <a:noFill/>
+          <a:ln/>
+        </p:spPr>
+        <p:txBody>
+          <a:bodyPr wrap="square" lIns="0" tIns="0" rIns="0" bIns="0" rtlCol="0" anchor="ctr">
+            <a:normAutofit/>
+          </a:bodyPr>
+          <a:lstStyle/>
+          <a:p>
+            <a:pPr algn="ctr" indent="0" marL="0">
+              <a:buNone/>
+            </a:pPr>
+            <a:r>
+              <a:rPr lang="en-US" sz="3600" b="1" dirty="0">
+                <a:solidFill>
+                  <a:srgbClr val="990011"/>
+                </a:solidFill>
+                <a:latin typeface="Times New Roman" pitchFamily="34" charset="0"/>
+                <a:ea typeface="Times New Roman" pitchFamily="34" charset="-122"/>
+                <a:cs typeface="Times New Roman" pitchFamily="34" charset="-120"/>
+              </a:rPr>
+              <a:t>Next Lesson</a:t>
+            </a:r>
+            <a:endParaRPr lang="en-US" sz="3600" dirty="0"/>
+          </a:p>
+        </p:txBody>
+      </p:sp>
+      <p:sp>
+        <p:nvSpPr>
+          <p:cNvPr id="5" name="Text 2"/>
+          <p:cNvSpPr/>
+          <p:nvPr/>
+        </p:nvSpPr>
+        <p:spPr>
+          <a:xfrm>
+            <a:off x="5349240" y="1783080"/>
+            <a:ext cx="6522415" cy="4663440"/>
+          </a:xfrm>
+          <a:prstGeom prst="rect">
+            <a:avLst/>
+          </a:prstGeom>
+          <a:noFill/>
+          <a:ln/>
+        </p:spPr>
+        <p:txBody>
+          <a:bodyPr wrap="square" lIns="0" tIns="0" rIns="0" bIns="0" rtlCol="0" anchor="ctr"/>
+          <a:lstStyle/>
+          <a:p>
+            <a:pPr algn="ctr" indent="0" marL="0">
+              <a:spcAft>
+                <a:spcPts val="800"/>
+              </a:spcAft>
+              <a:buNone/>
+            </a:pPr>
+            <a:r>
+              <a:rPr lang="en-US" sz="4000" b="1" dirty="0">
+                <a:solidFill>
+                  <a:srgbClr val="111111"/>
+                </a:solidFill>
+                <a:latin typeface="Times New Roman" pitchFamily="34" charset="0"/>
+                <a:ea typeface="Times New Roman" pitchFamily="34" charset="-122"/>
+                <a:cs typeface="Times New Roman" pitchFamily="34" charset="-120"/>
+              </a:rPr>
+              <a:t>Our next lesson will be on:</a:t>
+            </a:r>
+            <a:endParaRPr lang="en-US" sz="4000" dirty="0"/>
+          </a:p>
+          <a:p>
+            <a:pPr algn="ctr" indent="0" marL="0">
+              <a:spcAft>
+                <a:spcPts val="800"/>
+              </a:spcAft>
+              <a:buNone/>
+            </a:pPr>
+            <a:r>
+              <a:rPr lang="en-US" sz="4000" b="1" dirty="0">
+                <a:solidFill>
+                  <a:srgbClr val="990011"/>
+                </a:solidFill>
+                <a:latin typeface="Times New Roman" pitchFamily="34" charset="0"/>
+                <a:ea typeface="Times New Roman" pitchFamily="34" charset="-122"/>
+                <a:cs typeface="Times New Roman" pitchFamily="34" charset="-120"/>
+              </a:rPr>
+              <a:t>Lesson 7: The Internal Structure of the Earth</a:t>
+            </a:r>
+            <a:endParaRPr lang="en-US" sz="4000" dirty="0"/>
+          </a:p>
+        </p:txBody>
+      </p:sp>
+      <p:sp>
+        <p:nvSpPr>
+          <p:cNvPr id="25" name="Slide Number Placeholder 0"/>
+          <p:cNvSpPr>
+            <a:spLocks noGrp="1"/>
+          </p:cNvSpPr>
+          <p:nvPr>
+            <p:ph type="sldNum" sz="quarter" idx="4294967295"/>
+          </p:nvPr>
+        </p:nvSpPr>
+        <p:spPr>
+          <a:xfrm>
+            <a:off x="27432" y="91440"/>
+            <a:ext cx="585216" cy="475488"/>
+          </a:xfrm>
+          <a:prstGeom prst="rect">
+            <a:avLst/>
+          </a:prstGeom>
+          <a:extLst>
+            <a:ext uri="{C572A759-6A51-4108-AA02-DFA0A04FC94B}">
+              <ma14:wrappingTextBoxFlag xmlns:ma14="http://schemas.microsoft.com/office/mac/drawingml/2011/main" val="0"/>
+            </a:ext>
+          </a:extLst>
+        </p:spPr>
+        <p:txBody>
+          <a:bodyPr/>
+          <a:lstStyle>
+            <a:lvl1pPr>
+              <a:defRPr sz="2000">
+                <a:solidFill>
+                  <a:srgbClr val="FFFFFF"/>
+                </a:solidFill>
+                <a:latin typeface="Calibri"/>
+                <a:ea typeface="Calibri"/>
+                <a:cs typeface="Calibri"/>
+              </a:defRPr>
+            </a:lvl1pPr>
+          </a:lstStyle>
+          <a:p>
+            <a:pPr algn="ctr"/>
+            <a:fld id="{F7021451-1387-4CA6-816F-3879F97B5CBC}" type="slidenum">
+              <a:rPr b="1" lang="en-US"/>
+              <a:t>47</a:t>
+            </a:fld>
+            <a:endParaRPr lang="en-US"/>
+          </a:p>
+        </p:txBody>
+      </p:sp>
+    </p:spTree>
+  </p:cSld>
+  <p:clrMapOvr>
+    <a:masterClrMapping/>
+  </p:clrMapOvr>
+</p:sld>
+</file>
+
+<file path=ppt/slides/slide48.xml><?xml version="1.0" encoding="utf-8"?>
+<p:sld xmlns:a="http://schemas.openxmlformats.org/drawingml/2006/main" xmlns:r="http://schemas.openxmlformats.org/officeDocument/2006/relationships" xmlns:p="http://schemas.openxmlformats.org/presentationml/2006/main">
+  <p:cSld name="Slide 48">
+    <p:spTree>
+      <p:nvGrpSpPr>
+        <p:cNvPr id="1" name=""/>
+        <p:cNvGrpSpPr/>
+        <p:nvPr/>
+      </p:nvGrpSpPr>
+      <p:grpSpPr>
+        <a:xfrm>
+          <a:off x="0" y="0"/>
+          <a:ext cx="0" cy="0"/>
+          <a:chOff x="0" y="0"/>
+          <a:chExt cx="0" cy="0"/>
+        </a:xfrm>
+      </p:grpSpPr>
+      <p:sp>
+        <p:nvSpPr>
+          <p:cNvPr id="2" name="Text 0"/>
+          <p:cNvSpPr/>
+          <p:nvPr/>
+        </p:nvSpPr>
+        <p:spPr>
+          <a:xfrm>
+            <a:off x="457200" y="713232"/>
+            <a:ext cx="11368735" cy="274320"/>
+          </a:xfrm>
+          <a:prstGeom prst="rect">
+            <a:avLst/>
+          </a:prstGeom>
+          <a:noFill/>
+          <a:ln/>
+        </p:spPr>
+        <p:txBody>
+          <a:bodyPr wrap="square" lIns="0" tIns="0" rIns="0" bIns="0" rtlCol="0" anchor="ctr"/>
+          <a:lstStyle/>
+          <a:p>
+            <a:pPr algn="r" indent="0" marL="0">
+              <a:buNone/>
+            </a:pPr>
+            <a:r>
+              <a:rPr lang="en-US" sz="1400" b="1" dirty="0">
+                <a:solidFill>
+                  <a:srgbClr val="1C3F6E"/>
+                </a:solidFill>
+                <a:latin typeface="Calibri" pitchFamily="34" charset="0"/>
+                <a:ea typeface="Calibri" pitchFamily="34" charset="-122"/>
+                <a:cs typeface="Calibri" pitchFamily="34" charset="-120"/>
+              </a:rPr>
               <a:t>BILINGUAL GAME</a:t>
             </a:r>
             <a:endParaRPr lang="en-US" sz="1400" dirty="0"/>
@@ -15124,7 +17329,7 @@
       </p:sp>
       <p:graphicFrame>
         <p:nvGraphicFramePr>
-          <p:cNvPr id="43" name="Table 0"/>
+          <p:cNvPr id="49" name="Table 0"/>
           <p:cNvGraphicFramePr>
             <a:graphicFrameLocks noGrp="1"/>
           </p:cNvGraphicFramePr>
@@ -16436,7 +18641,7 @@
             <a:pPr algn="ctr"/>
             <a:fld id="{F7021451-1387-4CA6-816F-3879F97B5CBC}" type="slidenum">
               <a:rPr b="1" lang="en-US"/>
-              <a:t>42</a:t>
+              <a:t>48</a:t>
             </a:fld>
             <a:endParaRPr lang="en-US"/>
           </a:p>
@@ -16450,9 +18655,9 @@
 </p:sld>
 </file>
 
-<file path=ppt/slides/slide43.xml><?xml version="1.0" encoding="utf-8"?>
+<file path=ppt/slides/slide49.xml><?xml version="1.0" encoding="utf-8"?>
 <p:sld xmlns:a="http://schemas.openxmlformats.org/drawingml/2006/main" xmlns:r="http://schemas.openxmlformats.org/officeDocument/2006/relationships" xmlns:p="http://schemas.openxmlformats.org/presentationml/2006/main">
-  <p:cSld name="Slide 43">
+  <p:cSld name="Slide 49">
     <p:spTree>
       <p:nvGrpSpPr>
         <p:cNvPr id="1" name=""/>
@@ -16547,7 +18752,7 @@
       </p:sp>
       <p:graphicFrame>
         <p:nvGraphicFramePr>
-          <p:cNvPr id="44" name="Table 0"/>
+          <p:cNvPr id="50" name="Table 0"/>
           <p:cNvGraphicFramePr>
             <a:graphicFrameLocks noGrp="1"/>
           </p:cNvGraphicFramePr>
@@ -17169,7 +19374,7 @@
             <a:pPr algn="ctr"/>
             <a:fld id="{F7021451-1387-4CA6-816F-3879F97B5CBC}" type="slidenum">
               <a:rPr b="1" lang="en-US"/>
-              <a:t>43</a:t>
+              <a:t>49</a:t>
             </a:fld>
             <a:endParaRPr lang="en-US"/>
           </a:p>
@@ -17183,9 +19388,9 @@
 </p:sld>
 </file>
 
-<file path=ppt/slides/slide44.xml><?xml version="1.0" encoding="utf-8"?>
+<file path=ppt/slides/slide5.xml><?xml version="1.0" encoding="utf-8"?>
 <p:sld xmlns:a="http://schemas.openxmlformats.org/drawingml/2006/main" xmlns:r="http://schemas.openxmlformats.org/officeDocument/2006/relationships" xmlns:p="http://schemas.openxmlformats.org/presentationml/2006/main">
-  <p:cSld name="Slide 44">
+  <p:cSld name="Slide 5">
     <p:spTree>
       <p:nvGrpSpPr>
         <p:cNvPr id="1" name=""/>
@@ -17233,6 +19438,225 @@
                 <a:ea typeface="Calibri" pitchFamily="34" charset="-122"/>
                 <a:cs typeface="Calibri" pitchFamily="34" charset="-120"/>
               </a:rPr>
+              <a:t>HOMEWORK CORRECTION</a:t>
+            </a:r>
+            <a:endParaRPr lang="en-US" sz="1400" dirty="0"/>
+          </a:p>
+        </p:txBody>
+      </p:sp>
+      <p:pic>
+        <p:nvPicPr>
+          <p:cNvPr id="3" name="Image 0" descr="/home/claude/f4/img/minesec_sheet.png">    </p:cNvPr>
+          <p:cNvPicPr>
+            <a:picLocks noChangeAspect="1"/>
+          </p:cNvPicPr>
+          <p:nvPr/>
+        </p:nvPicPr>
+        <p:blipFill>
+          <a:blip r:embed="rId1"/>
+          <a:stretch>
+            <a:fillRect/>
+          </a:stretch>
+        </p:blipFill>
+        <p:spPr>
+          <a:xfrm>
+            <a:off x="0" y="658368"/>
+            <a:ext cx="5120640" cy="5833872"/>
+          </a:xfrm>
+          <a:prstGeom prst="rect">
+            <a:avLst/>
+          </a:prstGeom>
+        </p:spPr>
+      </p:pic>
+      <p:sp>
+        <p:nvSpPr>
+          <p:cNvPr id="4" name="Text 1"/>
+          <p:cNvSpPr/>
+          <p:nvPr/>
+        </p:nvSpPr>
+        <p:spPr>
+          <a:xfrm>
+            <a:off x="5349240" y="1005840"/>
+            <a:ext cx="6522415" cy="731520"/>
+          </a:xfrm>
+          <a:prstGeom prst="rect">
+            <a:avLst/>
+          </a:prstGeom>
+          <a:noFill/>
+          <a:ln/>
+        </p:spPr>
+        <p:txBody>
+          <a:bodyPr wrap="square" lIns="0" tIns="0" rIns="0" bIns="0" rtlCol="0" anchor="ctr">
+            <a:normAutofit/>
+          </a:bodyPr>
+          <a:lstStyle/>
+          <a:p>
+            <a:pPr algn="ctr" indent="0" marL="0">
+              <a:buNone/>
+            </a:pPr>
+            <a:r>
+              <a:rPr lang="en-US" sz="3600" b="1" dirty="0">
+                <a:solidFill>
+                  <a:srgbClr val="990011"/>
+                </a:solidFill>
+                <a:latin typeface="Times New Roman" pitchFamily="34" charset="0"/>
+                <a:ea typeface="Times New Roman" pitchFamily="34" charset="-122"/>
+                <a:cs typeface="Times New Roman" pitchFamily="34" charset="-120"/>
+              </a:rPr>
+              <a:t>Correction: Possible Answer</a:t>
+            </a:r>
+            <a:endParaRPr lang="en-US" sz="3600" dirty="0"/>
+          </a:p>
+        </p:txBody>
+      </p:sp>
+      <p:sp>
+        <p:nvSpPr>
+          <p:cNvPr id="5" name="Text 2"/>
+          <p:cNvSpPr/>
+          <p:nvPr/>
+        </p:nvSpPr>
+        <p:spPr>
+          <a:xfrm>
+            <a:off x="5349240" y="1783080"/>
+            <a:ext cx="6522415" cy="4663440"/>
+          </a:xfrm>
+          <a:prstGeom prst="rect">
+            <a:avLst/>
+          </a:prstGeom>
+          <a:noFill/>
+          <a:ln/>
+        </p:spPr>
+        <p:txBody>
+          <a:bodyPr wrap="square" lIns="0" tIns="0" rIns="0" bIns="0" rtlCol="0" anchor="t"/>
+          <a:lstStyle/>
+          <a:p>
+            <a:pPr algn="l" indent="0" marL="0">
+              <a:spcAft>
+                <a:spcPts val="800"/>
+              </a:spcAft>
+              <a:buNone/>
+            </a:pPr>
+            <a:r>
+              <a:rPr lang="en-US" sz="4000" dirty="0">
+                <a:solidFill>
+                  <a:srgbClr val="111111"/>
+                </a:solidFill>
+                <a:latin typeface="Times New Roman" pitchFamily="34" charset="0"/>
+                <a:ea typeface="Times New Roman" pitchFamily="34" charset="-122"/>
+                <a:cs typeface="Times New Roman" pitchFamily="34" charset="-120"/>
+              </a:rPr>
+              <a:t>In Garoua the rainy season starts around April–May and the dry season around October–November.</a:t>
+            </a:r>
+            <a:endParaRPr lang="en-US" sz="4000" dirty="0"/>
+          </a:p>
+        </p:txBody>
+      </p:sp>
+      <p:sp>
+        <p:nvSpPr>
+          <p:cNvPr id="25" name="Slide Number Placeholder 0"/>
+          <p:cNvSpPr>
+            <a:spLocks noGrp="1"/>
+          </p:cNvSpPr>
+          <p:nvPr>
+            <p:ph type="sldNum" sz="quarter" idx="4294967295"/>
+          </p:nvPr>
+        </p:nvSpPr>
+        <p:spPr>
+          <a:xfrm>
+            <a:off x="27432" y="91440"/>
+            <a:ext cx="585216" cy="475488"/>
+          </a:xfrm>
+          <a:prstGeom prst="rect">
+            <a:avLst/>
+          </a:prstGeom>
+          <a:extLst>
+            <a:ext uri="{C572A759-6A51-4108-AA02-DFA0A04FC94B}">
+              <ma14:wrappingTextBoxFlag xmlns:ma14="http://schemas.microsoft.com/office/mac/drawingml/2011/main" val="0"/>
+            </a:ext>
+          </a:extLst>
+        </p:spPr>
+        <p:txBody>
+          <a:bodyPr/>
+          <a:lstStyle>
+            <a:lvl1pPr>
+              <a:defRPr sz="2000">
+                <a:solidFill>
+                  <a:srgbClr val="FFFFFF"/>
+                </a:solidFill>
+                <a:latin typeface="Calibri"/>
+                <a:ea typeface="Calibri"/>
+                <a:cs typeface="Calibri"/>
+              </a:defRPr>
+            </a:lvl1pPr>
+          </a:lstStyle>
+          <a:p>
+            <a:pPr algn="ctr"/>
+            <a:fld id="{F7021451-1387-4CA6-816F-3879F97B5CBC}" type="slidenum">
+              <a:rPr b="1" lang="en-US"/>
+              <a:t>5</a:t>
+            </a:fld>
+            <a:endParaRPr lang="en-US"/>
+          </a:p>
+        </p:txBody>
+      </p:sp>
+    </p:spTree>
+  </p:cSld>
+  <p:clrMapOvr>
+    <a:masterClrMapping/>
+  </p:clrMapOvr>
+</p:sld>
+</file>
+
+<file path=ppt/slides/slide50.xml><?xml version="1.0" encoding="utf-8"?>
+<p:sld xmlns:a="http://schemas.openxmlformats.org/drawingml/2006/main" xmlns:r="http://schemas.openxmlformats.org/officeDocument/2006/relationships" xmlns:p="http://schemas.openxmlformats.org/presentationml/2006/main">
+  <p:cSld name="Slide 50">
+    <p:spTree>
+      <p:nvGrpSpPr>
+        <p:cNvPr id="1" name=""/>
+        <p:cNvGrpSpPr/>
+        <p:nvPr/>
+      </p:nvGrpSpPr>
+      <p:grpSpPr>
+        <a:xfrm>
+          <a:off x="0" y="0"/>
+          <a:ext cx="0" cy="0"/>
+          <a:chOff x="0" y="0"/>
+          <a:chExt cx="0" cy="0"/>
+        </a:xfrm>
+      </p:grpSpPr>
+      <p:sp>
+        <p:nvSpPr>
+          <p:cNvPr id="2" name="Text 0"/>
+          <p:cNvSpPr/>
+          <p:nvPr/>
+        </p:nvSpPr>
+        <p:spPr>
+          <a:xfrm>
+            <a:off x="457200" y="713232"/>
+            <a:ext cx="11368735" cy="274320"/>
+          </a:xfrm>
+          <a:prstGeom prst="rect">
+            <a:avLst/>
+          </a:prstGeom>
+          <a:noFill/>
+          <a:ln/>
+        </p:spPr>
+        <p:txBody>
+          <a:bodyPr wrap="square" lIns="0" tIns="0" rIns="0" bIns="0" rtlCol="0" anchor="ctr"/>
+          <a:lstStyle/>
+          <a:p>
+            <a:pPr algn="r" indent="0" marL="0">
+              <a:buNone/>
+            </a:pPr>
+            <a:r>
+              <a:rPr lang="en-US" sz="1400" b="1" dirty="0">
+                <a:solidFill>
+                  <a:srgbClr val="1C3F6E"/>
+                </a:solidFill>
+                <a:latin typeface="Calibri" pitchFamily="34" charset="0"/>
+                <a:ea typeface="Calibri" pitchFamily="34" charset="-122"/>
+                <a:cs typeface="Calibri" pitchFamily="34" charset="-120"/>
+              </a:rPr>
               <a:t>LOGBOOK</a:t>
             </a:r>
             <a:endParaRPr lang="en-US" sz="1400" dirty="0"/>
@@ -17280,7 +19704,7 @@
       </p:sp>
       <p:graphicFrame>
         <p:nvGraphicFramePr>
-          <p:cNvPr id="45" name="Table 0"/>
+          <p:cNvPr id="51" name="Table 0"/>
           <p:cNvGraphicFramePr>
             <a:graphicFrameLocks noGrp="1"/>
           </p:cNvGraphicFramePr>
@@ -17390,7 +19814,7 @@
                           <a:ea typeface="Calibri" pitchFamily="34" charset="-122"/>
                           <a:cs typeface="Calibri" pitchFamily="34" charset="-120"/>
                         </a:rPr>
-                        <a:t>Meaning of Revolution; Equinoxes and Solstices; Effects of Revolution.</a:t>
+                        <a:t>DEFINITIONS; Meaning and Illustration of Revolution; Effects of Revolution.</a:t>
                       </a:r>
                       <a:endParaRPr lang="en-US" sz="1600" dirty="0">
                         <a:latin typeface="Calibri" charset="0"/>
@@ -18040,7 +20464,7 @@
             <a:pPr algn="ctr"/>
             <a:fld id="{F7021451-1387-4CA6-816F-3879F97B5CBC}" type="slidenum">
               <a:rPr b="1" lang="en-US"/>
-              <a:t>44</a:t>
+              <a:t>50</a:t>
             </a:fld>
             <a:endParaRPr lang="en-US"/>
           </a:p>
@@ -18054,9 +20478,9 @@
 </p:sld>
 </file>
 
-<file path=ppt/slides/slide45.xml><?xml version="1.0" encoding="utf-8"?>
+<file path=ppt/slides/slide51.xml><?xml version="1.0" encoding="utf-8"?>
 <p:sld xmlns:a="http://schemas.openxmlformats.org/drawingml/2006/main" xmlns:r="http://schemas.openxmlformats.org/officeDocument/2006/relationships" xmlns:p="http://schemas.openxmlformats.org/presentationml/2006/main">
-  <p:cSld name="Slide 45">
+  <p:cSld name="Slide 51">
     <p:spTree>
       <p:nvGrpSpPr>
         <p:cNvPr id="1" name=""/>
@@ -18344,7 +20768,7 @@
             <a:pPr algn="ctr"/>
             <a:fld id="{F7021451-1387-4CA6-816F-3879F97B5CBC}" type="slidenum">
               <a:rPr b="1" lang="en-US"/>
-              <a:t>45</a:t>
+              <a:t>51</a:t>
             </a:fld>
             <a:endParaRPr lang="en-US"/>
           </a:p>
@@ -18358,9 +20782,9 @@
 </p:sld>
 </file>
 
-<file path=ppt/slides/slide46.xml><?xml version="1.0" encoding="utf-8"?>
+<file path=ppt/slides/slide52.xml><?xml version="1.0" encoding="utf-8"?>
 <p:sld xmlns:a="http://schemas.openxmlformats.org/drawingml/2006/main" xmlns:r="http://schemas.openxmlformats.org/officeDocument/2006/relationships" xmlns:p="http://schemas.openxmlformats.org/presentationml/2006/main">
-  <p:cSld name="Slide 46">
+  <p:cSld name="Slide 52">
     <p:spTree>
       <p:nvGrpSpPr>
         <p:cNvPr id="1" name=""/>
@@ -18627,226 +21051,7 @@
             <a:pPr algn="ctr"/>
             <a:fld id="{F7021451-1387-4CA6-816F-3879F97B5CBC}" type="slidenum">
               <a:rPr b="1" lang="en-US"/>
-              <a:t>46</a:t>
-            </a:fld>
-            <a:endParaRPr lang="en-US"/>
-          </a:p>
-        </p:txBody>
-      </p:sp>
-    </p:spTree>
-  </p:cSld>
-  <p:clrMapOvr>
-    <a:masterClrMapping/>
-  </p:clrMapOvr>
-</p:sld>
-</file>
-
-<file path=ppt/slides/slide5.xml><?xml version="1.0" encoding="utf-8"?>
-<p:sld xmlns:a="http://schemas.openxmlformats.org/drawingml/2006/main" xmlns:r="http://schemas.openxmlformats.org/officeDocument/2006/relationships" xmlns:p="http://schemas.openxmlformats.org/presentationml/2006/main">
-  <p:cSld name="Slide 5">
-    <p:spTree>
-      <p:nvGrpSpPr>
-        <p:cNvPr id="1" name=""/>
-        <p:cNvGrpSpPr/>
-        <p:nvPr/>
-      </p:nvGrpSpPr>
-      <p:grpSpPr>
-        <a:xfrm>
-          <a:off x="0" y="0"/>
-          <a:ext cx="0" cy="0"/>
-          <a:chOff x="0" y="0"/>
-          <a:chExt cx="0" cy="0"/>
-        </a:xfrm>
-      </p:grpSpPr>
-      <p:sp>
-        <p:nvSpPr>
-          <p:cNvPr id="2" name="Text 0"/>
-          <p:cNvSpPr/>
-          <p:nvPr/>
-        </p:nvSpPr>
-        <p:spPr>
-          <a:xfrm>
-            <a:off x="457200" y="713232"/>
-            <a:ext cx="11368735" cy="274320"/>
-          </a:xfrm>
-          <a:prstGeom prst="rect">
-            <a:avLst/>
-          </a:prstGeom>
-          <a:noFill/>
-          <a:ln/>
-        </p:spPr>
-        <p:txBody>
-          <a:bodyPr wrap="square" lIns="0" tIns="0" rIns="0" bIns="0" rtlCol="0" anchor="ctr"/>
-          <a:lstStyle/>
-          <a:p>
-            <a:pPr algn="r" indent="0" marL="0">
-              <a:buNone/>
-            </a:pPr>
-            <a:r>
-              <a:rPr lang="en-US" sz="1400" b="1" dirty="0">
-                <a:solidFill>
-                  <a:srgbClr val="1C3F6E"/>
-                </a:solidFill>
-                <a:latin typeface="Calibri" pitchFamily="34" charset="0"/>
-                <a:ea typeface="Calibri" pitchFamily="34" charset="-122"/>
-                <a:cs typeface="Calibri" pitchFamily="34" charset="-120"/>
-              </a:rPr>
-              <a:t>HOMEWORK CORRECTION</a:t>
-            </a:r>
-            <a:endParaRPr lang="en-US" sz="1400" dirty="0"/>
-          </a:p>
-        </p:txBody>
-      </p:sp>
-      <p:pic>
-        <p:nvPicPr>
-          <p:cNvPr id="3" name="Image 0" descr="/home/claude/f4/img/minesec_sheet.png">    </p:cNvPr>
-          <p:cNvPicPr>
-            <a:picLocks noChangeAspect="1"/>
-          </p:cNvPicPr>
-          <p:nvPr/>
-        </p:nvPicPr>
-        <p:blipFill>
-          <a:blip r:embed="rId1"/>
-          <a:stretch>
-            <a:fillRect/>
-          </a:stretch>
-        </p:blipFill>
-        <p:spPr>
-          <a:xfrm>
-            <a:off x="0" y="658368"/>
-            <a:ext cx="5120640" cy="5833872"/>
-          </a:xfrm>
-          <a:prstGeom prst="rect">
-            <a:avLst/>
-          </a:prstGeom>
-        </p:spPr>
-      </p:pic>
-      <p:sp>
-        <p:nvSpPr>
-          <p:cNvPr id="4" name="Text 1"/>
-          <p:cNvSpPr/>
-          <p:nvPr/>
-        </p:nvSpPr>
-        <p:spPr>
-          <a:xfrm>
-            <a:off x="5349240" y="1005840"/>
-            <a:ext cx="6522415" cy="731520"/>
-          </a:xfrm>
-          <a:prstGeom prst="rect">
-            <a:avLst/>
-          </a:prstGeom>
-          <a:noFill/>
-          <a:ln/>
-        </p:spPr>
-        <p:txBody>
-          <a:bodyPr wrap="square" lIns="0" tIns="0" rIns="0" bIns="0" rtlCol="0" anchor="ctr">
-            <a:normAutofit/>
-          </a:bodyPr>
-          <a:lstStyle/>
-          <a:p>
-            <a:pPr algn="ctr" indent="0" marL="0">
-              <a:buNone/>
-            </a:pPr>
-            <a:r>
-              <a:rPr lang="en-US" sz="3600" b="1" dirty="0">
-                <a:solidFill>
-                  <a:srgbClr val="990011"/>
-                </a:solidFill>
-                <a:latin typeface="Times New Roman" pitchFamily="34" charset="0"/>
-                <a:ea typeface="Times New Roman" pitchFamily="34" charset="-122"/>
-                <a:cs typeface="Times New Roman" pitchFamily="34" charset="-120"/>
-              </a:rPr>
-              <a:t>Correction: Possible Answer</a:t>
-            </a:r>
-            <a:endParaRPr lang="en-US" sz="3600" dirty="0"/>
-          </a:p>
-        </p:txBody>
-      </p:sp>
-      <p:sp>
-        <p:nvSpPr>
-          <p:cNvPr id="5" name="Text 2"/>
-          <p:cNvSpPr/>
-          <p:nvPr/>
-        </p:nvSpPr>
-        <p:spPr>
-          <a:xfrm>
-            <a:off x="5349240" y="1783080"/>
-            <a:ext cx="6522415" cy="4663440"/>
-          </a:xfrm>
-          <a:prstGeom prst="rect">
-            <a:avLst/>
-          </a:prstGeom>
-          <a:noFill/>
-          <a:ln/>
-        </p:spPr>
-        <p:txBody>
-          <a:bodyPr wrap="square" lIns="0" tIns="0" rIns="0" bIns="0" rtlCol="0" anchor="t"/>
-          <a:lstStyle/>
-          <a:p>
-            <a:pPr algn="l" indent="0" marL="0">
-              <a:spcAft>
-                <a:spcPts val="800"/>
-              </a:spcAft>
-              <a:buNone/>
-            </a:pPr>
-            <a:r>
-              <a:rPr lang="en-US" sz="4000" dirty="0">
-                <a:solidFill>
-                  <a:srgbClr val="111111"/>
-                </a:solidFill>
-                <a:latin typeface="Times New Roman" pitchFamily="34" charset="0"/>
-                <a:ea typeface="Times New Roman" pitchFamily="34" charset="-122"/>
-                <a:cs typeface="Times New Roman" pitchFamily="34" charset="-120"/>
-              </a:rPr>
-              <a:t>In Garoua the rainy season starts around April–May and the dry season around October–November.</a:t>
-            </a:r>
-            <a:endParaRPr lang="en-US" sz="4000" dirty="0"/>
-          </a:p>
-        </p:txBody>
-      </p:sp>
-      <p:sp>
-        <p:nvSpPr>
-          <p:cNvPr id="25" name="Slide Number Placeholder 0"/>
-          <p:cNvSpPr>
-            <a:spLocks noGrp="1"/>
-          </p:cNvSpPr>
-          <p:nvPr>
-            <p:ph type="sldNum" sz="quarter" idx="4294967295"/>
-          </p:nvPr>
-        </p:nvSpPr>
-        <p:spPr>
-          <a:xfrm>
-            <a:off x="27432" y="91440"/>
-            <a:ext cx="585216" cy="475488"/>
-          </a:xfrm>
-          <a:prstGeom prst="rect">
-            <a:avLst/>
-          </a:prstGeom>
-          <a:extLst>
-            <a:ext uri="{C572A759-6A51-4108-AA02-DFA0A04FC94B}">
-              <ma14:wrappingTextBoxFlag xmlns:ma14="http://schemas.microsoft.com/office/mac/drawingml/2011/main" val="0"/>
-            </a:ext>
-          </a:extLst>
-        </p:spPr>
-        <p:txBody>
-          <a:bodyPr/>
-          <a:lstStyle>
-            <a:lvl1pPr>
-              <a:defRPr sz="2000">
-                <a:solidFill>
-                  <a:srgbClr val="FFFFFF"/>
-                </a:solidFill>
-                <a:latin typeface="Calibri"/>
-                <a:ea typeface="Calibri"/>
-                <a:cs typeface="Calibri"/>
-              </a:defRPr>
-            </a:lvl1pPr>
-          </a:lstStyle>
-          <a:p>
-            <a:pPr algn="ctr"/>
-            <a:fld id="{F7021451-1387-4CA6-816F-3879F97B5CBC}" type="slidenum">
-              <a:rPr b="1" lang="en-US"/>
-              <a:t>5</a:t>
+              <a:t>52</a:t>
             </a:fld>
             <a:endParaRPr lang="en-US"/>
           </a:p>

--- a/lecons/F3/09_FORM4_LESSON06_Revolution_of_the_Earth.pptx
+++ b/lecons/F3/09_FORM4_LESSON06_Revolution_of_the_Earth.pptx
@@ -3457,7 +3457,7 @@
           <a:p>
             <a:r>
               <a:rPr lang="en-US" dirty="0"/>
-              <a:t>Before we start the new lesson, let us correct the homework I gave you at the end of Lesson 5: The Rotation of the Earth. The question was: Ask an elder in which months the rainy season and the dry season start in Garoua. Write the months down. Take out your exercise books.</a:t>
+              <a:t>Before we start the new lesson, let us correct the homework I gave you at the end of Lesson 5: The Rotation of the Earth. The question was: State how long the Earth takes to go around the Sun. Take out your exercise books.</a:t>
             </a:r>
             <a:endParaRPr lang="en-US" dirty="0"/>
           </a:p>
@@ -4073,7 +4073,7 @@
           <a:p>
             <a:r>
               <a:rPr lang="en-US" dirty="0"/>
-              <a:t>For your homework: Cut an orange, an onion or an egg in half. Draw what you see inside and name its layers. We shall correct it at the beginning of our next lesson.</a:t>
+              <a:t>For your homework: Name the four main layers of the Earth. We shall correct it at the beginning of our next lesson.</a:t>
             </a:r>
             <a:endParaRPr lang="en-US" dirty="0"/>
           </a:p>
@@ -4425,7 +4425,7 @@
           <a:p>
             <a:r>
               <a:rPr lang="en-US" dirty="0"/>
-              <a:t>Here is a good answer. In Garoua the rainy season starts around April–May and the dry season around October–November. Compare it with your own answer and correct your work in red.</a:t>
+              <a:t>Here is a good answer. 365¼ days (one year). Compare it with your own answer and correct your work in red.</a:t>
             </a:r>
             <a:endParaRPr lang="en-US" dirty="0"/>
           </a:p>
@@ -15276,7 +15276,7 @@
                 <a:ea typeface="Times New Roman" pitchFamily="34" charset="-122"/>
                 <a:cs typeface="Times New Roman" pitchFamily="34" charset="-120"/>
               </a:rPr>
-              <a:t>Ask an elder in which months the rainy season and the dry season start in Garoua. Write the months down.</a:t>
+              <a:t>State how long the Earth takes to go around the Sun.</a:t>
             </a:r>
             <a:endParaRPr lang="en-US" sz="4000" dirty="0"/>
           </a:p>
@@ -16931,7 +16931,7 @@
                 <a:ea typeface="Times New Roman" pitchFamily="34" charset="-122"/>
                 <a:cs typeface="Times New Roman" pitchFamily="34" charset="-120"/>
               </a:rPr>
-              <a:t>Cut an orange, an onion or an egg in half. Draw what you see inside and name its layers.</a:t>
+              <a:t>Name the four main layers of the Earth.</a:t>
             </a:r>
             <a:endParaRPr lang="en-US" sz="4000" dirty="0"/>
           </a:p>
@@ -19545,7 +19545,7 @@
                 <a:ea typeface="Times New Roman" pitchFamily="34" charset="-122"/>
                 <a:cs typeface="Times New Roman" pitchFamily="34" charset="-120"/>
               </a:rPr>
-              <a:t>In Garoua the rainy season starts around April–May and the dry season around October–November.</a:t>
+              <a:t>365¼ days (one year).</a:t>
             </a:r>
             <a:endParaRPr lang="en-US" sz="4000" dirty="0"/>
           </a:p>
@@ -20090,7 +20090,7 @@
                           <a:ea typeface="Calibri" pitchFamily="34" charset="-122"/>
                           <a:cs typeface="Calibri" pitchFamily="34" charset="-120"/>
                         </a:rPr>
-                        <a:t>Cut an orange, an onion or an egg in half. Draw what you see inside and name its layers.</a:t>
+                        <a:t>Name the four main layers of the Earth.</a:t>
                       </a:r>
                       <a:endParaRPr lang="en-US" sz="1600" dirty="0">
                         <a:latin typeface="Calibri" charset="0"/>
